--- a/modules/07-security-design/assets/security-design.pptx
+++ b/modules/07-security-design/assets/security-design.pptx
@@ -119,6 +119,1866 @@
     </a:lvl9pPr>
   </p:defaultTextStyle>
 </p:presentation>
+</file>
+
+<file path=ppt/notesMasters/notesMaster1.xml><?xml version="1.0" encoding="utf-8"?>
+<p:notesMaster xmlns:a="http://schemas.openxmlformats.org/drawingml/2006/main" xmlns:p="http://schemas.openxmlformats.org/presentationml/2006/main" xmlns:r="http://schemas.openxmlformats.org/officeDocument/2006/relationships">
+  <p:cSld>
+    <p:bg>
+      <p:bgRef idx="1001">
+        <a:schemeClr val="bg1"/>
+      </p:bgRef>
+    </p:bg>
+    <p:spTree>
+      <p:nvGrpSpPr>
+        <p:cNvPr id="1" name=""/>
+        <p:cNvGrpSpPr/>
+        <p:nvPr/>
+      </p:nvGrpSpPr>
+      <p:grpSpPr>
+        <a:xfrm>
+          <a:off x="0" y="0"/>
+          <a:ext cx="0" cy="0"/>
+          <a:chOff x="0" y="0"/>
+          <a:chExt cx="0" cy="0"/>
+        </a:xfrm>
+      </p:grpSpPr>
+      <p:sp>
+        <p:nvSpPr>
+          <p:cNvPr id="2" name="Header Placeholder 1"/>
+          <p:cNvSpPr>
+            <a:spLocks noGrp="1"/>
+          </p:cNvSpPr>
+          <p:nvPr>
+            <p:ph type="hdr" sz="quarter"/>
+          </p:nvPr>
+        </p:nvSpPr>
+        <p:spPr>
+          <a:xfrm>
+            <a:off x="0" y="0"/>
+            <a:ext cx="2971800" cy="457200"/>
+          </a:xfrm>
+          <a:prstGeom prst="rect">
+            <a:avLst/>
+          </a:prstGeom>
+        </p:spPr>
+        <p:txBody>
+          <a:bodyPr vert="horz" lIns="91440" tIns="45720" rIns="91440" bIns="45720" rtlCol="0"/>
+          <a:lstStyle>
+            <a:lvl1pPr algn="l">
+              <a:defRPr sz="1200"/>
+            </a:lvl1pPr>
+          </a:lstStyle>
+          <a:p>
+            <a:endParaRPr lang="en-US"/>
+          </a:p>
+        </p:txBody>
+      </p:sp>
+      <p:sp>
+        <p:nvSpPr>
+          <p:cNvPr id="3" name="Date Placeholder 2"/>
+          <p:cNvSpPr>
+            <a:spLocks noGrp="1"/>
+          </p:cNvSpPr>
+          <p:nvPr>
+            <p:ph type="dt" idx="1"/>
+          </p:nvPr>
+        </p:nvSpPr>
+        <p:spPr>
+          <a:xfrm>
+            <a:off x="3884613" y="0"/>
+            <a:ext cx="2971800" cy="457200"/>
+          </a:xfrm>
+          <a:prstGeom prst="rect">
+            <a:avLst/>
+          </a:prstGeom>
+        </p:spPr>
+        <p:txBody>
+          <a:bodyPr vert="horz" lIns="91440" tIns="45720" rIns="91440" bIns="45720" rtlCol="0"/>
+          <a:lstStyle>
+            <a:lvl1pPr algn="r">
+              <a:defRPr sz="1200"/>
+            </a:lvl1pPr>
+          </a:lstStyle>
+          <a:p>
+            <a:fld id="{0F89C1C7-3DCD-1040-A9CF-14679D8B5DDD}" type="datetimeFigureOut">
+              <a:rPr lang="en-US" smtClean="0"/>
+              <a:t>10/17/16</a:t>
+            </a:fld>
+            <a:endParaRPr lang="en-US"/>
+          </a:p>
+        </p:txBody>
+      </p:sp>
+      <p:sp>
+        <p:nvSpPr>
+          <p:cNvPr id="4" name="Slide Image Placeholder 3"/>
+          <p:cNvSpPr>
+            <a:spLocks noGrp="1" noRot="1" noChangeAspect="1"/>
+          </p:cNvSpPr>
+          <p:nvPr>
+            <p:ph type="sldImg" idx="2"/>
+          </p:nvPr>
+        </p:nvSpPr>
+        <p:spPr>
+          <a:xfrm>
+            <a:off x="1143000" y="685800"/>
+            <a:ext cx="4572000" cy="3429000"/>
+          </a:xfrm>
+          <a:prstGeom prst="rect">
+            <a:avLst/>
+          </a:prstGeom>
+          <a:noFill/>
+          <a:ln w="12700">
+            <a:solidFill>
+              <a:prstClr val="black"/>
+            </a:solidFill>
+          </a:ln>
+        </p:spPr>
+        <p:txBody>
+          <a:bodyPr vert="horz" lIns="91440" tIns="45720" rIns="91440" bIns="45720" rtlCol="0" anchor="ctr"/>
+          <a:lstStyle/>
+          <a:p>
+            <a:endParaRPr lang="en-US"/>
+          </a:p>
+        </p:txBody>
+      </p:sp>
+      <p:sp>
+        <p:nvSpPr>
+          <p:cNvPr id="5" name="Notes Placeholder 4"/>
+          <p:cNvSpPr>
+            <a:spLocks noGrp="1"/>
+          </p:cNvSpPr>
+          <p:nvPr>
+            <p:ph type="body" sz="quarter" idx="3"/>
+          </p:nvPr>
+        </p:nvSpPr>
+        <p:spPr>
+          <a:xfrm>
+            <a:off x="685800" y="4343400"/>
+            <a:ext cx="5486400" cy="4114800"/>
+          </a:xfrm>
+          <a:prstGeom prst="rect">
+            <a:avLst/>
+          </a:prstGeom>
+        </p:spPr>
+        <p:txBody>
+          <a:bodyPr vert="horz" lIns="91440" tIns="45720" rIns="91440" bIns="45720" rtlCol="0"/>
+          <a:lstStyle/>
+          <a:p>
+            <a:pPr lvl="0"/>
+            <a:r>
+              <a:rPr lang="en-US" smtClean="0"/>
+              <a:t>Click to edit Master text styles</a:t>
+            </a:r>
+          </a:p>
+          <a:p>
+            <a:pPr lvl="1"/>
+            <a:r>
+              <a:rPr lang="en-US" smtClean="0"/>
+              <a:t>Second level</a:t>
+            </a:r>
+          </a:p>
+          <a:p>
+            <a:pPr lvl="2"/>
+            <a:r>
+              <a:rPr lang="en-US" smtClean="0"/>
+              <a:t>Third level</a:t>
+            </a:r>
+          </a:p>
+          <a:p>
+            <a:pPr lvl="3"/>
+            <a:r>
+              <a:rPr lang="en-US" smtClean="0"/>
+              <a:t>Fourth level</a:t>
+            </a:r>
+          </a:p>
+          <a:p>
+            <a:pPr lvl="4"/>
+            <a:r>
+              <a:rPr lang="en-US" smtClean="0"/>
+              <a:t>Fifth level</a:t>
+            </a:r>
+            <a:endParaRPr lang="en-US"/>
+          </a:p>
+        </p:txBody>
+      </p:sp>
+      <p:sp>
+        <p:nvSpPr>
+          <p:cNvPr id="6" name="Footer Placeholder 5"/>
+          <p:cNvSpPr>
+            <a:spLocks noGrp="1"/>
+          </p:cNvSpPr>
+          <p:nvPr>
+            <p:ph type="ftr" sz="quarter" idx="4"/>
+          </p:nvPr>
+        </p:nvSpPr>
+        <p:spPr>
+          <a:xfrm>
+            <a:off x="0" y="8685213"/>
+            <a:ext cx="2971800" cy="457200"/>
+          </a:xfrm>
+          <a:prstGeom prst="rect">
+            <a:avLst/>
+          </a:prstGeom>
+        </p:spPr>
+        <p:txBody>
+          <a:bodyPr vert="horz" lIns="91440" tIns="45720" rIns="91440" bIns="45720" rtlCol="0" anchor="b"/>
+          <a:lstStyle>
+            <a:lvl1pPr algn="l">
+              <a:defRPr sz="1200"/>
+            </a:lvl1pPr>
+          </a:lstStyle>
+          <a:p>
+            <a:endParaRPr lang="en-US"/>
+          </a:p>
+        </p:txBody>
+      </p:sp>
+      <p:sp>
+        <p:nvSpPr>
+          <p:cNvPr id="7" name="Slide Number Placeholder 6"/>
+          <p:cNvSpPr>
+            <a:spLocks noGrp="1"/>
+          </p:cNvSpPr>
+          <p:nvPr>
+            <p:ph type="sldNum" sz="quarter" idx="5"/>
+          </p:nvPr>
+        </p:nvSpPr>
+        <p:spPr>
+          <a:xfrm>
+            <a:off x="3884613" y="8685213"/>
+            <a:ext cx="2971800" cy="457200"/>
+          </a:xfrm>
+          <a:prstGeom prst="rect">
+            <a:avLst/>
+          </a:prstGeom>
+        </p:spPr>
+        <p:txBody>
+          <a:bodyPr vert="horz" lIns="91440" tIns="45720" rIns="91440" bIns="45720" rtlCol="0" anchor="b"/>
+          <a:lstStyle>
+            <a:lvl1pPr algn="r">
+              <a:defRPr sz="1200"/>
+            </a:lvl1pPr>
+          </a:lstStyle>
+          <a:p>
+            <a:fld id="{BB5E49A5-4136-284D-997B-48E1D791AD67}" type="slidenum">
+              <a:rPr lang="en-US" smtClean="0"/>
+              <a:t>‹#›</a:t>
+            </a:fld>
+            <a:endParaRPr lang="en-US"/>
+          </a:p>
+        </p:txBody>
+      </p:sp>
+    </p:spTree>
+    <p:extLst>
+      <p:ext uri="{BB962C8B-B14F-4D97-AF65-F5344CB8AC3E}">
+        <p14:creationId xmlns:p14="http://schemas.microsoft.com/office/powerpoint/2010/main" val="2623252185"/>
+      </p:ext>
+    </p:extLst>
+  </p:cSld>
+  <p:clrMap bg1="lt1" tx1="dk1" bg2="lt2" tx2="dk2" accent1="accent1" accent2="accent2" accent3="accent3" accent4="accent4" accent5="accent5" accent6="accent6" hlink="hlink" folHlink="folHlink"/>
+  <p:notesStyle>
+    <a:lvl1pPr marL="0" algn="l" defTabSz="457200" rtl="0" eaLnBrk="1" latinLnBrk="0" hangingPunct="1">
+      <a:defRPr sz="1200" kern="1200">
+        <a:solidFill>
+          <a:schemeClr val="tx1"/>
+        </a:solidFill>
+        <a:latin typeface="+mn-lt"/>
+        <a:ea typeface="+mn-ea"/>
+        <a:cs typeface="+mn-cs"/>
+      </a:defRPr>
+    </a:lvl1pPr>
+    <a:lvl2pPr marL="457200" algn="l" defTabSz="457200" rtl="0" eaLnBrk="1" latinLnBrk="0" hangingPunct="1">
+      <a:defRPr sz="1200" kern="1200">
+        <a:solidFill>
+          <a:schemeClr val="tx1"/>
+        </a:solidFill>
+        <a:latin typeface="+mn-lt"/>
+        <a:ea typeface="+mn-ea"/>
+        <a:cs typeface="+mn-cs"/>
+      </a:defRPr>
+    </a:lvl2pPr>
+    <a:lvl3pPr marL="914400" algn="l" defTabSz="457200" rtl="0" eaLnBrk="1" latinLnBrk="0" hangingPunct="1">
+      <a:defRPr sz="1200" kern="1200">
+        <a:solidFill>
+          <a:schemeClr val="tx1"/>
+        </a:solidFill>
+        <a:latin typeface="+mn-lt"/>
+        <a:ea typeface="+mn-ea"/>
+        <a:cs typeface="+mn-cs"/>
+      </a:defRPr>
+    </a:lvl3pPr>
+    <a:lvl4pPr marL="1371600" algn="l" defTabSz="457200" rtl="0" eaLnBrk="1" latinLnBrk="0" hangingPunct="1">
+      <a:defRPr sz="1200" kern="1200">
+        <a:solidFill>
+          <a:schemeClr val="tx1"/>
+        </a:solidFill>
+        <a:latin typeface="+mn-lt"/>
+        <a:ea typeface="+mn-ea"/>
+        <a:cs typeface="+mn-cs"/>
+      </a:defRPr>
+    </a:lvl4pPr>
+    <a:lvl5pPr marL="1828800" algn="l" defTabSz="457200" rtl="0" eaLnBrk="1" latinLnBrk="0" hangingPunct="1">
+      <a:defRPr sz="1200" kern="1200">
+        <a:solidFill>
+          <a:schemeClr val="tx1"/>
+        </a:solidFill>
+        <a:latin typeface="+mn-lt"/>
+        <a:ea typeface="+mn-ea"/>
+        <a:cs typeface="+mn-cs"/>
+      </a:defRPr>
+    </a:lvl5pPr>
+    <a:lvl6pPr marL="2286000" algn="l" defTabSz="457200" rtl="0" eaLnBrk="1" latinLnBrk="0" hangingPunct="1">
+      <a:defRPr sz="1200" kern="1200">
+        <a:solidFill>
+          <a:schemeClr val="tx1"/>
+        </a:solidFill>
+        <a:latin typeface="+mn-lt"/>
+        <a:ea typeface="+mn-ea"/>
+        <a:cs typeface="+mn-cs"/>
+      </a:defRPr>
+    </a:lvl6pPr>
+    <a:lvl7pPr marL="2743200" algn="l" defTabSz="457200" rtl="0" eaLnBrk="1" latinLnBrk="0" hangingPunct="1">
+      <a:defRPr sz="1200" kern="1200">
+        <a:solidFill>
+          <a:schemeClr val="tx1"/>
+        </a:solidFill>
+        <a:latin typeface="+mn-lt"/>
+        <a:ea typeface="+mn-ea"/>
+        <a:cs typeface="+mn-cs"/>
+      </a:defRPr>
+    </a:lvl7pPr>
+    <a:lvl8pPr marL="3200400" algn="l" defTabSz="457200" rtl="0" eaLnBrk="1" latinLnBrk="0" hangingPunct="1">
+      <a:defRPr sz="1200" kern="1200">
+        <a:solidFill>
+          <a:schemeClr val="tx1"/>
+        </a:solidFill>
+        <a:latin typeface="+mn-lt"/>
+        <a:ea typeface="+mn-ea"/>
+        <a:cs typeface="+mn-cs"/>
+      </a:defRPr>
+    </a:lvl8pPr>
+    <a:lvl9pPr marL="3657600" algn="l" defTabSz="457200" rtl="0" eaLnBrk="1" latinLnBrk="0" hangingPunct="1">
+      <a:defRPr sz="1200" kern="1200">
+        <a:solidFill>
+          <a:schemeClr val="tx1"/>
+        </a:solidFill>
+        <a:latin typeface="+mn-lt"/>
+        <a:ea typeface="+mn-ea"/>
+        <a:cs typeface="+mn-cs"/>
+      </a:defRPr>
+    </a:lvl9pPr>
+  </p:notesStyle>
+</p:notesMaster>
+</file>
+
+<file path=ppt/notesSlides/notesSlide1.xml><?xml version="1.0" encoding="utf-8"?>
+<p:notes xmlns:a="http://schemas.openxmlformats.org/drawingml/2006/main" xmlns:p="http://schemas.openxmlformats.org/presentationml/2006/main" xmlns:r="http://schemas.openxmlformats.org/officeDocument/2006/relationships">
+  <p:cSld>
+    <p:spTree>
+      <p:nvGrpSpPr>
+        <p:cNvPr id="1" name=""/>
+        <p:cNvGrpSpPr/>
+        <p:nvPr/>
+      </p:nvGrpSpPr>
+      <p:grpSpPr>
+        <a:xfrm>
+          <a:off x="0" y="0"/>
+          <a:ext cx="0" cy="0"/>
+          <a:chOff x="0" y="0"/>
+          <a:chExt cx="0" cy="0"/>
+        </a:xfrm>
+      </p:grpSpPr>
+      <p:sp>
+        <p:nvSpPr>
+          <p:cNvPr id="2" name="Slide Image Placeholder 1"/>
+          <p:cNvSpPr>
+            <a:spLocks noGrp="1"/>
+          </p:cNvSpPr>
+          <p:nvPr>
+            <p:ph type="sldImg" idx="2"/>
+          </p:nvPr>
+        </p:nvSpPr>
+        <p:spPr/>
+      </p:sp>
+      <p:sp>
+        <p:nvSpPr>
+          <p:cNvPr id="3" name="Notes Placeholder 2"/>
+          <p:cNvSpPr>
+            <a:spLocks noGrp="1"/>
+          </p:cNvSpPr>
+          <p:nvPr>
+            <p:ph type="body" idx="3" sz="quarter"/>
+          </p:nvPr>
+        </p:nvSpPr>
+        <p:spPr/>
+        <p:txBody>
+          <a:bodyPr/>
+          <a:lstStyle/>
+          <a:p>
+            <a:r>
+              <a:t>Opening talk track: Welcome students to this module and explain that the goal is not to memorize features. The goal is to understand when a pattern helps authors build more trustworthy, maintainable, user-friendly Power BI solutions.</a:t>
+            </a:r>
+          </a:p>
+          <a:p>
+            <a:r>
+              <a:t>Module framing: Frame this module as intentional access design. Security depends on model relationships, role logic, and testing evidence.</a:t>
+            </a:r>
+          </a:p>
+          <a:p>
+            <a:r>
+              <a:t>Set expectations: presentation will introduce the theme, then the lab will let learners build or evaluate the pattern hands-on. Encourage questions about tradeoffs, not just button clicks.</a:t>
+            </a:r>
+          </a:p>
+          <a:p>
+            <a:r>
+              <a:t>Further learning: Row-level security: https://learn.microsoft.com/fabric/security/service-admin-row-level-security | Power BI security whitepaper/guidance: https://learn.microsoft.com/power-bi/guidance/powerbi-implementation-planning-security | Sensitivity labels: https://learn.microsoft.com/power-bi/enterprise/service-security-sensitivity-label-overview</a:t>
+            </a:r>
+          </a:p>
+        </p:txBody>
+      </p:sp>
+      <p:sp>
+        <p:nvSpPr>
+          <p:cNvPr id="4" name="Slide Number Placeholder 3"/>
+          <p:cNvSpPr>
+            <a:spLocks noGrp="1"/>
+          </p:cNvSpPr>
+          <p:nvPr>
+            <p:ph type="sldNum" idx="5" sz="quarter"/>
+          </p:nvPr>
+        </p:nvSpPr>
+        <p:spPr/>
+      </p:sp>
+    </p:spTree>
+  </p:cSld>
+  <p:clrMapOvr>
+    <a:masterClrMapping/>
+  </p:clrMapOvr>
+</p:notes>
+</file>
+
+<file path=ppt/notesSlides/notesSlide10.xml><?xml version="1.0" encoding="utf-8"?>
+<p:notes xmlns:a="http://schemas.openxmlformats.org/drawingml/2006/main" xmlns:p="http://schemas.openxmlformats.org/presentationml/2006/main" xmlns:r="http://schemas.openxmlformats.org/officeDocument/2006/relationships">
+  <p:cSld>
+    <p:spTree>
+      <p:nvGrpSpPr>
+        <p:cNvPr id="1" name=""/>
+        <p:cNvGrpSpPr/>
+        <p:nvPr/>
+      </p:nvGrpSpPr>
+      <p:grpSpPr>
+        <a:xfrm>
+          <a:off x="0" y="0"/>
+          <a:ext cx="0" cy="0"/>
+          <a:chOff x="0" y="0"/>
+          <a:chExt cx="0" cy="0"/>
+        </a:xfrm>
+      </p:grpSpPr>
+      <p:sp>
+        <p:nvSpPr>
+          <p:cNvPr id="2" name="Slide Image Placeholder 1"/>
+          <p:cNvSpPr>
+            <a:spLocks noGrp="1"/>
+          </p:cNvSpPr>
+          <p:nvPr>
+            <p:ph type="sldImg" idx="2"/>
+          </p:nvPr>
+        </p:nvSpPr>
+        <p:spPr/>
+      </p:sp>
+      <p:sp>
+        <p:nvSpPr>
+          <p:cNvPr id="3" name="Notes Placeholder 2"/>
+          <p:cNvSpPr>
+            <a:spLocks noGrp="1"/>
+          </p:cNvSpPr>
+          <p:nvPr>
+            <p:ph type="body" idx="3" sz="quarter"/>
+          </p:nvPr>
+        </p:nvSpPr>
+        <p:spPr/>
+        <p:txBody>
+          <a:bodyPr/>
+          <a:lstStyle/>
+          <a:p>
+            <a:r>
+              <a:t>Core message: 8. Sensitivity labels and Purview.</a:t>
+            </a:r>
+          </a:p>
+          <a:p>
+            <a:r>
+              <a:t>Talking points to expand: Talking points, learner value, and lab connection Talking points • Label inheritance • Export controls Why it helps • MIP/Purview setup • Tenant policy dependency Lab connection Coverage: Covered. Use the lab README to demonstrate or discuss this topic. Review terms: dependency, setup. 10</a:t>
+            </a:r>
+          </a:p>
+          <a:p>
+            <a:r>
+              <a:t>Why it matters: Frame this module as intentional access design. Security depends on model relationships, role logic, and testing evidence.</a:t>
+            </a:r>
+          </a:p>
+          <a:p>
+            <a:r>
+              <a:t>How it helps users: connect the technical pattern to clearer decisions, fewer confusing report interactions, better trust in results, or easier support.</a:t>
+            </a:r>
+          </a:p>
+          <a:p>
+            <a:r>
+              <a:t>How it builds on prior lessons: reference the previous layer in the workshop, such as prepared data, a clean model, tested measures, or report UX conventions.</a:t>
+            </a:r>
+          </a:p>
+          <a:p>
+            <a:r>
+              <a:t>Lab connection: Show where this concept appears in the module lab. If the lab path is conceptual or Verify for Gov, explain what learners should document instead of building hands-on.</a:t>
+            </a:r>
+          </a:p>
+          <a:p>
+            <a:r>
+              <a:t>Instructor prompt: Ask one learner to describe the risk of skipping this pattern or using it without validation.</a:t>
+            </a:r>
+          </a:p>
+          <a:p>
+            <a:r>
+              <a:t>Further learning: Row-level security: https://learn.microsoft.com/fabric/security/service-admin-row-level-security | Power BI security whitepaper/guidance: https://learn.microsoft.com/power-bi/guidance/powerbi-implementation-planning-security | Sensitivity labels: https://learn.microsoft.com/power-bi/enterprise/service-security-sensitivity-label-overview</a:t>
+            </a:r>
+          </a:p>
+        </p:txBody>
+      </p:sp>
+      <p:sp>
+        <p:nvSpPr>
+          <p:cNvPr id="4" name="Slide Number Placeholder 3"/>
+          <p:cNvSpPr>
+            <a:spLocks noGrp="1"/>
+          </p:cNvSpPr>
+          <p:nvPr>
+            <p:ph type="sldNum" idx="5" sz="quarter"/>
+          </p:nvPr>
+        </p:nvSpPr>
+        <p:spPr/>
+      </p:sp>
+    </p:spTree>
+  </p:cSld>
+  <p:clrMapOvr>
+    <a:masterClrMapping/>
+  </p:clrMapOvr>
+</p:notes>
+</file>
+
+<file path=ppt/notesSlides/notesSlide11.xml><?xml version="1.0" encoding="utf-8"?>
+<p:notes xmlns:a="http://schemas.openxmlformats.org/drawingml/2006/main" xmlns:p="http://schemas.openxmlformats.org/presentationml/2006/main" xmlns:r="http://schemas.openxmlformats.org/officeDocument/2006/relationships">
+  <p:cSld>
+    <p:spTree>
+      <p:nvGrpSpPr>
+        <p:cNvPr id="1" name=""/>
+        <p:cNvGrpSpPr/>
+        <p:nvPr/>
+      </p:nvGrpSpPr>
+      <p:grpSpPr>
+        <a:xfrm>
+          <a:off x="0" y="0"/>
+          <a:ext cx="0" cy="0"/>
+          <a:chOff x="0" y="0"/>
+          <a:chExt cx="0" cy="0"/>
+        </a:xfrm>
+      </p:grpSpPr>
+      <p:sp>
+        <p:nvSpPr>
+          <p:cNvPr id="2" name="Slide Image Placeholder 1"/>
+          <p:cNvSpPr>
+            <a:spLocks noGrp="1"/>
+          </p:cNvSpPr>
+          <p:nvPr>
+            <p:ph type="sldImg" idx="2"/>
+          </p:nvPr>
+        </p:nvSpPr>
+        <p:spPr/>
+      </p:sp>
+      <p:sp>
+        <p:nvSpPr>
+          <p:cNvPr id="3" name="Notes Placeholder 2"/>
+          <p:cNvSpPr>
+            <a:spLocks noGrp="1"/>
+          </p:cNvSpPr>
+          <p:nvPr>
+            <p:ph type="body" idx="3" sz="quarter"/>
+          </p:nvPr>
+        </p:nvSpPr>
+        <p:spPr/>
+        <p:txBody>
+          <a:bodyPr/>
+          <a:lstStyle/>
+          <a:p>
+            <a:r>
+              <a:t>Core message: 9. Sharing and external users.</a:t>
+            </a:r>
+          </a:p>
+          <a:p>
+            <a:r>
+              <a:t>Talking points to expand: Talking points, learner value, and lab connection Talking points • Direct sharing • Apps • Workspace access Why it helps • B2B and guest users • Gov restrictions Lab connection Coverage: Partial. Use the lab README to demonstrate or discuss this topic. Review terms: direct, guest, restrictions, workspace. 11</a:t>
+            </a:r>
+          </a:p>
+          <a:p>
+            <a:r>
+              <a:t>Why it matters: Frame this module as intentional access design. Security depends on model relationships, role logic, and testing evidence.</a:t>
+            </a:r>
+          </a:p>
+          <a:p>
+            <a:r>
+              <a:t>How it helps users: connect the technical pattern to clearer decisions, fewer confusing report interactions, better trust in results, or easier support.</a:t>
+            </a:r>
+          </a:p>
+          <a:p>
+            <a:r>
+              <a:t>How it builds on prior lessons: reference the previous layer in the workshop, such as prepared data, a clean model, tested measures, or report UX conventions.</a:t>
+            </a:r>
+          </a:p>
+          <a:p>
+            <a:r>
+              <a:t>Lab connection: Show where this concept appears in the module lab. If the lab path is conceptual or Verify for Gov, explain what learners should document instead of building hands-on.</a:t>
+            </a:r>
+          </a:p>
+          <a:p>
+            <a:r>
+              <a:t>Instructor prompt: Ask one learner to describe the risk of skipping this pattern or using it without validation.</a:t>
+            </a:r>
+          </a:p>
+          <a:p>
+            <a:r>
+              <a:t>Further learning: Row-level security: https://learn.microsoft.com/fabric/security/service-admin-row-level-security | Power BI security whitepaper/guidance: https://learn.microsoft.com/power-bi/guidance/powerbi-implementation-planning-security | Sensitivity labels: https://learn.microsoft.com/power-bi/enterprise/service-security-sensitivity-label-overview</a:t>
+            </a:r>
+          </a:p>
+        </p:txBody>
+      </p:sp>
+      <p:sp>
+        <p:nvSpPr>
+          <p:cNvPr id="4" name="Slide Number Placeholder 3"/>
+          <p:cNvSpPr>
+            <a:spLocks noGrp="1"/>
+          </p:cNvSpPr>
+          <p:nvPr>
+            <p:ph type="sldNum" idx="5" sz="quarter"/>
+          </p:nvPr>
+        </p:nvSpPr>
+        <p:spPr/>
+      </p:sp>
+    </p:spTree>
+  </p:cSld>
+  <p:clrMapOvr>
+    <a:masterClrMapping/>
+  </p:clrMapOvr>
+</p:notes>
+</file>
+
+<file path=ppt/notesSlides/notesSlide12.xml><?xml version="1.0" encoding="utf-8"?>
+<p:notes xmlns:a="http://schemas.openxmlformats.org/drawingml/2006/main" xmlns:p="http://schemas.openxmlformats.org/presentationml/2006/main" xmlns:r="http://schemas.openxmlformats.org/officeDocument/2006/relationships">
+  <p:cSld>
+    <p:spTree>
+      <p:nvGrpSpPr>
+        <p:cNvPr id="1" name=""/>
+        <p:cNvGrpSpPr/>
+        <p:nvPr/>
+      </p:nvGrpSpPr>
+      <p:grpSpPr>
+        <a:xfrm>
+          <a:off x="0" y="0"/>
+          <a:ext cx="0" cy="0"/>
+          <a:chOff x="0" y="0"/>
+          <a:chExt cx="0" cy="0"/>
+        </a:xfrm>
+      </p:grpSpPr>
+      <p:sp>
+        <p:nvSpPr>
+          <p:cNvPr id="2" name="Slide Image Placeholder 1"/>
+          <p:cNvSpPr>
+            <a:spLocks noGrp="1"/>
+          </p:cNvSpPr>
+          <p:nvPr>
+            <p:ph type="sldImg" idx="2"/>
+          </p:nvPr>
+        </p:nvSpPr>
+        <p:spPr/>
+      </p:sp>
+      <p:sp>
+        <p:nvSpPr>
+          <p:cNvPr id="3" name="Notes Placeholder 2"/>
+          <p:cNvSpPr>
+            <a:spLocks noGrp="1"/>
+          </p:cNvSpPr>
+          <p:nvPr>
+            <p:ph type="body" idx="3" sz="quarter"/>
+          </p:nvPr>
+        </p:nvSpPr>
+        <p:spPr/>
+        <p:txBody>
+          <a:bodyPr/>
+          <a:lstStyle/>
+          <a:p>
+            <a:r>
+              <a:t>Core message: 10. Security testing.</a:t>
+            </a:r>
+          </a:p>
+          <a:p>
+            <a:r>
+              <a:t>Talking points to expand: Talking points, learner value, and lab connection Talking points • Test as role • Test users • Group membership Why it helps • Negative testing • Documentation Lab connection Coverage: Covered. Use the lab README to demonstrate or discuss this topic. Review terms: documentation, membership, negative. 12</a:t>
+            </a:r>
+          </a:p>
+          <a:p>
+            <a:r>
+              <a:t>Why it matters: Frame this module as intentional access design. Security depends on model relationships, role logic, and testing evidence.</a:t>
+            </a:r>
+          </a:p>
+          <a:p>
+            <a:r>
+              <a:t>How it helps users: connect the technical pattern to clearer decisions, fewer confusing report interactions, better trust in results, or easier support.</a:t>
+            </a:r>
+          </a:p>
+          <a:p>
+            <a:r>
+              <a:t>How it builds on prior lessons: reference the previous layer in the workshop, such as prepared data, a clean model, tested measures, or report UX conventions.</a:t>
+            </a:r>
+          </a:p>
+          <a:p>
+            <a:r>
+              <a:t>Lab connection: Show where this concept appears in the module lab. If the lab path is conceptual or Verify for Gov, explain what learners should document instead of building hands-on.</a:t>
+            </a:r>
+          </a:p>
+          <a:p>
+            <a:r>
+              <a:t>Instructor prompt: Ask one learner to describe the risk of skipping this pattern or using it without validation.</a:t>
+            </a:r>
+          </a:p>
+          <a:p>
+            <a:r>
+              <a:t>Further learning: Row-level security: https://learn.microsoft.com/fabric/security/service-admin-row-level-security | Power BI security whitepaper/guidance: https://learn.microsoft.com/power-bi/guidance/powerbi-implementation-planning-security | Sensitivity labels: https://learn.microsoft.com/power-bi/enterprise/service-security-sensitivity-label-overview</a:t>
+            </a:r>
+          </a:p>
+        </p:txBody>
+      </p:sp>
+      <p:sp>
+        <p:nvSpPr>
+          <p:cNvPr id="4" name="Slide Number Placeholder 3"/>
+          <p:cNvSpPr>
+            <a:spLocks noGrp="1"/>
+          </p:cNvSpPr>
+          <p:nvPr>
+            <p:ph type="sldNum" idx="5" sz="quarter"/>
+          </p:nvPr>
+        </p:nvSpPr>
+        <p:spPr/>
+      </p:sp>
+    </p:spTree>
+  </p:cSld>
+  <p:clrMapOvr>
+    <a:masterClrMapping/>
+  </p:clrMapOvr>
+</p:notes>
+</file>
+
+<file path=ppt/notesSlides/notesSlide13.xml><?xml version="1.0" encoding="utf-8"?>
+<p:notes xmlns:a="http://schemas.openxmlformats.org/drawingml/2006/main" xmlns:p="http://schemas.openxmlformats.org/presentationml/2006/main" xmlns:r="http://schemas.openxmlformats.org/officeDocument/2006/relationships">
+  <p:cSld>
+    <p:spTree>
+      <p:nvGrpSpPr>
+        <p:cNvPr id="1" name=""/>
+        <p:cNvGrpSpPr/>
+        <p:nvPr/>
+      </p:nvGrpSpPr>
+      <p:grpSpPr>
+        <a:xfrm>
+          <a:off x="0" y="0"/>
+          <a:ext cx="0" cy="0"/>
+          <a:chOff x="0" y="0"/>
+          <a:chExt cx="0" cy="0"/>
+        </a:xfrm>
+      </p:grpSpPr>
+      <p:sp>
+        <p:nvSpPr>
+          <p:cNvPr id="2" name="Slide Image Placeholder 1"/>
+          <p:cNvSpPr>
+            <a:spLocks noGrp="1"/>
+          </p:cNvSpPr>
+          <p:nvPr>
+            <p:ph type="sldImg" idx="2"/>
+          </p:nvPr>
+        </p:nvSpPr>
+        <p:spPr/>
+      </p:sp>
+      <p:sp>
+        <p:nvSpPr>
+          <p:cNvPr id="3" name="Notes Placeholder 2"/>
+          <p:cNvSpPr>
+            <a:spLocks noGrp="1"/>
+          </p:cNvSpPr>
+          <p:nvPr>
+            <p:ph type="body" idx="3" sz="quarter"/>
+          </p:nvPr>
+        </p:nvSpPr>
+        <p:spPr/>
+        <p:txBody>
+          <a:bodyPr/>
+          <a:lstStyle/>
+          <a:p>
+            <a:r>
+              <a:t>Core message: 11. Azure Government considerations.</a:t>
+            </a:r>
+          </a:p>
+          <a:p>
+            <a:r>
+              <a:t>Talking points to expand: Talking points, learner value, and lab connection Talking points • RLS is Gov-ready. • OLS, labels, Purview, external sharing, and B2B require validation. Why it helps • Customer policy may be stricter than platform capability. Lab connection Coverage: Covered. Use the lab README to demonstrate or discuss this topic. Review terms: capability, considerations, platform, stricter. 13</a:t>
+            </a:r>
+          </a:p>
+          <a:p>
+            <a:r>
+              <a:t>Why it matters: Frame this module as intentional access design. Security depends on model relationships, role logic, and testing evidence.</a:t>
+            </a:r>
+          </a:p>
+          <a:p>
+            <a:r>
+              <a:t>How it helps users: connect the technical pattern to clearer decisions, fewer confusing report interactions, better trust in results, or easier support.</a:t>
+            </a:r>
+          </a:p>
+          <a:p>
+            <a:r>
+              <a:t>How it builds on prior lessons: reference the previous layer in the workshop, such as prepared data, a clean model, tested measures, or report UX conventions.</a:t>
+            </a:r>
+          </a:p>
+          <a:p>
+            <a:r>
+              <a:t>Lab connection: Show where this concept appears in the module lab. If the lab path is conceptual or Verify for Gov, explain what learners should document instead of building hands-on.</a:t>
+            </a:r>
+          </a:p>
+          <a:p>
+            <a:r>
+              <a:t>Instructor prompt: Ask one learner to describe the risk of skipping this pattern or using it without validation.</a:t>
+            </a:r>
+          </a:p>
+          <a:p>
+            <a:r>
+              <a:t>Further learning: Row-level security: https://learn.microsoft.com/fabric/security/service-admin-row-level-security | Power BI security whitepaper/guidance: https://learn.microsoft.com/power-bi/guidance/powerbi-implementation-planning-security | Sensitivity labels: https://learn.microsoft.com/power-bi/enterprise/service-security-sensitivity-label-overview</a:t>
+            </a:r>
+          </a:p>
+        </p:txBody>
+      </p:sp>
+      <p:sp>
+        <p:nvSpPr>
+          <p:cNvPr id="4" name="Slide Number Placeholder 3"/>
+          <p:cNvSpPr>
+            <a:spLocks noGrp="1"/>
+          </p:cNvSpPr>
+          <p:nvPr>
+            <p:ph type="sldNum" idx="5" sz="quarter"/>
+          </p:nvPr>
+        </p:nvSpPr>
+        <p:spPr/>
+      </p:sp>
+    </p:spTree>
+  </p:cSld>
+  <p:clrMapOvr>
+    <a:masterClrMapping/>
+  </p:clrMapOvr>
+</p:notes>
+</file>
+
+<file path=ppt/notesSlides/notesSlide14.xml><?xml version="1.0" encoding="utf-8"?>
+<p:notes xmlns:a="http://schemas.openxmlformats.org/drawingml/2006/main" xmlns:p="http://schemas.openxmlformats.org/presentationml/2006/main" xmlns:r="http://schemas.openxmlformats.org/officeDocument/2006/relationships">
+  <p:cSld>
+    <p:spTree>
+      <p:nvGrpSpPr>
+        <p:cNvPr id="1" name=""/>
+        <p:cNvGrpSpPr/>
+        <p:nvPr/>
+      </p:nvGrpSpPr>
+      <p:grpSpPr>
+        <a:xfrm>
+          <a:off x="0" y="0"/>
+          <a:ext cx="0" cy="0"/>
+          <a:chOff x="0" y="0"/>
+          <a:chExt cx="0" cy="0"/>
+        </a:xfrm>
+      </p:grpSpPr>
+      <p:sp>
+        <p:nvSpPr>
+          <p:cNvPr id="2" name="Slide Image Placeholder 1"/>
+          <p:cNvSpPr>
+            <a:spLocks noGrp="1"/>
+          </p:cNvSpPr>
+          <p:nvPr>
+            <p:ph type="sldImg" idx="2"/>
+          </p:nvPr>
+        </p:nvSpPr>
+        <p:spPr/>
+      </p:sp>
+      <p:sp>
+        <p:nvSpPr>
+          <p:cNvPr id="3" name="Notes Placeholder 2"/>
+          <p:cNvSpPr>
+            <a:spLocks noGrp="1"/>
+          </p:cNvSpPr>
+          <p:nvPr>
+            <p:ph type="body" idx="3" sz="quarter"/>
+          </p:nvPr>
+        </p:nvSpPr>
+        <p:spPr/>
+        <p:txBody>
+          <a:bodyPr/>
+          <a:lstStyle/>
+          <a:p>
+            <a:r>
+              <a:t>Core message: 12. Security review checklist.</a:t>
+            </a:r>
+          </a:p>
+          <a:p>
+            <a:r>
+              <a:t>Talking points to expand: Talking points, learner value, and lab connection Talking points • Access path • Data filter path • Export behavior Why it helps • Build permission • Validation evidence Lab connection Coverage: Covered. Use the lab README to demonstrate or discuss this topic. Review terms: evidence. 14</a:t>
+            </a:r>
+          </a:p>
+          <a:p>
+            <a:r>
+              <a:t>Why it matters: Frame this module as intentional access design. Security depends on model relationships, role logic, and testing evidence.</a:t>
+            </a:r>
+          </a:p>
+          <a:p>
+            <a:r>
+              <a:t>How it helps users: connect the technical pattern to clearer decisions, fewer confusing report interactions, better trust in results, or easier support.</a:t>
+            </a:r>
+          </a:p>
+          <a:p>
+            <a:r>
+              <a:t>How it builds on prior lessons: reference the previous layer in the workshop, such as prepared data, a clean model, tested measures, or report UX conventions.</a:t>
+            </a:r>
+          </a:p>
+          <a:p>
+            <a:r>
+              <a:t>Lab connection: Show where this concept appears in the module lab. If the lab path is conceptual or Verify for Gov, explain what learners should document instead of building hands-on.</a:t>
+            </a:r>
+          </a:p>
+          <a:p>
+            <a:r>
+              <a:t>Instructor prompt: Ask one learner to describe the risk of skipping this pattern or using it without validation.</a:t>
+            </a:r>
+          </a:p>
+          <a:p>
+            <a:r>
+              <a:t>Further learning: Row-level security: https://learn.microsoft.com/fabric/security/service-admin-row-level-security | Power BI security whitepaper/guidance: https://learn.microsoft.com/power-bi/guidance/powerbi-implementation-planning-security | Sensitivity labels: https://learn.microsoft.com/power-bi/enterprise/service-security-sensitivity-label-overview</a:t>
+            </a:r>
+          </a:p>
+        </p:txBody>
+      </p:sp>
+      <p:sp>
+        <p:nvSpPr>
+          <p:cNvPr id="4" name="Slide Number Placeholder 3"/>
+          <p:cNvSpPr>
+            <a:spLocks noGrp="1"/>
+          </p:cNvSpPr>
+          <p:nvPr>
+            <p:ph type="sldNum" idx="5" sz="quarter"/>
+          </p:nvPr>
+        </p:nvSpPr>
+        <p:spPr/>
+      </p:sp>
+    </p:spTree>
+  </p:cSld>
+  <p:clrMapOvr>
+    <a:masterClrMapping/>
+  </p:clrMapOvr>
+</p:notes>
+</file>
+
+<file path=ppt/notesSlides/notesSlide15.xml><?xml version="1.0" encoding="utf-8"?>
+<p:notes xmlns:a="http://schemas.openxmlformats.org/drawingml/2006/main" xmlns:p="http://schemas.openxmlformats.org/presentationml/2006/main" xmlns:r="http://schemas.openxmlformats.org/officeDocument/2006/relationships">
+  <p:cSld>
+    <p:spTree>
+      <p:nvGrpSpPr>
+        <p:cNvPr id="1" name=""/>
+        <p:cNvGrpSpPr/>
+        <p:nvPr/>
+      </p:nvGrpSpPr>
+      <p:grpSpPr>
+        <a:xfrm>
+          <a:off x="0" y="0"/>
+          <a:ext cx="0" cy="0"/>
+          <a:chOff x="0" y="0"/>
+          <a:chExt cx="0" cy="0"/>
+        </a:xfrm>
+      </p:grpSpPr>
+      <p:sp>
+        <p:nvSpPr>
+          <p:cNvPr id="2" name="Slide Image Placeholder 1"/>
+          <p:cNvSpPr>
+            <a:spLocks noGrp="1"/>
+          </p:cNvSpPr>
+          <p:nvPr>
+            <p:ph type="sldImg" idx="2"/>
+          </p:nvPr>
+        </p:nvSpPr>
+        <p:spPr/>
+      </p:sp>
+      <p:sp>
+        <p:nvSpPr>
+          <p:cNvPr id="3" name="Notes Placeholder 2"/>
+          <p:cNvSpPr>
+            <a:spLocks noGrp="1"/>
+          </p:cNvSpPr>
+          <p:nvPr>
+            <p:ph type="body" idx="3" sz="quarter"/>
+          </p:nvPr>
+        </p:nvSpPr>
+        <p:spPr/>
+        <p:txBody>
+          <a:bodyPr/>
+          <a:lstStyle/>
+          <a:p>
+            <a:r>
+              <a:t>Speaker guidance: Use this slide as the handoff for self-study. Do not read every link aloud. Point out which source is most relevant to the lab just completed and which source helps learners go deeper after class.</a:t>
+            </a:r>
+          </a:p>
+          <a:p>
+            <a:r>
+              <a:t>Suggested prompt: Ask learners to bookmark the source that best matches the skill they want to improve next.</a:t>
+            </a:r>
+          </a:p>
+          <a:p>
+            <a:r>
+              <a:t>Further learning: Row-level security: https://learn.microsoft.com/fabric/security/service-admin-row-level-security | Power BI security whitepaper/guidance: https://learn.microsoft.com/power-bi/guidance/powerbi-implementation-planning-security | Sensitivity labels: https://learn.microsoft.com/power-bi/enterprise/service-security-sensitivity-label-overview</a:t>
+            </a:r>
+          </a:p>
+        </p:txBody>
+      </p:sp>
+      <p:sp>
+        <p:nvSpPr>
+          <p:cNvPr id="4" name="Slide Number Placeholder 3"/>
+          <p:cNvSpPr>
+            <a:spLocks noGrp="1"/>
+          </p:cNvSpPr>
+          <p:nvPr>
+            <p:ph type="sldNum" idx="5" sz="quarter"/>
+          </p:nvPr>
+        </p:nvSpPr>
+        <p:spPr/>
+      </p:sp>
+    </p:spTree>
+  </p:cSld>
+  <p:clrMapOvr>
+    <a:masterClrMapping/>
+  </p:clrMapOvr>
+</p:notes>
+</file>
+
+<file path=ppt/notesSlides/notesSlide2.xml><?xml version="1.0" encoding="utf-8"?>
+<p:notes xmlns:a="http://schemas.openxmlformats.org/drawingml/2006/main" xmlns:p="http://schemas.openxmlformats.org/presentationml/2006/main" xmlns:r="http://schemas.openxmlformats.org/officeDocument/2006/relationships">
+  <p:cSld>
+    <p:spTree>
+      <p:nvGrpSpPr>
+        <p:cNvPr id="1" name=""/>
+        <p:cNvGrpSpPr/>
+        <p:nvPr/>
+      </p:nvGrpSpPr>
+      <p:grpSpPr>
+        <a:xfrm>
+          <a:off x="0" y="0"/>
+          <a:ext cx="0" cy="0"/>
+          <a:chOff x="0" y="0"/>
+          <a:chExt cx="0" cy="0"/>
+        </a:xfrm>
+      </p:grpSpPr>
+      <p:sp>
+        <p:nvSpPr>
+          <p:cNvPr id="2" name="Slide Image Placeholder 1"/>
+          <p:cNvSpPr>
+            <a:spLocks noGrp="1"/>
+          </p:cNvSpPr>
+          <p:nvPr>
+            <p:ph type="sldImg" idx="2"/>
+          </p:nvPr>
+        </p:nvSpPr>
+        <p:spPr/>
+      </p:sp>
+      <p:sp>
+        <p:nvSpPr>
+          <p:cNvPr id="3" name="Notes Placeholder 2"/>
+          <p:cNvSpPr>
+            <a:spLocks noGrp="1"/>
+          </p:cNvSpPr>
+          <p:nvPr>
+            <p:ph type="body" idx="3" sz="quarter"/>
+          </p:nvPr>
+        </p:nvSpPr>
+        <p:spPr/>
+        <p:txBody>
+          <a:bodyPr/>
+          <a:lstStyle/>
+          <a:p>
+            <a:r>
+              <a:t>Speaker guidance: Emphasize sequence and dependency. Explain what students should already know from prior modules and what this module adds on top.</a:t>
+            </a:r>
+          </a:p>
+          <a:p>
+            <a:r>
+              <a:t>Module framing: Frame this module as intentional access design. Security depends on model relationships, role logic, and testing evidence.</a:t>
+            </a:r>
+          </a:p>
+          <a:p>
+            <a:r>
+              <a:t>Transition: After this slide, move from the concept map into the specific pattern or lab activity.</a:t>
+            </a:r>
+          </a:p>
+          <a:p>
+            <a:r>
+              <a:t>Further learning: Row-level security: https://learn.microsoft.com/fabric/security/service-admin-row-level-security | Power BI security whitepaper/guidance: https://learn.microsoft.com/power-bi/guidance/powerbi-implementation-planning-security | Sensitivity labels: https://learn.microsoft.com/power-bi/enterprise/service-security-sensitivity-label-overview</a:t>
+            </a:r>
+          </a:p>
+        </p:txBody>
+      </p:sp>
+      <p:sp>
+        <p:nvSpPr>
+          <p:cNvPr id="4" name="Slide Number Placeholder 3"/>
+          <p:cNvSpPr>
+            <a:spLocks noGrp="1"/>
+          </p:cNvSpPr>
+          <p:nvPr>
+            <p:ph type="sldNum" idx="5" sz="quarter"/>
+          </p:nvPr>
+        </p:nvSpPr>
+        <p:spPr/>
+      </p:sp>
+    </p:spTree>
+  </p:cSld>
+  <p:clrMapOvr>
+    <a:masterClrMapping/>
+  </p:clrMapOvr>
+</p:notes>
+</file>
+
+<file path=ppt/notesSlides/notesSlide3.xml><?xml version="1.0" encoding="utf-8"?>
+<p:notes xmlns:a="http://schemas.openxmlformats.org/drawingml/2006/main" xmlns:p="http://schemas.openxmlformats.org/presentationml/2006/main" xmlns:r="http://schemas.openxmlformats.org/officeDocument/2006/relationships">
+  <p:cSld>
+    <p:spTree>
+      <p:nvGrpSpPr>
+        <p:cNvPr id="1" name=""/>
+        <p:cNvGrpSpPr/>
+        <p:nvPr/>
+      </p:nvGrpSpPr>
+      <p:grpSpPr>
+        <a:xfrm>
+          <a:off x="0" y="0"/>
+          <a:ext cx="0" cy="0"/>
+          <a:chOff x="0" y="0"/>
+          <a:chExt cx="0" cy="0"/>
+        </a:xfrm>
+      </p:grpSpPr>
+      <p:sp>
+        <p:nvSpPr>
+          <p:cNvPr id="2" name="Slide Image Placeholder 1"/>
+          <p:cNvSpPr>
+            <a:spLocks noGrp="1"/>
+          </p:cNvSpPr>
+          <p:nvPr>
+            <p:ph type="sldImg" idx="2"/>
+          </p:nvPr>
+        </p:nvSpPr>
+        <p:spPr/>
+      </p:sp>
+      <p:sp>
+        <p:nvSpPr>
+          <p:cNvPr id="3" name="Notes Placeholder 2"/>
+          <p:cNvSpPr>
+            <a:spLocks noGrp="1"/>
+          </p:cNvSpPr>
+          <p:nvPr>
+            <p:ph type="body" idx="3" sz="quarter"/>
+          </p:nvPr>
+        </p:nvSpPr>
+        <p:spPr/>
+        <p:txBody>
+          <a:bodyPr/>
+          <a:lstStyle/>
+          <a:p>
+            <a:r>
+              <a:t>Core message: 1. Power BI security layers.</a:t>
+            </a:r>
+          </a:p>
+          <a:p>
+            <a:r>
+              <a:t>Talking points to expand: Talking points, learner value, and lab connection Talking points • Tenant settings • Workspace roles • App audiences Why it helps • Sharing links • Build permission Lab connection Coverage: Covered. Use the lab README to demonstrate or discuss this topic. Review terms: audiences, layers, links, workspace. 03</a:t>
+            </a:r>
+          </a:p>
+          <a:p>
+            <a:r>
+              <a:t>Why it matters: Frame this module as intentional access design. Security depends on model relationships, role logic, and testing evidence.</a:t>
+            </a:r>
+          </a:p>
+          <a:p>
+            <a:r>
+              <a:t>How it helps users: connect the technical pattern to clearer decisions, fewer confusing report interactions, better trust in results, or easier support.</a:t>
+            </a:r>
+          </a:p>
+          <a:p>
+            <a:r>
+              <a:t>How it builds on prior lessons: reference the previous layer in the workshop, such as prepared data, a clean model, tested measures, or report UX conventions.</a:t>
+            </a:r>
+          </a:p>
+          <a:p>
+            <a:r>
+              <a:t>Lab connection: Show where this concept appears in the module lab. If the lab path is conceptual or Verify for Gov, explain what learners should document instead of building hands-on.</a:t>
+            </a:r>
+          </a:p>
+          <a:p>
+            <a:r>
+              <a:t>Instructor prompt: Ask one learner to describe the risk of skipping this pattern or using it without validation.</a:t>
+            </a:r>
+          </a:p>
+          <a:p>
+            <a:r>
+              <a:t>Further learning: Row-level security: https://learn.microsoft.com/fabric/security/service-admin-row-level-security | Power BI security whitepaper/guidance: https://learn.microsoft.com/power-bi/guidance/powerbi-implementation-planning-security | Sensitivity labels: https://learn.microsoft.com/power-bi/enterprise/service-security-sensitivity-label-overview</a:t>
+            </a:r>
+          </a:p>
+        </p:txBody>
+      </p:sp>
+      <p:sp>
+        <p:nvSpPr>
+          <p:cNvPr id="4" name="Slide Number Placeholder 3"/>
+          <p:cNvSpPr>
+            <a:spLocks noGrp="1"/>
+          </p:cNvSpPr>
+          <p:nvPr>
+            <p:ph type="sldNum" idx="5" sz="quarter"/>
+          </p:nvPr>
+        </p:nvSpPr>
+        <p:spPr/>
+      </p:sp>
+    </p:spTree>
+  </p:cSld>
+  <p:clrMapOvr>
+    <a:masterClrMapping/>
+  </p:clrMapOvr>
+</p:notes>
+</file>
+
+<file path=ppt/notesSlides/notesSlide4.xml><?xml version="1.0" encoding="utf-8"?>
+<p:notes xmlns:a="http://schemas.openxmlformats.org/drawingml/2006/main" xmlns:p="http://schemas.openxmlformats.org/presentationml/2006/main" xmlns:r="http://schemas.openxmlformats.org/officeDocument/2006/relationships">
+  <p:cSld>
+    <p:spTree>
+      <p:nvGrpSpPr>
+        <p:cNvPr id="1" name=""/>
+        <p:cNvGrpSpPr/>
+        <p:nvPr/>
+      </p:nvGrpSpPr>
+      <p:grpSpPr>
+        <a:xfrm>
+          <a:off x="0" y="0"/>
+          <a:ext cx="0" cy="0"/>
+          <a:chOff x="0" y="0"/>
+          <a:chExt cx="0" cy="0"/>
+        </a:xfrm>
+      </p:grpSpPr>
+      <p:sp>
+        <p:nvSpPr>
+          <p:cNvPr id="2" name="Slide Image Placeholder 1"/>
+          <p:cNvSpPr>
+            <a:spLocks noGrp="1"/>
+          </p:cNvSpPr>
+          <p:nvPr>
+            <p:ph type="sldImg" idx="2"/>
+          </p:nvPr>
+        </p:nvSpPr>
+        <p:spPr/>
+      </p:sp>
+      <p:sp>
+        <p:nvSpPr>
+          <p:cNvPr id="3" name="Notes Placeholder 2"/>
+          <p:cNvSpPr>
+            <a:spLocks noGrp="1"/>
+          </p:cNvSpPr>
+          <p:nvPr>
+            <p:ph type="body" idx="3" sz="quarter"/>
+          </p:nvPr>
+        </p:nvSpPr>
+        <p:spPr/>
+        <p:txBody>
+          <a:bodyPr/>
+          <a:lstStyle/>
+          <a:p>
+            <a:r>
+              <a:t>Core message: 2. Content access vs. data access.</a:t>
+            </a:r>
+          </a:p>
+          <a:p>
+            <a:r>
+              <a:t>Talking points to expand: Talking points, learner value, and lab connection Talking points • Who can open the report? • Who can build from the semantic model? Why it helps • What data is visible after access is granted? Lab connection Coverage: Covered. Use the lab README to demonstrate or discuss this topic. Review terms: after, granted. 04</a:t>
+            </a:r>
+          </a:p>
+          <a:p>
+            <a:r>
+              <a:t>Why it matters: Frame this module as intentional access design. Security depends on model relationships, role logic, and testing evidence.</a:t>
+            </a:r>
+          </a:p>
+          <a:p>
+            <a:r>
+              <a:t>How it helps users: connect the technical pattern to clearer decisions, fewer confusing report interactions, better trust in results, or easier support.</a:t>
+            </a:r>
+          </a:p>
+          <a:p>
+            <a:r>
+              <a:t>How it builds on prior lessons: reference the previous layer in the workshop, such as prepared data, a clean model, tested measures, or report UX conventions.</a:t>
+            </a:r>
+          </a:p>
+          <a:p>
+            <a:r>
+              <a:t>Lab connection: Show where this concept appears in the module lab. If the lab path is conceptual or Verify for Gov, explain what learners should document instead of building hands-on.</a:t>
+            </a:r>
+          </a:p>
+          <a:p>
+            <a:r>
+              <a:t>Instructor prompt: Ask one learner to describe the risk of skipping this pattern or using it without validation.</a:t>
+            </a:r>
+          </a:p>
+          <a:p>
+            <a:r>
+              <a:t>Further learning: Row-level security: https://learn.microsoft.com/fabric/security/service-admin-row-level-security | Power BI security whitepaper/guidance: https://learn.microsoft.com/power-bi/guidance/powerbi-implementation-planning-security | Sensitivity labels: https://learn.microsoft.com/power-bi/enterprise/service-security-sensitivity-label-overview</a:t>
+            </a:r>
+          </a:p>
+        </p:txBody>
+      </p:sp>
+      <p:sp>
+        <p:nvSpPr>
+          <p:cNvPr id="4" name="Slide Number Placeholder 3"/>
+          <p:cNvSpPr>
+            <a:spLocks noGrp="1"/>
+          </p:cNvSpPr>
+          <p:nvPr>
+            <p:ph type="sldNum" idx="5" sz="quarter"/>
+          </p:nvPr>
+        </p:nvSpPr>
+        <p:spPr/>
+      </p:sp>
+    </p:spTree>
+  </p:cSld>
+  <p:clrMapOvr>
+    <a:masterClrMapping/>
+  </p:clrMapOvr>
+</p:notes>
+</file>
+
+<file path=ppt/notesSlides/notesSlide5.xml><?xml version="1.0" encoding="utf-8"?>
+<p:notes xmlns:a="http://schemas.openxmlformats.org/drawingml/2006/main" xmlns:p="http://schemas.openxmlformats.org/presentationml/2006/main" xmlns:r="http://schemas.openxmlformats.org/officeDocument/2006/relationships">
+  <p:cSld>
+    <p:spTree>
+      <p:nvGrpSpPr>
+        <p:cNvPr id="1" name=""/>
+        <p:cNvGrpSpPr/>
+        <p:nvPr/>
+      </p:nvGrpSpPr>
+      <p:grpSpPr>
+        <a:xfrm>
+          <a:off x="0" y="0"/>
+          <a:ext cx="0" cy="0"/>
+          <a:chOff x="0" y="0"/>
+          <a:chExt cx="0" cy="0"/>
+        </a:xfrm>
+      </p:grpSpPr>
+      <p:sp>
+        <p:nvSpPr>
+          <p:cNvPr id="2" name="Slide Image Placeholder 1"/>
+          <p:cNvSpPr>
+            <a:spLocks noGrp="1"/>
+          </p:cNvSpPr>
+          <p:nvPr>
+            <p:ph type="sldImg" idx="2"/>
+          </p:nvPr>
+        </p:nvSpPr>
+        <p:spPr/>
+      </p:sp>
+      <p:sp>
+        <p:nvSpPr>
+          <p:cNvPr id="3" name="Notes Placeholder 2"/>
+          <p:cNvSpPr>
+            <a:spLocks noGrp="1"/>
+          </p:cNvSpPr>
+          <p:nvPr>
+            <p:ph type="body" idx="3" sz="quarter"/>
+          </p:nvPr>
+        </p:nvSpPr>
+        <p:spPr/>
+        <p:txBody>
+          <a:bodyPr/>
+          <a:lstStyle/>
+          <a:p>
+            <a:r>
+              <a:t>Core message: 3. Static RLS.</a:t>
+            </a:r>
+          </a:p>
+          <a:p>
+            <a:r>
+              <a:t>Talking points to expand: Talking points, learner value, and lab connection Talking points • Role filters • Territory examples Why it helps • Testing roles • Maintenance tradeoffs Lab connection Coverage: Covered. Use the lab README to demonstrate or discuss this topic. Review terms: examples, maintenance, tradeoffs. 05</a:t>
+            </a:r>
+          </a:p>
+          <a:p>
+            <a:r>
+              <a:t>Why it matters: Frame this module as intentional access design. Security depends on model relationships, role logic, and testing evidence.</a:t>
+            </a:r>
+          </a:p>
+          <a:p>
+            <a:r>
+              <a:t>How it helps users: connect the technical pattern to clearer decisions, fewer confusing report interactions, better trust in results, or easier support.</a:t>
+            </a:r>
+          </a:p>
+          <a:p>
+            <a:r>
+              <a:t>How it builds on prior lessons: reference the previous layer in the workshop, such as prepared data, a clean model, tested measures, or report UX conventions.</a:t>
+            </a:r>
+          </a:p>
+          <a:p>
+            <a:r>
+              <a:t>Lab connection: Show where this concept appears in the module lab. If the lab path is conceptual or Verify for Gov, explain what learners should document instead of building hands-on.</a:t>
+            </a:r>
+          </a:p>
+          <a:p>
+            <a:r>
+              <a:t>Instructor prompt: Ask one learner to describe the risk of skipping this pattern or using it without validation.</a:t>
+            </a:r>
+          </a:p>
+          <a:p>
+            <a:r>
+              <a:t>Further learning: Row-level security: https://learn.microsoft.com/fabric/security/service-admin-row-level-security | Power BI security whitepaper/guidance: https://learn.microsoft.com/power-bi/guidance/powerbi-implementation-planning-security | Sensitivity labels: https://learn.microsoft.com/power-bi/enterprise/service-security-sensitivity-label-overview</a:t>
+            </a:r>
+          </a:p>
+        </p:txBody>
+      </p:sp>
+      <p:sp>
+        <p:nvSpPr>
+          <p:cNvPr id="4" name="Slide Number Placeholder 3"/>
+          <p:cNvSpPr>
+            <a:spLocks noGrp="1"/>
+          </p:cNvSpPr>
+          <p:nvPr>
+            <p:ph type="sldNum" idx="5" sz="quarter"/>
+          </p:nvPr>
+        </p:nvSpPr>
+        <p:spPr/>
+      </p:sp>
+    </p:spTree>
+  </p:cSld>
+  <p:clrMapOvr>
+    <a:masterClrMapping/>
+  </p:clrMapOvr>
+</p:notes>
+</file>
+
+<file path=ppt/notesSlides/notesSlide6.xml><?xml version="1.0" encoding="utf-8"?>
+<p:notes xmlns:a="http://schemas.openxmlformats.org/drawingml/2006/main" xmlns:p="http://schemas.openxmlformats.org/presentationml/2006/main" xmlns:r="http://schemas.openxmlformats.org/officeDocument/2006/relationships">
+  <p:cSld>
+    <p:spTree>
+      <p:nvGrpSpPr>
+        <p:cNvPr id="1" name=""/>
+        <p:cNvGrpSpPr/>
+        <p:nvPr/>
+      </p:nvGrpSpPr>
+      <p:grpSpPr>
+        <a:xfrm>
+          <a:off x="0" y="0"/>
+          <a:ext cx="0" cy="0"/>
+          <a:chOff x="0" y="0"/>
+          <a:chExt cx="0" cy="0"/>
+        </a:xfrm>
+      </p:grpSpPr>
+      <p:sp>
+        <p:nvSpPr>
+          <p:cNvPr id="2" name="Slide Image Placeholder 1"/>
+          <p:cNvSpPr>
+            <a:spLocks noGrp="1"/>
+          </p:cNvSpPr>
+          <p:nvPr>
+            <p:ph type="sldImg" idx="2"/>
+          </p:nvPr>
+        </p:nvSpPr>
+        <p:spPr/>
+      </p:sp>
+      <p:sp>
+        <p:nvSpPr>
+          <p:cNvPr id="3" name="Notes Placeholder 2"/>
+          <p:cNvSpPr>
+            <a:spLocks noGrp="1"/>
+          </p:cNvSpPr>
+          <p:nvPr>
+            <p:ph type="body" idx="3" sz="quarter"/>
+          </p:nvPr>
+        </p:nvSpPr>
+        <p:spPr/>
+        <p:txBody>
+          <a:bodyPr/>
+          <a:lstStyle/>
+          <a:p>
+            <a:r>
+              <a:t>Core message: 4. Dynamic RLS.</a:t>
+            </a:r>
+          </a:p>
+          <a:p>
+            <a:r>
+              <a:t>Talking points to expand: Talking points, learner value, and lab connection Talking points • Security mapping tables • `USERPRINCIPALNAME()` Why it helps • Many-to-many security mapping • Identity validation Lab connection Coverage: Covered. Use the lab README to demonstrate or discuss this topic. Review terms: identity. 06</a:t>
+            </a:r>
+          </a:p>
+          <a:p>
+            <a:r>
+              <a:t>Why it matters: Frame this module as intentional access design. Security depends on model relationships, role logic, and testing evidence.</a:t>
+            </a:r>
+          </a:p>
+          <a:p>
+            <a:r>
+              <a:t>How it helps users: connect the technical pattern to clearer decisions, fewer confusing report interactions, better trust in results, or easier support.</a:t>
+            </a:r>
+          </a:p>
+          <a:p>
+            <a:r>
+              <a:t>How it builds on prior lessons: reference the previous layer in the workshop, such as prepared data, a clean model, tested measures, or report UX conventions.</a:t>
+            </a:r>
+          </a:p>
+          <a:p>
+            <a:r>
+              <a:t>Lab connection: Show where this concept appears in the module lab. If the lab path is conceptual or Verify for Gov, explain what learners should document instead of building hands-on.</a:t>
+            </a:r>
+          </a:p>
+          <a:p>
+            <a:r>
+              <a:t>Instructor prompt: Ask one learner to describe the risk of skipping this pattern or using it without validation.</a:t>
+            </a:r>
+          </a:p>
+          <a:p>
+            <a:r>
+              <a:t>Further learning: Row-level security: https://learn.microsoft.com/fabric/security/service-admin-row-level-security | Power BI security whitepaper/guidance: https://learn.microsoft.com/power-bi/guidance/powerbi-implementation-planning-security | Sensitivity labels: https://learn.microsoft.com/power-bi/enterprise/service-security-sensitivity-label-overview</a:t>
+            </a:r>
+          </a:p>
+        </p:txBody>
+      </p:sp>
+      <p:sp>
+        <p:nvSpPr>
+          <p:cNvPr id="4" name="Slide Number Placeholder 3"/>
+          <p:cNvSpPr>
+            <a:spLocks noGrp="1"/>
+          </p:cNvSpPr>
+          <p:nvPr>
+            <p:ph type="sldNum" idx="5" sz="quarter"/>
+          </p:nvPr>
+        </p:nvSpPr>
+        <p:spPr/>
+      </p:sp>
+    </p:spTree>
+  </p:cSld>
+  <p:clrMapOvr>
+    <a:masterClrMapping/>
+  </p:clrMapOvr>
+</p:notes>
+</file>
+
+<file path=ppt/notesSlides/notesSlide7.xml><?xml version="1.0" encoding="utf-8"?>
+<p:notes xmlns:a="http://schemas.openxmlformats.org/drawingml/2006/main" xmlns:p="http://schemas.openxmlformats.org/presentationml/2006/main" xmlns:r="http://schemas.openxmlformats.org/officeDocument/2006/relationships">
+  <p:cSld>
+    <p:spTree>
+      <p:nvGrpSpPr>
+        <p:cNvPr id="1" name=""/>
+        <p:cNvGrpSpPr/>
+        <p:nvPr/>
+      </p:nvGrpSpPr>
+      <p:grpSpPr>
+        <a:xfrm>
+          <a:off x="0" y="0"/>
+          <a:ext cx="0" cy="0"/>
+          <a:chOff x="0" y="0"/>
+          <a:chExt cx="0" cy="0"/>
+        </a:xfrm>
+      </p:grpSpPr>
+      <p:sp>
+        <p:nvSpPr>
+          <p:cNvPr id="2" name="Slide Image Placeholder 1"/>
+          <p:cNvSpPr>
+            <a:spLocks noGrp="1"/>
+          </p:cNvSpPr>
+          <p:nvPr>
+            <p:ph type="sldImg" idx="2"/>
+          </p:nvPr>
+        </p:nvSpPr>
+        <p:spPr/>
+      </p:sp>
+      <p:sp>
+        <p:nvSpPr>
+          <p:cNvPr id="3" name="Notes Placeholder 2"/>
+          <p:cNvSpPr>
+            <a:spLocks noGrp="1"/>
+          </p:cNvSpPr>
+          <p:nvPr>
+            <p:ph type="body" idx="3" sz="quarter"/>
+          </p:nvPr>
+        </p:nvSpPr>
+        <p:spPr/>
+        <p:txBody>
+          <a:bodyPr/>
+          <a:lstStyle/>
+          <a:p>
+            <a:r>
+              <a:t>Core message: 5. Service role assignment.</a:t>
+            </a:r>
+          </a:p>
+          <a:p>
+            <a:r>
+              <a:t>Talking points to expand: Talking points, learner value, and lab connection Talking points • Assigning users and groups • Testing as role Why it helps • Workspace role implications • App distribution Lab connection Coverage: Partial. Use the lab README to demonstrate or discuss this topic. Review terms: assigning, assignment, distribution, implications, workspace. 07</a:t>
+            </a:r>
+          </a:p>
+          <a:p>
+            <a:r>
+              <a:t>Why it matters: Frame this module as intentional access design. Security depends on model relationships, role logic, and testing evidence.</a:t>
+            </a:r>
+          </a:p>
+          <a:p>
+            <a:r>
+              <a:t>How it helps users: connect the technical pattern to clearer decisions, fewer confusing report interactions, better trust in results, or easier support.</a:t>
+            </a:r>
+          </a:p>
+          <a:p>
+            <a:r>
+              <a:t>How it builds on prior lessons: reference the previous layer in the workshop, such as prepared data, a clean model, tested measures, or report UX conventions.</a:t>
+            </a:r>
+          </a:p>
+          <a:p>
+            <a:r>
+              <a:t>Lab connection: Show where this concept appears in the module lab. If the lab path is conceptual or Verify for Gov, explain what learners should document instead of building hands-on.</a:t>
+            </a:r>
+          </a:p>
+          <a:p>
+            <a:r>
+              <a:t>Instructor prompt: Ask one learner to describe the risk of skipping this pattern or using it without validation.</a:t>
+            </a:r>
+          </a:p>
+          <a:p>
+            <a:r>
+              <a:t>Further learning: Row-level security: https://learn.microsoft.com/fabric/security/service-admin-row-level-security | Power BI security whitepaper/guidance: https://learn.microsoft.com/power-bi/guidance/powerbi-implementation-planning-security | Sensitivity labels: https://learn.microsoft.com/power-bi/enterprise/service-security-sensitivity-label-overview</a:t>
+            </a:r>
+          </a:p>
+        </p:txBody>
+      </p:sp>
+      <p:sp>
+        <p:nvSpPr>
+          <p:cNvPr id="4" name="Slide Number Placeholder 3"/>
+          <p:cNvSpPr>
+            <a:spLocks noGrp="1"/>
+          </p:cNvSpPr>
+          <p:nvPr>
+            <p:ph type="sldNum" idx="5" sz="quarter"/>
+          </p:nvPr>
+        </p:nvSpPr>
+        <p:spPr/>
+      </p:sp>
+    </p:spTree>
+  </p:cSld>
+  <p:clrMapOvr>
+    <a:masterClrMapping/>
+  </p:clrMapOvr>
+</p:notes>
+</file>
+
+<file path=ppt/notesSlides/notesSlide8.xml><?xml version="1.0" encoding="utf-8"?>
+<p:notes xmlns:a="http://schemas.openxmlformats.org/drawingml/2006/main" xmlns:p="http://schemas.openxmlformats.org/presentationml/2006/main" xmlns:r="http://schemas.openxmlformats.org/officeDocument/2006/relationships">
+  <p:cSld>
+    <p:spTree>
+      <p:nvGrpSpPr>
+        <p:cNvPr id="1" name=""/>
+        <p:cNvGrpSpPr/>
+        <p:nvPr/>
+      </p:nvGrpSpPr>
+      <p:grpSpPr>
+        <a:xfrm>
+          <a:off x="0" y="0"/>
+          <a:ext cx="0" cy="0"/>
+          <a:chOff x="0" y="0"/>
+          <a:chExt cx="0" cy="0"/>
+        </a:xfrm>
+      </p:grpSpPr>
+      <p:sp>
+        <p:nvSpPr>
+          <p:cNvPr id="2" name="Slide Image Placeholder 1"/>
+          <p:cNvSpPr>
+            <a:spLocks noGrp="1"/>
+          </p:cNvSpPr>
+          <p:nvPr>
+            <p:ph type="sldImg" idx="2"/>
+          </p:nvPr>
+        </p:nvSpPr>
+        <p:spPr/>
+      </p:sp>
+      <p:sp>
+        <p:nvSpPr>
+          <p:cNvPr id="3" name="Notes Placeholder 2"/>
+          <p:cNvSpPr>
+            <a:spLocks noGrp="1"/>
+          </p:cNvSpPr>
+          <p:nvPr>
+            <p:ph type="body" idx="3" sz="quarter"/>
+          </p:nvPr>
+        </p:nvSpPr>
+        <p:spPr/>
+        <p:txBody>
+          <a:bodyPr/>
+          <a:lstStyle/>
+          <a:p>
+            <a:r>
+              <a:t>Core message: 6. Build permission.</a:t>
+            </a:r>
+          </a:p>
+          <a:p>
+            <a:r>
+              <a:t>Talking points to expand: Talking points, learner value, and lab connection Talking points • Semantic model reuse • Thin reports Why it helps • Analyze in Excel • Downstream data access risk Lab connection Coverage: Covered. Use the lab README to demonstrate or discuss this topic. Review terms: reports. 08</a:t>
+            </a:r>
+          </a:p>
+          <a:p>
+            <a:r>
+              <a:t>Why it matters: Frame this module as intentional access design. Security depends on model relationships, role logic, and testing evidence.</a:t>
+            </a:r>
+          </a:p>
+          <a:p>
+            <a:r>
+              <a:t>How it helps users: connect the technical pattern to clearer decisions, fewer confusing report interactions, better trust in results, or easier support.</a:t>
+            </a:r>
+          </a:p>
+          <a:p>
+            <a:r>
+              <a:t>How it builds on prior lessons: reference the previous layer in the workshop, such as prepared data, a clean model, tested measures, or report UX conventions.</a:t>
+            </a:r>
+          </a:p>
+          <a:p>
+            <a:r>
+              <a:t>Lab connection: Show where this concept appears in the module lab. If the lab path is conceptual or Verify for Gov, explain what learners should document instead of building hands-on.</a:t>
+            </a:r>
+          </a:p>
+          <a:p>
+            <a:r>
+              <a:t>Instructor prompt: Ask one learner to describe the risk of skipping this pattern or using it without validation.</a:t>
+            </a:r>
+          </a:p>
+          <a:p>
+            <a:r>
+              <a:t>Further learning: Row-level security: https://learn.microsoft.com/fabric/security/service-admin-row-level-security | Power BI security whitepaper/guidance: https://learn.microsoft.com/power-bi/guidance/powerbi-implementation-planning-security | Sensitivity labels: https://learn.microsoft.com/power-bi/enterprise/service-security-sensitivity-label-overview</a:t>
+            </a:r>
+          </a:p>
+        </p:txBody>
+      </p:sp>
+      <p:sp>
+        <p:nvSpPr>
+          <p:cNvPr id="4" name="Slide Number Placeholder 3"/>
+          <p:cNvSpPr>
+            <a:spLocks noGrp="1"/>
+          </p:cNvSpPr>
+          <p:nvPr>
+            <p:ph type="sldNum" idx="5" sz="quarter"/>
+          </p:nvPr>
+        </p:nvSpPr>
+        <p:spPr/>
+      </p:sp>
+    </p:spTree>
+  </p:cSld>
+  <p:clrMapOvr>
+    <a:masterClrMapping/>
+  </p:clrMapOvr>
+</p:notes>
+</file>
+
+<file path=ppt/notesSlides/notesSlide9.xml><?xml version="1.0" encoding="utf-8"?>
+<p:notes xmlns:a="http://schemas.openxmlformats.org/drawingml/2006/main" xmlns:p="http://schemas.openxmlformats.org/presentationml/2006/main" xmlns:r="http://schemas.openxmlformats.org/officeDocument/2006/relationships">
+  <p:cSld>
+    <p:spTree>
+      <p:nvGrpSpPr>
+        <p:cNvPr id="1" name=""/>
+        <p:cNvGrpSpPr/>
+        <p:nvPr/>
+      </p:nvGrpSpPr>
+      <p:grpSpPr>
+        <a:xfrm>
+          <a:off x="0" y="0"/>
+          <a:ext cx="0" cy="0"/>
+          <a:chOff x="0" y="0"/>
+          <a:chExt cx="0" cy="0"/>
+        </a:xfrm>
+      </p:grpSpPr>
+      <p:sp>
+        <p:nvSpPr>
+          <p:cNvPr id="2" name="Slide Image Placeholder 1"/>
+          <p:cNvSpPr>
+            <a:spLocks noGrp="1"/>
+          </p:cNvSpPr>
+          <p:nvPr>
+            <p:ph type="sldImg" idx="2"/>
+          </p:nvPr>
+        </p:nvSpPr>
+        <p:spPr/>
+      </p:sp>
+      <p:sp>
+        <p:nvSpPr>
+          <p:cNvPr id="3" name="Notes Placeholder 2"/>
+          <p:cNvSpPr>
+            <a:spLocks noGrp="1"/>
+          </p:cNvSpPr>
+          <p:nvPr>
+            <p:ph type="body" idx="3" sz="quarter"/>
+          </p:nvPr>
+        </p:nvSpPr>
+        <p:spPr/>
+        <p:txBody>
+          <a:bodyPr/>
+          <a:lstStyle/>
+          <a:p>
+            <a:r>
+              <a:t>Core message: 7. Object-level security.</a:t>
+            </a:r>
+          </a:p>
+          <a:p>
+            <a:r>
+              <a:t>Talking points to expand: Talking points, learner value, and lab connection Talking points • Hiding tables or columns • Tooling and capacity considerations Why it helps • Validation requirements Lab connection Coverage: Covered. Use the lab README to demonstrate or discuss this topic. Review terms: considerations, hiding. 09</a:t>
+            </a:r>
+          </a:p>
+          <a:p>
+            <a:r>
+              <a:t>Why it matters: Frame this module as intentional access design. Security depends on model relationships, role logic, and testing evidence.</a:t>
+            </a:r>
+          </a:p>
+          <a:p>
+            <a:r>
+              <a:t>How it helps users: connect the technical pattern to clearer decisions, fewer confusing report interactions, better trust in results, or easier support.</a:t>
+            </a:r>
+          </a:p>
+          <a:p>
+            <a:r>
+              <a:t>How it builds on prior lessons: reference the previous layer in the workshop, such as prepared data, a clean model, tested measures, or report UX conventions.</a:t>
+            </a:r>
+          </a:p>
+          <a:p>
+            <a:r>
+              <a:t>Lab connection: Show where this concept appears in the module lab. If the lab path is conceptual or Verify for Gov, explain what learners should document instead of building hands-on.</a:t>
+            </a:r>
+          </a:p>
+          <a:p>
+            <a:r>
+              <a:t>Instructor prompt: Ask one learner to describe the risk of skipping this pattern or using it without validation.</a:t>
+            </a:r>
+          </a:p>
+          <a:p>
+            <a:r>
+              <a:t>Further learning: Row-level security: https://learn.microsoft.com/fabric/security/service-admin-row-level-security | Power BI security whitepaper/guidance: https://learn.microsoft.com/power-bi/guidance/powerbi-implementation-planning-security | Sensitivity labels: https://learn.microsoft.com/power-bi/enterprise/service-security-sensitivity-label-overview</a:t>
+            </a:r>
+          </a:p>
+        </p:txBody>
+      </p:sp>
+      <p:sp>
+        <p:nvSpPr>
+          <p:cNvPr id="4" name="Slide Number Placeholder 3"/>
+          <p:cNvSpPr>
+            <a:spLocks noGrp="1"/>
+          </p:cNvSpPr>
+          <p:nvPr>
+            <p:ph type="sldNum" idx="5" sz="quarter"/>
+          </p:nvPr>
+        </p:nvSpPr>
+        <p:spPr/>
+      </p:sp>
+    </p:spTree>
+  </p:cSld>
+  <p:clrMapOvr>
+    <a:masterClrMapping/>
+  </p:clrMapOvr>
+</p:notes>
 </file>
 
 <file path=ppt/slideLayouts/slideLayout1.xml><?xml version="1.0" encoding="utf-8"?>
@@ -13275,4 +15135,324 @@
   </a:objectDefaults>
   <a:extraClrSchemeLst/>
 </a:theme>
+</file>
+
+<file path=ppt/theme/theme2.xml><?xml version="1.0" encoding="utf-8"?>
+<a:theme xmlns:a="http://schemas.openxmlformats.org/drawingml/2006/main" name="Office Theme">
+  <a:themeElements>
+    <a:clrScheme name="Office">
+      <a:dk1>
+        <a:sysClr val="windowText" lastClr="000000"/>
+      </a:dk1>
+      <a:lt1>
+        <a:sysClr val="window" lastClr="FFFFFF"/>
+      </a:lt1>
+      <a:dk2>
+        <a:srgbClr val="1F497D"/>
+      </a:dk2>
+      <a:lt2>
+        <a:srgbClr val="EEECE1"/>
+      </a:lt2>
+      <a:accent1>
+        <a:srgbClr val="4F81BD"/>
+      </a:accent1>
+      <a:accent2>
+        <a:srgbClr val="C0504D"/>
+      </a:accent2>
+      <a:accent3>
+        <a:srgbClr val="9BBB59"/>
+      </a:accent3>
+      <a:accent4>
+        <a:srgbClr val="8064A2"/>
+      </a:accent4>
+      <a:accent5>
+        <a:srgbClr val="4BACC6"/>
+      </a:accent5>
+      <a:accent6>
+        <a:srgbClr val="F79646"/>
+      </a:accent6>
+      <a:hlink>
+        <a:srgbClr val="0000FF"/>
+      </a:hlink>
+      <a:folHlink>
+        <a:srgbClr val="800080"/>
+      </a:folHlink>
+    </a:clrScheme>
+    <a:fontScheme name="Office">
+      <a:majorFont>
+        <a:latin typeface="Calibri"/>
+        <a:ea typeface=""/>
+        <a:cs typeface=""/>
+        <a:font script="Jpan" typeface="ＭＳ Ｐゴシック"/>
+        <a:font script="Hang" typeface="맑은 고딕"/>
+        <a:font script="Hans" typeface="宋体"/>
+        <a:font script="Hant" typeface="新細明體"/>
+        <a:font script="Arab" typeface="Times New Roman"/>
+        <a:font script="Hebr" typeface="Times New Roman"/>
+        <a:font script="Thai" typeface="Angsana New"/>
+        <a:font script="Ethi" typeface="Nyala"/>
+        <a:font script="Beng" typeface="Vrinda"/>
+        <a:font script="Gujr" typeface="Shruti"/>
+        <a:font script="Khmr" typeface="MoolBoran"/>
+        <a:font script="Knda" typeface="Tunga"/>
+        <a:font script="Guru" typeface="Raavi"/>
+        <a:font script="Cans" typeface="Euphemia"/>
+        <a:font script="Cher" typeface="Plantagenet Cherokee"/>
+        <a:font script="Yiii" typeface="Microsoft Yi Baiti"/>
+        <a:font script="Tibt" typeface="Microsoft Himalaya"/>
+        <a:font script="Thaa" typeface="MV Boli"/>
+        <a:font script="Deva" typeface="Mangal"/>
+        <a:font script="Telu" typeface="Gautami"/>
+        <a:font script="Taml" typeface="Latha"/>
+        <a:font script="Syrc" typeface="Estrangelo Edessa"/>
+        <a:font script="Orya" typeface="Kalinga"/>
+        <a:font script="Mlym" typeface="Kartika"/>
+        <a:font script="Laoo" typeface="DokChampa"/>
+        <a:font script="Sinh" typeface="Iskoola Pota"/>
+        <a:font script="Mong" typeface="Mongolian Baiti"/>
+        <a:font script="Viet" typeface="Times New Roman"/>
+        <a:font script="Uigh" typeface="Microsoft Uighur"/>
+        <a:font script="Geor" typeface="Sylfaen"/>
+      </a:majorFont>
+      <a:minorFont>
+        <a:latin typeface="Calibri"/>
+        <a:ea typeface=""/>
+        <a:cs typeface=""/>
+        <a:font script="Jpan" typeface="ＭＳ Ｐゴシック"/>
+        <a:font script="Hang" typeface="맑은 고딕"/>
+        <a:font script="Hans" typeface="宋体"/>
+        <a:font script="Hant" typeface="新細明體"/>
+        <a:font script="Arab" typeface="Arial"/>
+        <a:font script="Hebr" typeface="Arial"/>
+        <a:font script="Thai" typeface="Cordia New"/>
+        <a:font script="Ethi" typeface="Nyala"/>
+        <a:font script="Beng" typeface="Vrinda"/>
+        <a:font script="Gujr" typeface="Shruti"/>
+        <a:font script="Khmr" typeface="DaunPenh"/>
+        <a:font script="Knda" typeface="Tunga"/>
+        <a:font script="Guru" typeface="Raavi"/>
+        <a:font script="Cans" typeface="Euphemia"/>
+        <a:font script="Cher" typeface="Plantagenet Cherokee"/>
+        <a:font script="Yiii" typeface="Microsoft Yi Baiti"/>
+        <a:font script="Tibt" typeface="Microsoft Himalaya"/>
+        <a:font script="Thaa" typeface="MV Boli"/>
+        <a:font script="Deva" typeface="Mangal"/>
+        <a:font script="Telu" typeface="Gautami"/>
+        <a:font script="Taml" typeface="Latha"/>
+        <a:font script="Syrc" typeface="Estrangelo Edessa"/>
+        <a:font script="Orya" typeface="Kalinga"/>
+        <a:font script="Mlym" typeface="Kartika"/>
+        <a:font script="Laoo" typeface="DokChampa"/>
+        <a:font script="Sinh" typeface="Iskoola Pota"/>
+        <a:font script="Mong" typeface="Mongolian Baiti"/>
+        <a:font script="Viet" typeface="Arial"/>
+        <a:font script="Uigh" typeface="Microsoft Uighur"/>
+        <a:font script="Geor" typeface="Sylfaen"/>
+      </a:minorFont>
+    </a:fontScheme>
+    <a:fmtScheme name="Office">
+      <a:fillStyleLst>
+        <a:solidFill>
+          <a:schemeClr val="phClr"/>
+        </a:solidFill>
+        <a:gradFill rotWithShape="1">
+          <a:gsLst>
+            <a:gs pos="0">
+              <a:schemeClr val="phClr">
+                <a:tint val="50000"/>
+                <a:satMod val="300000"/>
+              </a:schemeClr>
+            </a:gs>
+            <a:gs pos="35000">
+              <a:schemeClr val="phClr">
+                <a:tint val="37000"/>
+                <a:satMod val="300000"/>
+              </a:schemeClr>
+            </a:gs>
+            <a:gs pos="100000">
+              <a:schemeClr val="phClr">
+                <a:tint val="15000"/>
+                <a:satMod val="350000"/>
+              </a:schemeClr>
+            </a:gs>
+          </a:gsLst>
+          <a:lin ang="16200000" scaled="1"/>
+        </a:gradFill>
+        <a:gradFill rotWithShape="1">
+          <a:gsLst>
+            <a:gs pos="0">
+              <a:schemeClr val="phClr">
+                <a:tint val="100000"/>
+                <a:shade val="100000"/>
+                <a:satMod val="130000"/>
+              </a:schemeClr>
+            </a:gs>
+            <a:gs pos="100000">
+              <a:schemeClr val="phClr">
+                <a:tint val="50000"/>
+                <a:shade val="100000"/>
+                <a:satMod val="350000"/>
+              </a:schemeClr>
+            </a:gs>
+          </a:gsLst>
+          <a:lin ang="16200000" scaled="0"/>
+        </a:gradFill>
+      </a:fillStyleLst>
+      <a:lnStyleLst>
+        <a:ln w="9525" cap="flat" cmpd="sng" algn="ctr">
+          <a:solidFill>
+            <a:schemeClr val="phClr">
+              <a:shade val="95000"/>
+              <a:satMod val="105000"/>
+            </a:schemeClr>
+          </a:solidFill>
+          <a:prstDash val="solid"/>
+        </a:ln>
+        <a:ln w="25400" cap="flat" cmpd="sng" algn="ctr">
+          <a:solidFill>
+            <a:schemeClr val="phClr"/>
+          </a:solidFill>
+          <a:prstDash val="solid"/>
+        </a:ln>
+        <a:ln w="38100" cap="flat" cmpd="sng" algn="ctr">
+          <a:solidFill>
+            <a:schemeClr val="phClr"/>
+          </a:solidFill>
+          <a:prstDash val="solid"/>
+        </a:ln>
+      </a:lnStyleLst>
+      <a:effectStyleLst>
+        <a:effectStyle>
+          <a:effectLst>
+            <a:outerShdw blurRad="40000" dist="20000" dir="5400000" rotWithShape="0">
+              <a:srgbClr val="000000">
+                <a:alpha val="38000"/>
+              </a:srgbClr>
+            </a:outerShdw>
+          </a:effectLst>
+        </a:effectStyle>
+        <a:effectStyle>
+          <a:effectLst>
+            <a:outerShdw blurRad="40000" dist="23000" dir="5400000" rotWithShape="0">
+              <a:srgbClr val="000000">
+                <a:alpha val="35000"/>
+              </a:srgbClr>
+            </a:outerShdw>
+          </a:effectLst>
+        </a:effectStyle>
+        <a:effectStyle>
+          <a:effectLst>
+            <a:outerShdw blurRad="40000" dist="23000" dir="5400000" rotWithShape="0">
+              <a:srgbClr val="000000">
+                <a:alpha val="35000"/>
+              </a:srgbClr>
+            </a:outerShdw>
+          </a:effectLst>
+          <a:scene3d>
+            <a:camera prst="orthographicFront">
+              <a:rot lat="0" lon="0" rev="0"/>
+            </a:camera>
+            <a:lightRig rig="threePt" dir="t">
+              <a:rot lat="0" lon="0" rev="1200000"/>
+            </a:lightRig>
+          </a:scene3d>
+          <a:sp3d>
+            <a:bevelT w="63500" h="25400"/>
+          </a:sp3d>
+        </a:effectStyle>
+      </a:effectStyleLst>
+      <a:bgFillStyleLst>
+        <a:solidFill>
+          <a:schemeClr val="phClr"/>
+        </a:solidFill>
+        <a:gradFill rotWithShape="1">
+          <a:gsLst>
+            <a:gs pos="0">
+              <a:schemeClr val="phClr">
+                <a:tint val="40000"/>
+                <a:satMod val="350000"/>
+              </a:schemeClr>
+            </a:gs>
+            <a:gs pos="40000">
+              <a:schemeClr val="phClr">
+                <a:tint val="45000"/>
+                <a:shade val="99000"/>
+                <a:satMod val="350000"/>
+              </a:schemeClr>
+            </a:gs>
+            <a:gs pos="100000">
+              <a:schemeClr val="phClr">
+                <a:shade val="20000"/>
+                <a:satMod val="255000"/>
+              </a:schemeClr>
+            </a:gs>
+          </a:gsLst>
+          <a:path path="circle">
+            <a:fillToRect l="50000" t="-80000" r="50000" b="180000"/>
+          </a:path>
+        </a:gradFill>
+        <a:gradFill rotWithShape="1">
+          <a:gsLst>
+            <a:gs pos="0">
+              <a:schemeClr val="phClr">
+                <a:tint val="80000"/>
+                <a:satMod val="300000"/>
+              </a:schemeClr>
+            </a:gs>
+            <a:gs pos="100000">
+              <a:schemeClr val="phClr">
+                <a:shade val="30000"/>
+                <a:satMod val="200000"/>
+              </a:schemeClr>
+            </a:gs>
+          </a:gsLst>
+          <a:path path="circle">
+            <a:fillToRect l="50000" t="50000" r="50000" b="50000"/>
+          </a:path>
+        </a:gradFill>
+      </a:bgFillStyleLst>
+    </a:fmtScheme>
+  </a:themeElements>
+  <a:objectDefaults>
+    <a:spDef>
+      <a:spPr/>
+      <a:bodyPr/>
+      <a:lstStyle/>
+      <a:style>
+        <a:lnRef idx="1">
+          <a:schemeClr val="accent1"/>
+        </a:lnRef>
+        <a:fillRef idx="3">
+          <a:schemeClr val="accent1"/>
+        </a:fillRef>
+        <a:effectRef idx="2">
+          <a:schemeClr val="accent1"/>
+        </a:effectRef>
+        <a:fontRef idx="minor">
+          <a:schemeClr val="lt1"/>
+        </a:fontRef>
+      </a:style>
+    </a:spDef>
+    <a:lnDef>
+      <a:spPr/>
+      <a:bodyPr/>
+      <a:lstStyle/>
+      <a:style>
+        <a:lnRef idx="2">
+          <a:schemeClr val="accent1"/>
+        </a:lnRef>
+        <a:fillRef idx="0">
+          <a:schemeClr val="accent1"/>
+        </a:fillRef>
+        <a:effectRef idx="1">
+          <a:schemeClr val="accent1"/>
+        </a:effectRef>
+        <a:fontRef idx="minor">
+          <a:schemeClr val="tx1"/>
+        </a:fontRef>
+      </a:style>
+    </a:lnDef>
+  </a:objectDefaults>
+  <a:extraClrSchemeLst/>
+</a:theme>
 </file>
--- a/modules/07-security-design/assets/security-design.pptx
+++ b/modules/07-security-design/assets/security-design.pptx
@@ -5072,7 +5072,7 @@
               </a:defRPr>
             </a:pPr>
             <a:r>
-              <a:t>Power BI Advanced Factory teaching deck</a:t>
+              <a:t>Student module overview</a:t>
             </a:r>
           </a:p>
         </p:txBody>
@@ -5596,42 +5596,6 @@
       </p:sp>
       <p:sp>
         <p:nvSpPr>
-          <p:cNvPr id="4" name="TextBox 3"/>
-          <p:cNvSpPr txBox="1"/>
-          <p:nvPr/>
-        </p:nvSpPr>
-        <p:spPr>
-          <a:xfrm>
-            <a:off x="530352" y="914400"/>
-            <a:ext cx="10515600" cy="320040"/>
-          </a:xfrm>
-          <a:prstGeom prst="rect">
-            <a:avLst/>
-          </a:prstGeom>
-          <a:noFill/>
-        </p:spPr>
-        <p:txBody>
-          <a:bodyPr wrap="none">
-            <a:spAutoFit/>
-          </a:bodyPr>
-          <a:lstStyle/>
-          <a:p>
-            <a:pPr>
-              <a:defRPr sz="1200">
-                <a:solidFill>
-                  <a:srgbClr val="5C5C5C"/>
-                </a:solidFill>
-                <a:latin typeface="Aptos"/>
-              </a:defRPr>
-            </a:pPr>
-            <a:r>
-              <a:t>Talking points, learner value, and lab connection</a:t>
-            </a:r>
-          </a:p>
-        </p:txBody>
-      </p:sp>
-      <p:sp>
-        <p:nvSpPr>
           <p:cNvPr id="5" name="Rounded Rectangle 4"/>
           <p:cNvSpPr/>
           <p:nvPr/>
@@ -5749,7 +5713,139 @@
               </a:defRPr>
             </a:pPr>
             <a:r>
-              <a:t>Talking points</a:t>
+              <a:t>Key ideas</a:t>
+            </a:r>
+            <a:br/>
+            <a:r>
+              <a:t>• Label inheritance</a:t>
+            </a:r>
+            <a:br/>
+            <a:r>
+              <a:t>• Export controls</a:t>
+            </a:r>
+          </a:p>
+        </p:txBody>
+      </p:sp>
+      <p:sp>
+        <p:nvSpPr>
+          <p:cNvPr id="8" name="Rounded Rectangle 7"/>
+          <p:cNvSpPr/>
+          <p:nvPr/>
+        </p:nvSpPr>
+        <p:spPr>
+          <a:xfrm>
+            <a:off x="6263640" y="1234440"/>
+            <a:ext cx="5303520" cy="1828800"/>
+          </a:xfrm>
+          <a:prstGeom prst="roundRect">
+            <a:avLst/>
+          </a:prstGeom>
+          <a:solidFill>
+            <a:srgbClr val="FFFFFF"/>
+          </a:solidFill>
+          <a:ln>
+            <a:solidFill>
+              <a:srgbClr val="DCDCDC"/>
+            </a:solidFill>
+          </a:ln>
+        </p:spPr>
+        <p:style>
+          <a:lnRef idx="1">
+            <a:schemeClr val="accent1"/>
+          </a:lnRef>
+          <a:fillRef idx="3">
+            <a:schemeClr val="accent1"/>
+          </a:fillRef>
+          <a:effectRef idx="2">
+            <a:schemeClr val="accent1"/>
+          </a:effectRef>
+          <a:fontRef idx="minor">
+            <a:schemeClr val="lt1"/>
+          </a:fontRef>
+        </p:style>
+        <p:txBody>
+          <a:bodyPr rtlCol="0" anchor="ctr"/>
+          <a:lstStyle/>
+          <a:p>
+            <a:pPr algn="ctr"/>
+          </a:p>
+        </p:txBody>
+      </p:sp>
+      <p:sp>
+        <p:nvSpPr>
+          <p:cNvPr id="9" name="Rectangle 8"/>
+          <p:cNvSpPr/>
+          <p:nvPr/>
+        </p:nvSpPr>
+        <p:spPr>
+          <a:xfrm>
+            <a:off x="6263640" y="1234440"/>
+            <a:ext cx="91440" cy="1828800"/>
+          </a:xfrm>
+          <a:prstGeom prst="rect">
+            <a:avLst/>
+          </a:prstGeom>
+          <a:solidFill>
+            <a:srgbClr val="02C39A"/>
+          </a:solidFill>
+          <a:ln>
+            <a:noFill/>
+          </a:ln>
+        </p:spPr>
+        <p:style>
+          <a:lnRef idx="1">
+            <a:schemeClr val="accent1"/>
+          </a:lnRef>
+          <a:fillRef idx="3">
+            <a:schemeClr val="accent1"/>
+          </a:fillRef>
+          <a:effectRef idx="2">
+            <a:schemeClr val="accent1"/>
+          </a:effectRef>
+          <a:fontRef idx="minor">
+            <a:schemeClr val="lt1"/>
+          </a:fontRef>
+        </p:style>
+        <p:txBody>
+          <a:bodyPr rtlCol="0" anchor="ctr"/>
+          <a:lstStyle/>
+          <a:p>
+            <a:pPr algn="ctr"/>
+          </a:p>
+        </p:txBody>
+      </p:sp>
+      <p:sp>
+        <p:nvSpPr>
+          <p:cNvPr id="10" name="TextBox 9"/>
+          <p:cNvSpPr txBox="1"/>
+          <p:nvPr/>
+        </p:nvSpPr>
+        <p:spPr>
+          <a:xfrm>
+            <a:off x="6446520" y="1344168"/>
+            <a:ext cx="4983480" cy="1664208"/>
+          </a:xfrm>
+          <a:prstGeom prst="rect">
+            <a:avLst/>
+          </a:prstGeom>
+          <a:noFill/>
+        </p:spPr>
+        <p:txBody>
+          <a:bodyPr wrap="square" lIns="0" rIns="0">
+            <a:spAutoFit/>
+          </a:bodyPr>
+          <a:lstStyle/>
+          <a:p>
+            <a:pPr>
+              <a:defRPr b="1" sz="1500">
+                <a:solidFill>
+                  <a:srgbClr val="1E2761"/>
+                </a:solidFill>
+                <a:latin typeface="Aptos Display"/>
+              </a:defRPr>
+            </a:pPr>
+            <a:r>
+              <a:t>Why it helps</a:t>
             </a:r>
           </a:p>
           <a:p>
@@ -5765,25 +5861,25 @@
               </a:defRPr>
             </a:pPr>
             <a:r>
-              <a:t>• Label inheritance</a:t>
+              <a:t>• MIP/Purview setup</a:t>
             </a:r>
             <a:br/>
             <a:r>
-              <a:t>• Export controls</a:t>
-            </a:r>
-          </a:p>
-        </p:txBody>
-      </p:sp>
-      <p:sp>
-        <p:nvSpPr>
-          <p:cNvPr id="8" name="Rounded Rectangle 7"/>
+              <a:t>• Tenant policy dependency</a:t>
+            </a:r>
+          </a:p>
+        </p:txBody>
+      </p:sp>
+      <p:sp>
+        <p:nvSpPr>
+          <p:cNvPr id="11" name="Rounded Rectangle 10"/>
           <p:cNvSpPr/>
           <p:nvPr/>
         </p:nvSpPr>
         <p:spPr>
           <a:xfrm>
-            <a:off x="6263640" y="1234440"/>
-            <a:ext cx="5303520" cy="1828800"/>
+            <a:off x="822960" y="4160520"/>
+            <a:ext cx="10424160" cy="868680"/>
           </a:xfrm>
           <a:prstGeom prst="roundRect">
             <a:avLst/>
@@ -5821,20 +5917,20 @@
       </p:sp>
       <p:sp>
         <p:nvSpPr>
-          <p:cNvPr id="9" name="Rectangle 8"/>
+          <p:cNvPr id="12" name="Rectangle 11"/>
           <p:cNvSpPr/>
           <p:nvPr/>
         </p:nvSpPr>
         <p:spPr>
           <a:xfrm>
-            <a:off x="6263640" y="1234440"/>
-            <a:ext cx="91440" cy="1828800"/>
+            <a:off x="822960" y="4160520"/>
+            <a:ext cx="91440" cy="868680"/>
           </a:xfrm>
           <a:prstGeom prst="rect">
             <a:avLst/>
           </a:prstGeom>
           <a:solidFill>
-            <a:srgbClr val="02C39A"/>
+            <a:srgbClr val="F9B700"/>
           </a:solidFill>
           <a:ln>
             <a:noFill/>
@@ -5864,14 +5960,14 @@
       </p:sp>
       <p:sp>
         <p:nvSpPr>
-          <p:cNvPr id="10" name="TextBox 9"/>
+          <p:cNvPr id="13" name="TextBox 12"/>
           <p:cNvSpPr txBox="1"/>
           <p:nvPr/>
         </p:nvSpPr>
         <p:spPr>
           <a:xfrm>
-            <a:off x="6446520" y="1344168"/>
-            <a:ext cx="4983480" cy="1664208"/>
+            <a:off x="1005840" y="4270248"/>
+            <a:ext cx="10104120" cy="704088"/>
           </a:xfrm>
           <a:prstGeom prst="rect">
             <a:avLst/>
@@ -5893,167 +5989,7 @@
               </a:defRPr>
             </a:pPr>
             <a:r>
-              <a:t>Why it helps</a:t>
-            </a:r>
-          </a:p>
-          <a:p>
-            <a:pPr>
-              <a:spcBef>
-                <a:spcPts val="400"/>
-              </a:spcBef>
-              <a:defRPr sz="1050">
-                <a:solidFill>
-                  <a:srgbClr val="242424"/>
-                </a:solidFill>
-                <a:latin typeface="Aptos"/>
-              </a:defRPr>
-            </a:pPr>
-            <a:r>
-              <a:t>• MIP/Purview setup</a:t>
-            </a:r>
-            <a:br/>
-            <a:r>
-              <a:t>• Tenant policy dependency</a:t>
-            </a:r>
-          </a:p>
-        </p:txBody>
-      </p:sp>
-      <p:sp>
-        <p:nvSpPr>
-          <p:cNvPr id="11" name="Rounded Rectangle 10"/>
-          <p:cNvSpPr/>
-          <p:nvPr/>
-        </p:nvSpPr>
-        <p:spPr>
-          <a:xfrm>
-            <a:off x="822960" y="4160520"/>
-            <a:ext cx="10424160" cy="868680"/>
-          </a:xfrm>
-          <a:prstGeom prst="roundRect">
-            <a:avLst/>
-          </a:prstGeom>
-          <a:solidFill>
-            <a:srgbClr val="FFFFFF"/>
-          </a:solidFill>
-          <a:ln>
-            <a:solidFill>
-              <a:srgbClr val="DCDCDC"/>
-            </a:solidFill>
-          </a:ln>
-        </p:spPr>
-        <p:style>
-          <a:lnRef idx="1">
-            <a:schemeClr val="accent1"/>
-          </a:lnRef>
-          <a:fillRef idx="3">
-            <a:schemeClr val="accent1"/>
-          </a:fillRef>
-          <a:effectRef idx="2">
-            <a:schemeClr val="accent1"/>
-          </a:effectRef>
-          <a:fontRef idx="minor">
-            <a:schemeClr val="lt1"/>
-          </a:fontRef>
-        </p:style>
-        <p:txBody>
-          <a:bodyPr rtlCol="0" anchor="ctr"/>
-          <a:lstStyle/>
-          <a:p>
-            <a:pPr algn="ctr"/>
-          </a:p>
-        </p:txBody>
-      </p:sp>
-      <p:sp>
-        <p:nvSpPr>
-          <p:cNvPr id="12" name="Rectangle 11"/>
-          <p:cNvSpPr/>
-          <p:nvPr/>
-        </p:nvSpPr>
-        <p:spPr>
-          <a:xfrm>
-            <a:off x="822960" y="4160520"/>
-            <a:ext cx="91440" cy="868680"/>
-          </a:xfrm>
-          <a:prstGeom prst="rect">
-            <a:avLst/>
-          </a:prstGeom>
-          <a:solidFill>
-            <a:srgbClr val="F9B700"/>
-          </a:solidFill>
-          <a:ln>
-            <a:noFill/>
-          </a:ln>
-        </p:spPr>
-        <p:style>
-          <a:lnRef idx="1">
-            <a:schemeClr val="accent1"/>
-          </a:lnRef>
-          <a:fillRef idx="3">
-            <a:schemeClr val="accent1"/>
-          </a:fillRef>
-          <a:effectRef idx="2">
-            <a:schemeClr val="accent1"/>
-          </a:effectRef>
-          <a:fontRef idx="minor">
-            <a:schemeClr val="lt1"/>
-          </a:fontRef>
-        </p:style>
-        <p:txBody>
-          <a:bodyPr rtlCol="0" anchor="ctr"/>
-          <a:lstStyle/>
-          <a:p>
-            <a:pPr algn="ctr"/>
-          </a:p>
-        </p:txBody>
-      </p:sp>
-      <p:sp>
-        <p:nvSpPr>
-          <p:cNvPr id="13" name="TextBox 12"/>
-          <p:cNvSpPr txBox="1"/>
-          <p:nvPr/>
-        </p:nvSpPr>
-        <p:spPr>
-          <a:xfrm>
-            <a:off x="1005840" y="4270248"/>
-            <a:ext cx="10104120" cy="704088"/>
-          </a:xfrm>
-          <a:prstGeom prst="rect">
-            <a:avLst/>
-          </a:prstGeom>
-          <a:noFill/>
-        </p:spPr>
-        <p:txBody>
-          <a:bodyPr wrap="square" lIns="0" rIns="0">
-            <a:spAutoFit/>
-          </a:bodyPr>
-          <a:lstStyle/>
-          <a:p>
-            <a:pPr>
-              <a:defRPr b="1" sz="1500">
-                <a:solidFill>
-                  <a:srgbClr val="1E2761"/>
-                </a:solidFill>
-                <a:latin typeface="Aptos Display"/>
-              </a:defRPr>
-            </a:pPr>
-            <a:r>
-              <a:t>Lab connection</a:t>
-            </a:r>
-          </a:p>
-          <a:p>
-            <a:pPr>
-              <a:spcBef>
-                <a:spcPts val="400"/>
-              </a:spcBef>
-              <a:defRPr sz="1050">
-                <a:solidFill>
-                  <a:srgbClr val="242424"/>
-                </a:solidFill>
-                <a:latin typeface="Aptos"/>
-              </a:defRPr>
-            </a:pPr>
-            <a:r>
-              <a:t>Coverage: Covered. Use the lab README to demonstrate or discuss this topic. Review terms: dependency, setup.</a:t>
+              <a:t>In the lab, you will apply this pattern, validate the expected behavior, and discuss where it fits in a real Power BI solution.</a:t>
             </a:r>
           </a:p>
         </p:txBody>
@@ -6192,42 +6128,6 @@
       </p:sp>
       <p:sp>
         <p:nvSpPr>
-          <p:cNvPr id="4" name="TextBox 3"/>
-          <p:cNvSpPr txBox="1"/>
-          <p:nvPr/>
-        </p:nvSpPr>
-        <p:spPr>
-          <a:xfrm>
-            <a:off x="530352" y="914400"/>
-            <a:ext cx="10515600" cy="320040"/>
-          </a:xfrm>
-          <a:prstGeom prst="rect">
-            <a:avLst/>
-          </a:prstGeom>
-          <a:noFill/>
-        </p:spPr>
-        <p:txBody>
-          <a:bodyPr wrap="none">
-            <a:spAutoFit/>
-          </a:bodyPr>
-          <a:lstStyle/>
-          <a:p>
-            <a:pPr>
-              <a:defRPr sz="1200">
-                <a:solidFill>
-                  <a:srgbClr val="5C5C5C"/>
-                </a:solidFill>
-                <a:latin typeface="Aptos"/>
-              </a:defRPr>
-            </a:pPr>
-            <a:r>
-              <a:t>Talking points, learner value, and lab connection</a:t>
-            </a:r>
-          </a:p>
-        </p:txBody>
-      </p:sp>
-      <p:sp>
-        <p:nvSpPr>
           <p:cNvPr id="5" name="Rounded Rectangle 4"/>
           <p:cNvSpPr/>
           <p:nvPr/>
@@ -6345,7 +6245,143 @@
               </a:defRPr>
             </a:pPr>
             <a:r>
-              <a:t>Talking points</a:t>
+              <a:t>Key ideas</a:t>
+            </a:r>
+            <a:br/>
+            <a:r>
+              <a:t>• Direct sharing</a:t>
+            </a:r>
+            <a:br/>
+            <a:r>
+              <a:t>• Apps</a:t>
+            </a:r>
+            <a:br/>
+            <a:r>
+              <a:t>• Workspace access</a:t>
+            </a:r>
+          </a:p>
+        </p:txBody>
+      </p:sp>
+      <p:sp>
+        <p:nvSpPr>
+          <p:cNvPr id="8" name="Rounded Rectangle 7"/>
+          <p:cNvSpPr/>
+          <p:nvPr/>
+        </p:nvSpPr>
+        <p:spPr>
+          <a:xfrm>
+            <a:off x="6263640" y="1234440"/>
+            <a:ext cx="5303520" cy="1828800"/>
+          </a:xfrm>
+          <a:prstGeom prst="roundRect">
+            <a:avLst/>
+          </a:prstGeom>
+          <a:solidFill>
+            <a:srgbClr val="FFFFFF"/>
+          </a:solidFill>
+          <a:ln>
+            <a:solidFill>
+              <a:srgbClr val="DCDCDC"/>
+            </a:solidFill>
+          </a:ln>
+        </p:spPr>
+        <p:style>
+          <a:lnRef idx="1">
+            <a:schemeClr val="accent1"/>
+          </a:lnRef>
+          <a:fillRef idx="3">
+            <a:schemeClr val="accent1"/>
+          </a:fillRef>
+          <a:effectRef idx="2">
+            <a:schemeClr val="accent1"/>
+          </a:effectRef>
+          <a:fontRef idx="minor">
+            <a:schemeClr val="lt1"/>
+          </a:fontRef>
+        </p:style>
+        <p:txBody>
+          <a:bodyPr rtlCol="0" anchor="ctr"/>
+          <a:lstStyle/>
+          <a:p>
+            <a:pPr algn="ctr"/>
+          </a:p>
+        </p:txBody>
+      </p:sp>
+      <p:sp>
+        <p:nvSpPr>
+          <p:cNvPr id="9" name="Rectangle 8"/>
+          <p:cNvSpPr/>
+          <p:nvPr/>
+        </p:nvSpPr>
+        <p:spPr>
+          <a:xfrm>
+            <a:off x="6263640" y="1234440"/>
+            <a:ext cx="91440" cy="1828800"/>
+          </a:xfrm>
+          <a:prstGeom prst="rect">
+            <a:avLst/>
+          </a:prstGeom>
+          <a:solidFill>
+            <a:srgbClr val="02C39A"/>
+          </a:solidFill>
+          <a:ln>
+            <a:noFill/>
+          </a:ln>
+        </p:spPr>
+        <p:style>
+          <a:lnRef idx="1">
+            <a:schemeClr val="accent1"/>
+          </a:lnRef>
+          <a:fillRef idx="3">
+            <a:schemeClr val="accent1"/>
+          </a:fillRef>
+          <a:effectRef idx="2">
+            <a:schemeClr val="accent1"/>
+          </a:effectRef>
+          <a:fontRef idx="minor">
+            <a:schemeClr val="lt1"/>
+          </a:fontRef>
+        </p:style>
+        <p:txBody>
+          <a:bodyPr rtlCol="0" anchor="ctr"/>
+          <a:lstStyle/>
+          <a:p>
+            <a:pPr algn="ctr"/>
+          </a:p>
+        </p:txBody>
+      </p:sp>
+      <p:sp>
+        <p:nvSpPr>
+          <p:cNvPr id="10" name="TextBox 9"/>
+          <p:cNvSpPr txBox="1"/>
+          <p:nvPr/>
+        </p:nvSpPr>
+        <p:spPr>
+          <a:xfrm>
+            <a:off x="6446520" y="1344168"/>
+            <a:ext cx="4983480" cy="1664208"/>
+          </a:xfrm>
+          <a:prstGeom prst="rect">
+            <a:avLst/>
+          </a:prstGeom>
+          <a:noFill/>
+        </p:spPr>
+        <p:txBody>
+          <a:bodyPr wrap="square" lIns="0" rIns="0">
+            <a:spAutoFit/>
+          </a:bodyPr>
+          <a:lstStyle/>
+          <a:p>
+            <a:pPr>
+              <a:defRPr b="1" sz="1500">
+                <a:solidFill>
+                  <a:srgbClr val="1E2761"/>
+                </a:solidFill>
+                <a:latin typeface="Aptos Display"/>
+              </a:defRPr>
+            </a:pPr>
+            <a:r>
+              <a:t>Why it helps</a:t>
             </a:r>
           </a:p>
           <a:p>
@@ -6361,29 +6397,25 @@
               </a:defRPr>
             </a:pPr>
             <a:r>
-              <a:t>• Direct sharing</a:t>
+              <a:t>• B2B and guest users</a:t>
             </a:r>
             <a:br/>
             <a:r>
-              <a:t>• Apps</a:t>
-            </a:r>
-            <a:br/>
-            <a:r>
-              <a:t>• Workspace access</a:t>
-            </a:r>
-          </a:p>
-        </p:txBody>
-      </p:sp>
-      <p:sp>
-        <p:nvSpPr>
-          <p:cNvPr id="8" name="Rounded Rectangle 7"/>
+              <a:t>• Gov restrictions</a:t>
+            </a:r>
+          </a:p>
+        </p:txBody>
+      </p:sp>
+      <p:sp>
+        <p:nvSpPr>
+          <p:cNvPr id="11" name="Rounded Rectangle 10"/>
           <p:cNvSpPr/>
           <p:nvPr/>
         </p:nvSpPr>
         <p:spPr>
           <a:xfrm>
-            <a:off x="6263640" y="1234440"/>
-            <a:ext cx="5303520" cy="1828800"/>
+            <a:off x="822960" y="4160520"/>
+            <a:ext cx="10424160" cy="868680"/>
           </a:xfrm>
           <a:prstGeom prst="roundRect">
             <a:avLst/>
@@ -6421,20 +6453,20 @@
       </p:sp>
       <p:sp>
         <p:nvSpPr>
-          <p:cNvPr id="9" name="Rectangle 8"/>
+          <p:cNvPr id="12" name="Rectangle 11"/>
           <p:cNvSpPr/>
           <p:nvPr/>
         </p:nvSpPr>
         <p:spPr>
           <a:xfrm>
-            <a:off x="6263640" y="1234440"/>
-            <a:ext cx="91440" cy="1828800"/>
+            <a:off x="822960" y="4160520"/>
+            <a:ext cx="91440" cy="868680"/>
           </a:xfrm>
           <a:prstGeom prst="rect">
             <a:avLst/>
           </a:prstGeom>
           <a:solidFill>
-            <a:srgbClr val="02C39A"/>
+            <a:srgbClr val="F9B700"/>
           </a:solidFill>
           <a:ln>
             <a:noFill/>
@@ -6464,14 +6496,14 @@
       </p:sp>
       <p:sp>
         <p:nvSpPr>
-          <p:cNvPr id="10" name="TextBox 9"/>
+          <p:cNvPr id="13" name="TextBox 12"/>
           <p:cNvSpPr txBox="1"/>
           <p:nvPr/>
         </p:nvSpPr>
         <p:spPr>
           <a:xfrm>
-            <a:off x="6446520" y="1344168"/>
-            <a:ext cx="4983480" cy="1664208"/>
+            <a:off x="1005840" y="4270248"/>
+            <a:ext cx="10104120" cy="704088"/>
           </a:xfrm>
           <a:prstGeom prst="rect">
             <a:avLst/>
@@ -6493,167 +6525,7 @@
               </a:defRPr>
             </a:pPr>
             <a:r>
-              <a:t>Why it helps</a:t>
-            </a:r>
-          </a:p>
-          <a:p>
-            <a:pPr>
-              <a:spcBef>
-                <a:spcPts val="400"/>
-              </a:spcBef>
-              <a:defRPr sz="1050">
-                <a:solidFill>
-                  <a:srgbClr val="242424"/>
-                </a:solidFill>
-                <a:latin typeface="Aptos"/>
-              </a:defRPr>
-            </a:pPr>
-            <a:r>
-              <a:t>• B2B and guest users</a:t>
-            </a:r>
-            <a:br/>
-            <a:r>
-              <a:t>• Gov restrictions</a:t>
-            </a:r>
-          </a:p>
-        </p:txBody>
-      </p:sp>
-      <p:sp>
-        <p:nvSpPr>
-          <p:cNvPr id="11" name="Rounded Rectangle 10"/>
-          <p:cNvSpPr/>
-          <p:nvPr/>
-        </p:nvSpPr>
-        <p:spPr>
-          <a:xfrm>
-            <a:off x="822960" y="4160520"/>
-            <a:ext cx="10424160" cy="868680"/>
-          </a:xfrm>
-          <a:prstGeom prst="roundRect">
-            <a:avLst/>
-          </a:prstGeom>
-          <a:solidFill>
-            <a:srgbClr val="FFFFFF"/>
-          </a:solidFill>
-          <a:ln>
-            <a:solidFill>
-              <a:srgbClr val="DCDCDC"/>
-            </a:solidFill>
-          </a:ln>
-        </p:spPr>
-        <p:style>
-          <a:lnRef idx="1">
-            <a:schemeClr val="accent1"/>
-          </a:lnRef>
-          <a:fillRef idx="3">
-            <a:schemeClr val="accent1"/>
-          </a:fillRef>
-          <a:effectRef idx="2">
-            <a:schemeClr val="accent1"/>
-          </a:effectRef>
-          <a:fontRef idx="minor">
-            <a:schemeClr val="lt1"/>
-          </a:fontRef>
-        </p:style>
-        <p:txBody>
-          <a:bodyPr rtlCol="0" anchor="ctr"/>
-          <a:lstStyle/>
-          <a:p>
-            <a:pPr algn="ctr"/>
-          </a:p>
-        </p:txBody>
-      </p:sp>
-      <p:sp>
-        <p:nvSpPr>
-          <p:cNvPr id="12" name="Rectangle 11"/>
-          <p:cNvSpPr/>
-          <p:nvPr/>
-        </p:nvSpPr>
-        <p:spPr>
-          <a:xfrm>
-            <a:off x="822960" y="4160520"/>
-            <a:ext cx="91440" cy="868680"/>
-          </a:xfrm>
-          <a:prstGeom prst="rect">
-            <a:avLst/>
-          </a:prstGeom>
-          <a:solidFill>
-            <a:srgbClr val="F9B700"/>
-          </a:solidFill>
-          <a:ln>
-            <a:noFill/>
-          </a:ln>
-        </p:spPr>
-        <p:style>
-          <a:lnRef idx="1">
-            <a:schemeClr val="accent1"/>
-          </a:lnRef>
-          <a:fillRef idx="3">
-            <a:schemeClr val="accent1"/>
-          </a:fillRef>
-          <a:effectRef idx="2">
-            <a:schemeClr val="accent1"/>
-          </a:effectRef>
-          <a:fontRef idx="minor">
-            <a:schemeClr val="lt1"/>
-          </a:fontRef>
-        </p:style>
-        <p:txBody>
-          <a:bodyPr rtlCol="0" anchor="ctr"/>
-          <a:lstStyle/>
-          <a:p>
-            <a:pPr algn="ctr"/>
-          </a:p>
-        </p:txBody>
-      </p:sp>
-      <p:sp>
-        <p:nvSpPr>
-          <p:cNvPr id="13" name="TextBox 12"/>
-          <p:cNvSpPr txBox="1"/>
-          <p:nvPr/>
-        </p:nvSpPr>
-        <p:spPr>
-          <a:xfrm>
-            <a:off x="1005840" y="4270248"/>
-            <a:ext cx="10104120" cy="704088"/>
-          </a:xfrm>
-          <a:prstGeom prst="rect">
-            <a:avLst/>
-          </a:prstGeom>
-          <a:noFill/>
-        </p:spPr>
-        <p:txBody>
-          <a:bodyPr wrap="square" lIns="0" rIns="0">
-            <a:spAutoFit/>
-          </a:bodyPr>
-          <a:lstStyle/>
-          <a:p>
-            <a:pPr>
-              <a:defRPr b="1" sz="1500">
-                <a:solidFill>
-                  <a:srgbClr val="1E2761"/>
-                </a:solidFill>
-                <a:latin typeface="Aptos Display"/>
-              </a:defRPr>
-            </a:pPr>
-            <a:r>
-              <a:t>Lab connection</a:t>
-            </a:r>
-          </a:p>
-          <a:p>
-            <a:pPr>
-              <a:spcBef>
-                <a:spcPts val="400"/>
-              </a:spcBef>
-              <a:defRPr sz="1050">
-                <a:solidFill>
-                  <a:srgbClr val="242424"/>
-                </a:solidFill>
-                <a:latin typeface="Aptos"/>
-              </a:defRPr>
-            </a:pPr>
-            <a:r>
-              <a:t>Coverage: Partial. Use the lab README to demonstrate or discuss this topic. Review terms: direct, guest, restrictions, workspace.</a:t>
+              <a:t>In the lab, you will apply this pattern, validate the expected behavior, and discuss where it fits in a real Power BI solution.</a:t>
             </a:r>
           </a:p>
         </p:txBody>
@@ -6792,42 +6664,6 @@
       </p:sp>
       <p:sp>
         <p:nvSpPr>
-          <p:cNvPr id="4" name="TextBox 3"/>
-          <p:cNvSpPr txBox="1"/>
-          <p:nvPr/>
-        </p:nvSpPr>
-        <p:spPr>
-          <a:xfrm>
-            <a:off x="530352" y="914400"/>
-            <a:ext cx="10515600" cy="320040"/>
-          </a:xfrm>
-          <a:prstGeom prst="rect">
-            <a:avLst/>
-          </a:prstGeom>
-          <a:noFill/>
-        </p:spPr>
-        <p:txBody>
-          <a:bodyPr wrap="none">
-            <a:spAutoFit/>
-          </a:bodyPr>
-          <a:lstStyle/>
-          <a:p>
-            <a:pPr>
-              <a:defRPr sz="1200">
-                <a:solidFill>
-                  <a:srgbClr val="5C5C5C"/>
-                </a:solidFill>
-                <a:latin typeface="Aptos"/>
-              </a:defRPr>
-            </a:pPr>
-            <a:r>
-              <a:t>Talking points, learner value, and lab connection</a:t>
-            </a:r>
-          </a:p>
-        </p:txBody>
-      </p:sp>
-      <p:sp>
-        <p:nvSpPr>
           <p:cNvPr id="5" name="Rounded Rectangle 4"/>
           <p:cNvSpPr/>
           <p:nvPr/>
@@ -6945,7 +6781,143 @@
               </a:defRPr>
             </a:pPr>
             <a:r>
-              <a:t>Talking points</a:t>
+              <a:t>Key ideas</a:t>
+            </a:r>
+            <a:br/>
+            <a:r>
+              <a:t>• Test as role</a:t>
+            </a:r>
+            <a:br/>
+            <a:r>
+              <a:t>• Test users</a:t>
+            </a:r>
+            <a:br/>
+            <a:r>
+              <a:t>• Group membership</a:t>
+            </a:r>
+          </a:p>
+        </p:txBody>
+      </p:sp>
+      <p:sp>
+        <p:nvSpPr>
+          <p:cNvPr id="8" name="Rounded Rectangle 7"/>
+          <p:cNvSpPr/>
+          <p:nvPr/>
+        </p:nvSpPr>
+        <p:spPr>
+          <a:xfrm>
+            <a:off x="6263640" y="1234440"/>
+            <a:ext cx="5303520" cy="1828800"/>
+          </a:xfrm>
+          <a:prstGeom prst="roundRect">
+            <a:avLst/>
+          </a:prstGeom>
+          <a:solidFill>
+            <a:srgbClr val="FFFFFF"/>
+          </a:solidFill>
+          <a:ln>
+            <a:solidFill>
+              <a:srgbClr val="DCDCDC"/>
+            </a:solidFill>
+          </a:ln>
+        </p:spPr>
+        <p:style>
+          <a:lnRef idx="1">
+            <a:schemeClr val="accent1"/>
+          </a:lnRef>
+          <a:fillRef idx="3">
+            <a:schemeClr val="accent1"/>
+          </a:fillRef>
+          <a:effectRef idx="2">
+            <a:schemeClr val="accent1"/>
+          </a:effectRef>
+          <a:fontRef idx="minor">
+            <a:schemeClr val="lt1"/>
+          </a:fontRef>
+        </p:style>
+        <p:txBody>
+          <a:bodyPr rtlCol="0" anchor="ctr"/>
+          <a:lstStyle/>
+          <a:p>
+            <a:pPr algn="ctr"/>
+          </a:p>
+        </p:txBody>
+      </p:sp>
+      <p:sp>
+        <p:nvSpPr>
+          <p:cNvPr id="9" name="Rectangle 8"/>
+          <p:cNvSpPr/>
+          <p:nvPr/>
+        </p:nvSpPr>
+        <p:spPr>
+          <a:xfrm>
+            <a:off x="6263640" y="1234440"/>
+            <a:ext cx="91440" cy="1828800"/>
+          </a:xfrm>
+          <a:prstGeom prst="rect">
+            <a:avLst/>
+          </a:prstGeom>
+          <a:solidFill>
+            <a:srgbClr val="02C39A"/>
+          </a:solidFill>
+          <a:ln>
+            <a:noFill/>
+          </a:ln>
+        </p:spPr>
+        <p:style>
+          <a:lnRef idx="1">
+            <a:schemeClr val="accent1"/>
+          </a:lnRef>
+          <a:fillRef idx="3">
+            <a:schemeClr val="accent1"/>
+          </a:fillRef>
+          <a:effectRef idx="2">
+            <a:schemeClr val="accent1"/>
+          </a:effectRef>
+          <a:fontRef idx="minor">
+            <a:schemeClr val="lt1"/>
+          </a:fontRef>
+        </p:style>
+        <p:txBody>
+          <a:bodyPr rtlCol="0" anchor="ctr"/>
+          <a:lstStyle/>
+          <a:p>
+            <a:pPr algn="ctr"/>
+          </a:p>
+        </p:txBody>
+      </p:sp>
+      <p:sp>
+        <p:nvSpPr>
+          <p:cNvPr id="10" name="TextBox 9"/>
+          <p:cNvSpPr txBox="1"/>
+          <p:nvPr/>
+        </p:nvSpPr>
+        <p:spPr>
+          <a:xfrm>
+            <a:off x="6446520" y="1344168"/>
+            <a:ext cx="4983480" cy="1664208"/>
+          </a:xfrm>
+          <a:prstGeom prst="rect">
+            <a:avLst/>
+          </a:prstGeom>
+          <a:noFill/>
+        </p:spPr>
+        <p:txBody>
+          <a:bodyPr wrap="square" lIns="0" rIns="0">
+            <a:spAutoFit/>
+          </a:bodyPr>
+          <a:lstStyle/>
+          <a:p>
+            <a:pPr>
+              <a:defRPr b="1" sz="1500">
+                <a:solidFill>
+                  <a:srgbClr val="1E2761"/>
+                </a:solidFill>
+                <a:latin typeface="Aptos Display"/>
+              </a:defRPr>
+            </a:pPr>
+            <a:r>
+              <a:t>Why it helps</a:t>
             </a:r>
           </a:p>
           <a:p>
@@ -6961,29 +6933,25 @@
               </a:defRPr>
             </a:pPr>
             <a:r>
-              <a:t>• Test as role</a:t>
+              <a:t>• Negative testing</a:t>
             </a:r>
             <a:br/>
             <a:r>
-              <a:t>• Test users</a:t>
-            </a:r>
-            <a:br/>
-            <a:r>
-              <a:t>• Group membership</a:t>
-            </a:r>
-          </a:p>
-        </p:txBody>
-      </p:sp>
-      <p:sp>
-        <p:nvSpPr>
-          <p:cNvPr id="8" name="Rounded Rectangle 7"/>
+              <a:t>• Documentation</a:t>
+            </a:r>
+          </a:p>
+        </p:txBody>
+      </p:sp>
+      <p:sp>
+        <p:nvSpPr>
+          <p:cNvPr id="11" name="Rounded Rectangle 10"/>
           <p:cNvSpPr/>
           <p:nvPr/>
         </p:nvSpPr>
         <p:spPr>
           <a:xfrm>
-            <a:off x="6263640" y="1234440"/>
-            <a:ext cx="5303520" cy="1828800"/>
+            <a:off x="822960" y="4160520"/>
+            <a:ext cx="10424160" cy="868680"/>
           </a:xfrm>
           <a:prstGeom prst="roundRect">
             <a:avLst/>
@@ -7021,20 +6989,20 @@
       </p:sp>
       <p:sp>
         <p:nvSpPr>
-          <p:cNvPr id="9" name="Rectangle 8"/>
+          <p:cNvPr id="12" name="Rectangle 11"/>
           <p:cNvSpPr/>
           <p:nvPr/>
         </p:nvSpPr>
         <p:spPr>
           <a:xfrm>
-            <a:off x="6263640" y="1234440"/>
-            <a:ext cx="91440" cy="1828800"/>
+            <a:off x="822960" y="4160520"/>
+            <a:ext cx="91440" cy="868680"/>
           </a:xfrm>
           <a:prstGeom prst="rect">
             <a:avLst/>
           </a:prstGeom>
           <a:solidFill>
-            <a:srgbClr val="02C39A"/>
+            <a:srgbClr val="F9B700"/>
           </a:solidFill>
           <a:ln>
             <a:noFill/>
@@ -7064,14 +7032,14 @@
       </p:sp>
       <p:sp>
         <p:nvSpPr>
-          <p:cNvPr id="10" name="TextBox 9"/>
+          <p:cNvPr id="13" name="TextBox 12"/>
           <p:cNvSpPr txBox="1"/>
           <p:nvPr/>
         </p:nvSpPr>
         <p:spPr>
           <a:xfrm>
-            <a:off x="6446520" y="1344168"/>
-            <a:ext cx="4983480" cy="1664208"/>
+            <a:off x="1005840" y="4270248"/>
+            <a:ext cx="10104120" cy="704088"/>
           </a:xfrm>
           <a:prstGeom prst="rect">
             <a:avLst/>
@@ -7093,167 +7061,7 @@
               </a:defRPr>
             </a:pPr>
             <a:r>
-              <a:t>Why it helps</a:t>
-            </a:r>
-          </a:p>
-          <a:p>
-            <a:pPr>
-              <a:spcBef>
-                <a:spcPts val="400"/>
-              </a:spcBef>
-              <a:defRPr sz="1050">
-                <a:solidFill>
-                  <a:srgbClr val="242424"/>
-                </a:solidFill>
-                <a:latin typeface="Aptos"/>
-              </a:defRPr>
-            </a:pPr>
-            <a:r>
-              <a:t>• Negative testing</a:t>
-            </a:r>
-            <a:br/>
-            <a:r>
-              <a:t>• Documentation</a:t>
-            </a:r>
-          </a:p>
-        </p:txBody>
-      </p:sp>
-      <p:sp>
-        <p:nvSpPr>
-          <p:cNvPr id="11" name="Rounded Rectangle 10"/>
-          <p:cNvSpPr/>
-          <p:nvPr/>
-        </p:nvSpPr>
-        <p:spPr>
-          <a:xfrm>
-            <a:off x="822960" y="4160520"/>
-            <a:ext cx="10424160" cy="868680"/>
-          </a:xfrm>
-          <a:prstGeom prst="roundRect">
-            <a:avLst/>
-          </a:prstGeom>
-          <a:solidFill>
-            <a:srgbClr val="FFFFFF"/>
-          </a:solidFill>
-          <a:ln>
-            <a:solidFill>
-              <a:srgbClr val="DCDCDC"/>
-            </a:solidFill>
-          </a:ln>
-        </p:spPr>
-        <p:style>
-          <a:lnRef idx="1">
-            <a:schemeClr val="accent1"/>
-          </a:lnRef>
-          <a:fillRef idx="3">
-            <a:schemeClr val="accent1"/>
-          </a:fillRef>
-          <a:effectRef idx="2">
-            <a:schemeClr val="accent1"/>
-          </a:effectRef>
-          <a:fontRef idx="minor">
-            <a:schemeClr val="lt1"/>
-          </a:fontRef>
-        </p:style>
-        <p:txBody>
-          <a:bodyPr rtlCol="0" anchor="ctr"/>
-          <a:lstStyle/>
-          <a:p>
-            <a:pPr algn="ctr"/>
-          </a:p>
-        </p:txBody>
-      </p:sp>
-      <p:sp>
-        <p:nvSpPr>
-          <p:cNvPr id="12" name="Rectangle 11"/>
-          <p:cNvSpPr/>
-          <p:nvPr/>
-        </p:nvSpPr>
-        <p:spPr>
-          <a:xfrm>
-            <a:off x="822960" y="4160520"/>
-            <a:ext cx="91440" cy="868680"/>
-          </a:xfrm>
-          <a:prstGeom prst="rect">
-            <a:avLst/>
-          </a:prstGeom>
-          <a:solidFill>
-            <a:srgbClr val="F9B700"/>
-          </a:solidFill>
-          <a:ln>
-            <a:noFill/>
-          </a:ln>
-        </p:spPr>
-        <p:style>
-          <a:lnRef idx="1">
-            <a:schemeClr val="accent1"/>
-          </a:lnRef>
-          <a:fillRef idx="3">
-            <a:schemeClr val="accent1"/>
-          </a:fillRef>
-          <a:effectRef idx="2">
-            <a:schemeClr val="accent1"/>
-          </a:effectRef>
-          <a:fontRef idx="minor">
-            <a:schemeClr val="lt1"/>
-          </a:fontRef>
-        </p:style>
-        <p:txBody>
-          <a:bodyPr rtlCol="0" anchor="ctr"/>
-          <a:lstStyle/>
-          <a:p>
-            <a:pPr algn="ctr"/>
-          </a:p>
-        </p:txBody>
-      </p:sp>
-      <p:sp>
-        <p:nvSpPr>
-          <p:cNvPr id="13" name="TextBox 12"/>
-          <p:cNvSpPr txBox="1"/>
-          <p:nvPr/>
-        </p:nvSpPr>
-        <p:spPr>
-          <a:xfrm>
-            <a:off x="1005840" y="4270248"/>
-            <a:ext cx="10104120" cy="704088"/>
-          </a:xfrm>
-          <a:prstGeom prst="rect">
-            <a:avLst/>
-          </a:prstGeom>
-          <a:noFill/>
-        </p:spPr>
-        <p:txBody>
-          <a:bodyPr wrap="square" lIns="0" rIns="0">
-            <a:spAutoFit/>
-          </a:bodyPr>
-          <a:lstStyle/>
-          <a:p>
-            <a:pPr>
-              <a:defRPr b="1" sz="1500">
-                <a:solidFill>
-                  <a:srgbClr val="1E2761"/>
-                </a:solidFill>
-                <a:latin typeface="Aptos Display"/>
-              </a:defRPr>
-            </a:pPr>
-            <a:r>
-              <a:t>Lab connection</a:t>
-            </a:r>
-          </a:p>
-          <a:p>
-            <a:pPr>
-              <a:spcBef>
-                <a:spcPts val="400"/>
-              </a:spcBef>
-              <a:defRPr sz="1050">
-                <a:solidFill>
-                  <a:srgbClr val="242424"/>
-                </a:solidFill>
-                <a:latin typeface="Aptos"/>
-              </a:defRPr>
-            </a:pPr>
-            <a:r>
-              <a:t>Coverage: Covered. Use the lab README to demonstrate or discuss this topic. Review terms: documentation, membership, negative.</a:t>
+              <a:t>In the lab, you will apply this pattern, validate the expected behavior, and discuss where it fits in a real Power BI solution.</a:t>
             </a:r>
           </a:p>
         </p:txBody>
@@ -7392,42 +7200,6 @@
       </p:sp>
       <p:sp>
         <p:nvSpPr>
-          <p:cNvPr id="4" name="TextBox 3"/>
-          <p:cNvSpPr txBox="1"/>
-          <p:nvPr/>
-        </p:nvSpPr>
-        <p:spPr>
-          <a:xfrm>
-            <a:off x="530352" y="914400"/>
-            <a:ext cx="10515600" cy="320040"/>
-          </a:xfrm>
-          <a:prstGeom prst="rect">
-            <a:avLst/>
-          </a:prstGeom>
-          <a:noFill/>
-        </p:spPr>
-        <p:txBody>
-          <a:bodyPr wrap="none">
-            <a:spAutoFit/>
-          </a:bodyPr>
-          <a:lstStyle/>
-          <a:p>
-            <a:pPr>
-              <a:defRPr sz="1200">
-                <a:solidFill>
-                  <a:srgbClr val="5C5C5C"/>
-                </a:solidFill>
-                <a:latin typeface="Aptos"/>
-              </a:defRPr>
-            </a:pPr>
-            <a:r>
-              <a:t>Talking points, learner value, and lab connection</a:t>
-            </a:r>
-          </a:p>
-        </p:txBody>
-      </p:sp>
-      <p:sp>
-        <p:nvSpPr>
           <p:cNvPr id="5" name="Rounded Rectangle 4"/>
           <p:cNvSpPr/>
           <p:nvPr/>
@@ -7545,7 +7317,139 @@
               </a:defRPr>
             </a:pPr>
             <a:r>
-              <a:t>Talking points</a:t>
+              <a:t>Key ideas</a:t>
+            </a:r>
+            <a:br/>
+            <a:r>
+              <a:t>• RLS is Gov-ready.</a:t>
+            </a:r>
+            <a:br/>
+            <a:r>
+              <a:t>• OLS, labels, Purview, external sharing, and B2B require validation.</a:t>
+            </a:r>
+          </a:p>
+        </p:txBody>
+      </p:sp>
+      <p:sp>
+        <p:nvSpPr>
+          <p:cNvPr id="8" name="Rounded Rectangle 7"/>
+          <p:cNvSpPr/>
+          <p:nvPr/>
+        </p:nvSpPr>
+        <p:spPr>
+          <a:xfrm>
+            <a:off x="6263640" y="1234440"/>
+            <a:ext cx="5303520" cy="1828800"/>
+          </a:xfrm>
+          <a:prstGeom prst="roundRect">
+            <a:avLst/>
+          </a:prstGeom>
+          <a:solidFill>
+            <a:srgbClr val="FFFFFF"/>
+          </a:solidFill>
+          <a:ln>
+            <a:solidFill>
+              <a:srgbClr val="DCDCDC"/>
+            </a:solidFill>
+          </a:ln>
+        </p:spPr>
+        <p:style>
+          <a:lnRef idx="1">
+            <a:schemeClr val="accent1"/>
+          </a:lnRef>
+          <a:fillRef idx="3">
+            <a:schemeClr val="accent1"/>
+          </a:fillRef>
+          <a:effectRef idx="2">
+            <a:schemeClr val="accent1"/>
+          </a:effectRef>
+          <a:fontRef idx="minor">
+            <a:schemeClr val="lt1"/>
+          </a:fontRef>
+        </p:style>
+        <p:txBody>
+          <a:bodyPr rtlCol="0" anchor="ctr"/>
+          <a:lstStyle/>
+          <a:p>
+            <a:pPr algn="ctr"/>
+          </a:p>
+        </p:txBody>
+      </p:sp>
+      <p:sp>
+        <p:nvSpPr>
+          <p:cNvPr id="9" name="Rectangle 8"/>
+          <p:cNvSpPr/>
+          <p:nvPr/>
+        </p:nvSpPr>
+        <p:spPr>
+          <a:xfrm>
+            <a:off x="6263640" y="1234440"/>
+            <a:ext cx="91440" cy="1828800"/>
+          </a:xfrm>
+          <a:prstGeom prst="rect">
+            <a:avLst/>
+          </a:prstGeom>
+          <a:solidFill>
+            <a:srgbClr val="02C39A"/>
+          </a:solidFill>
+          <a:ln>
+            <a:noFill/>
+          </a:ln>
+        </p:spPr>
+        <p:style>
+          <a:lnRef idx="1">
+            <a:schemeClr val="accent1"/>
+          </a:lnRef>
+          <a:fillRef idx="3">
+            <a:schemeClr val="accent1"/>
+          </a:fillRef>
+          <a:effectRef idx="2">
+            <a:schemeClr val="accent1"/>
+          </a:effectRef>
+          <a:fontRef idx="minor">
+            <a:schemeClr val="lt1"/>
+          </a:fontRef>
+        </p:style>
+        <p:txBody>
+          <a:bodyPr rtlCol="0" anchor="ctr"/>
+          <a:lstStyle/>
+          <a:p>
+            <a:pPr algn="ctr"/>
+          </a:p>
+        </p:txBody>
+      </p:sp>
+      <p:sp>
+        <p:nvSpPr>
+          <p:cNvPr id="10" name="TextBox 9"/>
+          <p:cNvSpPr txBox="1"/>
+          <p:nvPr/>
+        </p:nvSpPr>
+        <p:spPr>
+          <a:xfrm>
+            <a:off x="6446520" y="1344168"/>
+            <a:ext cx="4983480" cy="1664208"/>
+          </a:xfrm>
+          <a:prstGeom prst="rect">
+            <a:avLst/>
+          </a:prstGeom>
+          <a:noFill/>
+        </p:spPr>
+        <p:txBody>
+          <a:bodyPr wrap="square" lIns="0" rIns="0">
+            <a:spAutoFit/>
+          </a:bodyPr>
+          <a:lstStyle/>
+          <a:p>
+            <a:pPr>
+              <a:defRPr b="1" sz="1500">
+                <a:solidFill>
+                  <a:srgbClr val="1E2761"/>
+                </a:solidFill>
+                <a:latin typeface="Aptos Display"/>
+              </a:defRPr>
+            </a:pPr>
+            <a:r>
+              <a:t>Why it helps</a:t>
             </a:r>
           </a:p>
           <a:p>
@@ -7561,25 +7465,21 @@
               </a:defRPr>
             </a:pPr>
             <a:r>
-              <a:t>• RLS is Gov-ready.</a:t>
-            </a:r>
-            <a:br/>
-            <a:r>
-              <a:t>• OLS, labels, Purview, external sharing, and B2B require validation.</a:t>
-            </a:r>
-          </a:p>
-        </p:txBody>
-      </p:sp>
-      <p:sp>
-        <p:nvSpPr>
-          <p:cNvPr id="8" name="Rounded Rectangle 7"/>
+              <a:t>• Customer policy may be stricter than platform capability.</a:t>
+            </a:r>
+          </a:p>
+        </p:txBody>
+      </p:sp>
+      <p:sp>
+        <p:nvSpPr>
+          <p:cNvPr id="11" name="Rounded Rectangle 10"/>
           <p:cNvSpPr/>
           <p:nvPr/>
         </p:nvSpPr>
         <p:spPr>
           <a:xfrm>
-            <a:off x="6263640" y="1234440"/>
-            <a:ext cx="5303520" cy="1828800"/>
+            <a:off x="822960" y="4160520"/>
+            <a:ext cx="10424160" cy="868680"/>
           </a:xfrm>
           <a:prstGeom prst="roundRect">
             <a:avLst/>
@@ -7617,20 +7517,20 @@
       </p:sp>
       <p:sp>
         <p:nvSpPr>
-          <p:cNvPr id="9" name="Rectangle 8"/>
+          <p:cNvPr id="12" name="Rectangle 11"/>
           <p:cNvSpPr/>
           <p:nvPr/>
         </p:nvSpPr>
         <p:spPr>
           <a:xfrm>
-            <a:off x="6263640" y="1234440"/>
-            <a:ext cx="91440" cy="1828800"/>
+            <a:off x="822960" y="4160520"/>
+            <a:ext cx="91440" cy="868680"/>
           </a:xfrm>
           <a:prstGeom prst="rect">
             <a:avLst/>
           </a:prstGeom>
           <a:solidFill>
-            <a:srgbClr val="02C39A"/>
+            <a:srgbClr val="F9B700"/>
           </a:solidFill>
           <a:ln>
             <a:noFill/>
@@ -7660,14 +7560,14 @@
       </p:sp>
       <p:sp>
         <p:nvSpPr>
-          <p:cNvPr id="10" name="TextBox 9"/>
+          <p:cNvPr id="13" name="TextBox 12"/>
           <p:cNvSpPr txBox="1"/>
           <p:nvPr/>
         </p:nvSpPr>
         <p:spPr>
           <a:xfrm>
-            <a:off x="6446520" y="1344168"/>
-            <a:ext cx="4983480" cy="1664208"/>
+            <a:off x="1005840" y="4270248"/>
+            <a:ext cx="10104120" cy="704088"/>
           </a:xfrm>
           <a:prstGeom prst="rect">
             <a:avLst/>
@@ -7689,163 +7589,7 @@
               </a:defRPr>
             </a:pPr>
             <a:r>
-              <a:t>Why it helps</a:t>
-            </a:r>
-          </a:p>
-          <a:p>
-            <a:pPr>
-              <a:spcBef>
-                <a:spcPts val="400"/>
-              </a:spcBef>
-              <a:defRPr sz="1050">
-                <a:solidFill>
-                  <a:srgbClr val="242424"/>
-                </a:solidFill>
-                <a:latin typeface="Aptos"/>
-              </a:defRPr>
-            </a:pPr>
-            <a:r>
-              <a:t>• Customer policy may be stricter than platform capability.</a:t>
-            </a:r>
-          </a:p>
-        </p:txBody>
-      </p:sp>
-      <p:sp>
-        <p:nvSpPr>
-          <p:cNvPr id="11" name="Rounded Rectangle 10"/>
-          <p:cNvSpPr/>
-          <p:nvPr/>
-        </p:nvSpPr>
-        <p:spPr>
-          <a:xfrm>
-            <a:off x="822960" y="4160520"/>
-            <a:ext cx="10424160" cy="868680"/>
-          </a:xfrm>
-          <a:prstGeom prst="roundRect">
-            <a:avLst/>
-          </a:prstGeom>
-          <a:solidFill>
-            <a:srgbClr val="FFFFFF"/>
-          </a:solidFill>
-          <a:ln>
-            <a:solidFill>
-              <a:srgbClr val="DCDCDC"/>
-            </a:solidFill>
-          </a:ln>
-        </p:spPr>
-        <p:style>
-          <a:lnRef idx="1">
-            <a:schemeClr val="accent1"/>
-          </a:lnRef>
-          <a:fillRef idx="3">
-            <a:schemeClr val="accent1"/>
-          </a:fillRef>
-          <a:effectRef idx="2">
-            <a:schemeClr val="accent1"/>
-          </a:effectRef>
-          <a:fontRef idx="minor">
-            <a:schemeClr val="lt1"/>
-          </a:fontRef>
-        </p:style>
-        <p:txBody>
-          <a:bodyPr rtlCol="0" anchor="ctr"/>
-          <a:lstStyle/>
-          <a:p>
-            <a:pPr algn="ctr"/>
-          </a:p>
-        </p:txBody>
-      </p:sp>
-      <p:sp>
-        <p:nvSpPr>
-          <p:cNvPr id="12" name="Rectangle 11"/>
-          <p:cNvSpPr/>
-          <p:nvPr/>
-        </p:nvSpPr>
-        <p:spPr>
-          <a:xfrm>
-            <a:off x="822960" y="4160520"/>
-            <a:ext cx="91440" cy="868680"/>
-          </a:xfrm>
-          <a:prstGeom prst="rect">
-            <a:avLst/>
-          </a:prstGeom>
-          <a:solidFill>
-            <a:srgbClr val="F9B700"/>
-          </a:solidFill>
-          <a:ln>
-            <a:noFill/>
-          </a:ln>
-        </p:spPr>
-        <p:style>
-          <a:lnRef idx="1">
-            <a:schemeClr val="accent1"/>
-          </a:lnRef>
-          <a:fillRef idx="3">
-            <a:schemeClr val="accent1"/>
-          </a:fillRef>
-          <a:effectRef idx="2">
-            <a:schemeClr val="accent1"/>
-          </a:effectRef>
-          <a:fontRef idx="minor">
-            <a:schemeClr val="lt1"/>
-          </a:fontRef>
-        </p:style>
-        <p:txBody>
-          <a:bodyPr rtlCol="0" anchor="ctr"/>
-          <a:lstStyle/>
-          <a:p>
-            <a:pPr algn="ctr"/>
-          </a:p>
-        </p:txBody>
-      </p:sp>
-      <p:sp>
-        <p:nvSpPr>
-          <p:cNvPr id="13" name="TextBox 12"/>
-          <p:cNvSpPr txBox="1"/>
-          <p:nvPr/>
-        </p:nvSpPr>
-        <p:spPr>
-          <a:xfrm>
-            <a:off x="1005840" y="4270248"/>
-            <a:ext cx="10104120" cy="704088"/>
-          </a:xfrm>
-          <a:prstGeom prst="rect">
-            <a:avLst/>
-          </a:prstGeom>
-          <a:noFill/>
-        </p:spPr>
-        <p:txBody>
-          <a:bodyPr wrap="square" lIns="0" rIns="0">
-            <a:spAutoFit/>
-          </a:bodyPr>
-          <a:lstStyle/>
-          <a:p>
-            <a:pPr>
-              <a:defRPr b="1" sz="1500">
-                <a:solidFill>
-                  <a:srgbClr val="1E2761"/>
-                </a:solidFill>
-                <a:latin typeface="Aptos Display"/>
-              </a:defRPr>
-            </a:pPr>
-            <a:r>
-              <a:t>Lab connection</a:t>
-            </a:r>
-          </a:p>
-          <a:p>
-            <a:pPr>
-              <a:spcBef>
-                <a:spcPts val="400"/>
-              </a:spcBef>
-              <a:defRPr sz="1050">
-                <a:solidFill>
-                  <a:srgbClr val="242424"/>
-                </a:solidFill>
-                <a:latin typeface="Aptos"/>
-              </a:defRPr>
-            </a:pPr>
-            <a:r>
-              <a:t>Coverage: Covered. Use the lab README to demonstrate or discuss this topic. Review terms: capability, considerations, platform, stricter.</a:t>
+              <a:t>In the lab, you will apply this pattern, validate the expected behavior, and discuss where it fits in a real Power BI solution.</a:t>
             </a:r>
           </a:p>
         </p:txBody>
@@ -7984,42 +7728,6 @@
       </p:sp>
       <p:sp>
         <p:nvSpPr>
-          <p:cNvPr id="4" name="TextBox 3"/>
-          <p:cNvSpPr txBox="1"/>
-          <p:nvPr/>
-        </p:nvSpPr>
-        <p:spPr>
-          <a:xfrm>
-            <a:off x="530352" y="914400"/>
-            <a:ext cx="10515600" cy="320040"/>
-          </a:xfrm>
-          <a:prstGeom prst="rect">
-            <a:avLst/>
-          </a:prstGeom>
-          <a:noFill/>
-        </p:spPr>
-        <p:txBody>
-          <a:bodyPr wrap="none">
-            <a:spAutoFit/>
-          </a:bodyPr>
-          <a:lstStyle/>
-          <a:p>
-            <a:pPr>
-              <a:defRPr sz="1200">
-                <a:solidFill>
-                  <a:srgbClr val="5C5C5C"/>
-                </a:solidFill>
-                <a:latin typeface="Aptos"/>
-              </a:defRPr>
-            </a:pPr>
-            <a:r>
-              <a:t>Talking points, learner value, and lab connection</a:t>
-            </a:r>
-          </a:p>
-        </p:txBody>
-      </p:sp>
-      <p:sp>
-        <p:nvSpPr>
           <p:cNvPr id="5" name="Rounded Rectangle 4"/>
           <p:cNvSpPr/>
           <p:nvPr/>
@@ -8137,7 +7845,143 @@
               </a:defRPr>
             </a:pPr>
             <a:r>
-              <a:t>Talking points</a:t>
+              <a:t>Key ideas</a:t>
+            </a:r>
+            <a:br/>
+            <a:r>
+              <a:t>• Access path</a:t>
+            </a:r>
+            <a:br/>
+            <a:r>
+              <a:t>• Data filter path</a:t>
+            </a:r>
+            <a:br/>
+            <a:r>
+              <a:t>• Export behavior</a:t>
+            </a:r>
+          </a:p>
+        </p:txBody>
+      </p:sp>
+      <p:sp>
+        <p:nvSpPr>
+          <p:cNvPr id="8" name="Rounded Rectangle 7"/>
+          <p:cNvSpPr/>
+          <p:nvPr/>
+        </p:nvSpPr>
+        <p:spPr>
+          <a:xfrm>
+            <a:off x="6263640" y="1234440"/>
+            <a:ext cx="5303520" cy="1828800"/>
+          </a:xfrm>
+          <a:prstGeom prst="roundRect">
+            <a:avLst/>
+          </a:prstGeom>
+          <a:solidFill>
+            <a:srgbClr val="FFFFFF"/>
+          </a:solidFill>
+          <a:ln>
+            <a:solidFill>
+              <a:srgbClr val="DCDCDC"/>
+            </a:solidFill>
+          </a:ln>
+        </p:spPr>
+        <p:style>
+          <a:lnRef idx="1">
+            <a:schemeClr val="accent1"/>
+          </a:lnRef>
+          <a:fillRef idx="3">
+            <a:schemeClr val="accent1"/>
+          </a:fillRef>
+          <a:effectRef idx="2">
+            <a:schemeClr val="accent1"/>
+          </a:effectRef>
+          <a:fontRef idx="minor">
+            <a:schemeClr val="lt1"/>
+          </a:fontRef>
+        </p:style>
+        <p:txBody>
+          <a:bodyPr rtlCol="0" anchor="ctr"/>
+          <a:lstStyle/>
+          <a:p>
+            <a:pPr algn="ctr"/>
+          </a:p>
+        </p:txBody>
+      </p:sp>
+      <p:sp>
+        <p:nvSpPr>
+          <p:cNvPr id="9" name="Rectangle 8"/>
+          <p:cNvSpPr/>
+          <p:nvPr/>
+        </p:nvSpPr>
+        <p:spPr>
+          <a:xfrm>
+            <a:off x="6263640" y="1234440"/>
+            <a:ext cx="91440" cy="1828800"/>
+          </a:xfrm>
+          <a:prstGeom prst="rect">
+            <a:avLst/>
+          </a:prstGeom>
+          <a:solidFill>
+            <a:srgbClr val="02C39A"/>
+          </a:solidFill>
+          <a:ln>
+            <a:noFill/>
+          </a:ln>
+        </p:spPr>
+        <p:style>
+          <a:lnRef idx="1">
+            <a:schemeClr val="accent1"/>
+          </a:lnRef>
+          <a:fillRef idx="3">
+            <a:schemeClr val="accent1"/>
+          </a:fillRef>
+          <a:effectRef idx="2">
+            <a:schemeClr val="accent1"/>
+          </a:effectRef>
+          <a:fontRef idx="minor">
+            <a:schemeClr val="lt1"/>
+          </a:fontRef>
+        </p:style>
+        <p:txBody>
+          <a:bodyPr rtlCol="0" anchor="ctr"/>
+          <a:lstStyle/>
+          <a:p>
+            <a:pPr algn="ctr"/>
+          </a:p>
+        </p:txBody>
+      </p:sp>
+      <p:sp>
+        <p:nvSpPr>
+          <p:cNvPr id="10" name="TextBox 9"/>
+          <p:cNvSpPr txBox="1"/>
+          <p:nvPr/>
+        </p:nvSpPr>
+        <p:spPr>
+          <a:xfrm>
+            <a:off x="6446520" y="1344168"/>
+            <a:ext cx="4983480" cy="1664208"/>
+          </a:xfrm>
+          <a:prstGeom prst="rect">
+            <a:avLst/>
+          </a:prstGeom>
+          <a:noFill/>
+        </p:spPr>
+        <p:txBody>
+          <a:bodyPr wrap="square" lIns="0" rIns="0">
+            <a:spAutoFit/>
+          </a:bodyPr>
+          <a:lstStyle/>
+          <a:p>
+            <a:pPr>
+              <a:defRPr b="1" sz="1500">
+                <a:solidFill>
+                  <a:srgbClr val="1E2761"/>
+                </a:solidFill>
+                <a:latin typeface="Aptos Display"/>
+              </a:defRPr>
+            </a:pPr>
+            <a:r>
+              <a:t>Why it helps</a:t>
             </a:r>
           </a:p>
           <a:p>
@@ -8153,29 +7997,25 @@
               </a:defRPr>
             </a:pPr>
             <a:r>
-              <a:t>• Access path</a:t>
+              <a:t>• Build permission</a:t>
             </a:r>
             <a:br/>
             <a:r>
-              <a:t>• Data filter path</a:t>
-            </a:r>
-            <a:br/>
-            <a:r>
-              <a:t>• Export behavior</a:t>
-            </a:r>
-          </a:p>
-        </p:txBody>
-      </p:sp>
-      <p:sp>
-        <p:nvSpPr>
-          <p:cNvPr id="8" name="Rounded Rectangle 7"/>
+              <a:t>• Validation evidence</a:t>
+            </a:r>
+          </a:p>
+        </p:txBody>
+      </p:sp>
+      <p:sp>
+        <p:nvSpPr>
+          <p:cNvPr id="11" name="Rounded Rectangle 10"/>
           <p:cNvSpPr/>
           <p:nvPr/>
         </p:nvSpPr>
         <p:spPr>
           <a:xfrm>
-            <a:off x="6263640" y="1234440"/>
-            <a:ext cx="5303520" cy="1828800"/>
+            <a:off x="822960" y="4160520"/>
+            <a:ext cx="10424160" cy="868680"/>
           </a:xfrm>
           <a:prstGeom prst="roundRect">
             <a:avLst/>
@@ -8213,20 +8053,20 @@
       </p:sp>
       <p:sp>
         <p:nvSpPr>
-          <p:cNvPr id="9" name="Rectangle 8"/>
+          <p:cNvPr id="12" name="Rectangle 11"/>
           <p:cNvSpPr/>
           <p:nvPr/>
         </p:nvSpPr>
         <p:spPr>
           <a:xfrm>
-            <a:off x="6263640" y="1234440"/>
-            <a:ext cx="91440" cy="1828800"/>
+            <a:off x="822960" y="4160520"/>
+            <a:ext cx="91440" cy="868680"/>
           </a:xfrm>
           <a:prstGeom prst="rect">
             <a:avLst/>
           </a:prstGeom>
           <a:solidFill>
-            <a:srgbClr val="02C39A"/>
+            <a:srgbClr val="F9B700"/>
           </a:solidFill>
           <a:ln>
             <a:noFill/>
@@ -8256,14 +8096,14 @@
       </p:sp>
       <p:sp>
         <p:nvSpPr>
-          <p:cNvPr id="10" name="TextBox 9"/>
+          <p:cNvPr id="13" name="TextBox 12"/>
           <p:cNvSpPr txBox="1"/>
           <p:nvPr/>
         </p:nvSpPr>
         <p:spPr>
           <a:xfrm>
-            <a:off x="6446520" y="1344168"/>
-            <a:ext cx="4983480" cy="1664208"/>
+            <a:off x="1005840" y="4270248"/>
+            <a:ext cx="10104120" cy="704088"/>
           </a:xfrm>
           <a:prstGeom prst="rect">
             <a:avLst/>
@@ -8285,167 +8125,7 @@
               </a:defRPr>
             </a:pPr>
             <a:r>
-              <a:t>Why it helps</a:t>
-            </a:r>
-          </a:p>
-          <a:p>
-            <a:pPr>
-              <a:spcBef>
-                <a:spcPts val="400"/>
-              </a:spcBef>
-              <a:defRPr sz="1050">
-                <a:solidFill>
-                  <a:srgbClr val="242424"/>
-                </a:solidFill>
-                <a:latin typeface="Aptos"/>
-              </a:defRPr>
-            </a:pPr>
-            <a:r>
-              <a:t>• Build permission</a:t>
-            </a:r>
-            <a:br/>
-            <a:r>
-              <a:t>• Validation evidence</a:t>
-            </a:r>
-          </a:p>
-        </p:txBody>
-      </p:sp>
-      <p:sp>
-        <p:nvSpPr>
-          <p:cNvPr id="11" name="Rounded Rectangle 10"/>
-          <p:cNvSpPr/>
-          <p:nvPr/>
-        </p:nvSpPr>
-        <p:spPr>
-          <a:xfrm>
-            <a:off x="822960" y="4160520"/>
-            <a:ext cx="10424160" cy="868680"/>
-          </a:xfrm>
-          <a:prstGeom prst="roundRect">
-            <a:avLst/>
-          </a:prstGeom>
-          <a:solidFill>
-            <a:srgbClr val="FFFFFF"/>
-          </a:solidFill>
-          <a:ln>
-            <a:solidFill>
-              <a:srgbClr val="DCDCDC"/>
-            </a:solidFill>
-          </a:ln>
-        </p:spPr>
-        <p:style>
-          <a:lnRef idx="1">
-            <a:schemeClr val="accent1"/>
-          </a:lnRef>
-          <a:fillRef idx="3">
-            <a:schemeClr val="accent1"/>
-          </a:fillRef>
-          <a:effectRef idx="2">
-            <a:schemeClr val="accent1"/>
-          </a:effectRef>
-          <a:fontRef idx="minor">
-            <a:schemeClr val="lt1"/>
-          </a:fontRef>
-        </p:style>
-        <p:txBody>
-          <a:bodyPr rtlCol="0" anchor="ctr"/>
-          <a:lstStyle/>
-          <a:p>
-            <a:pPr algn="ctr"/>
-          </a:p>
-        </p:txBody>
-      </p:sp>
-      <p:sp>
-        <p:nvSpPr>
-          <p:cNvPr id="12" name="Rectangle 11"/>
-          <p:cNvSpPr/>
-          <p:nvPr/>
-        </p:nvSpPr>
-        <p:spPr>
-          <a:xfrm>
-            <a:off x="822960" y="4160520"/>
-            <a:ext cx="91440" cy="868680"/>
-          </a:xfrm>
-          <a:prstGeom prst="rect">
-            <a:avLst/>
-          </a:prstGeom>
-          <a:solidFill>
-            <a:srgbClr val="F9B700"/>
-          </a:solidFill>
-          <a:ln>
-            <a:noFill/>
-          </a:ln>
-        </p:spPr>
-        <p:style>
-          <a:lnRef idx="1">
-            <a:schemeClr val="accent1"/>
-          </a:lnRef>
-          <a:fillRef idx="3">
-            <a:schemeClr val="accent1"/>
-          </a:fillRef>
-          <a:effectRef idx="2">
-            <a:schemeClr val="accent1"/>
-          </a:effectRef>
-          <a:fontRef idx="minor">
-            <a:schemeClr val="lt1"/>
-          </a:fontRef>
-        </p:style>
-        <p:txBody>
-          <a:bodyPr rtlCol="0" anchor="ctr"/>
-          <a:lstStyle/>
-          <a:p>
-            <a:pPr algn="ctr"/>
-          </a:p>
-        </p:txBody>
-      </p:sp>
-      <p:sp>
-        <p:nvSpPr>
-          <p:cNvPr id="13" name="TextBox 12"/>
-          <p:cNvSpPr txBox="1"/>
-          <p:nvPr/>
-        </p:nvSpPr>
-        <p:spPr>
-          <a:xfrm>
-            <a:off x="1005840" y="4270248"/>
-            <a:ext cx="10104120" cy="704088"/>
-          </a:xfrm>
-          <a:prstGeom prst="rect">
-            <a:avLst/>
-          </a:prstGeom>
-          <a:noFill/>
-        </p:spPr>
-        <p:txBody>
-          <a:bodyPr wrap="square" lIns="0" rIns="0">
-            <a:spAutoFit/>
-          </a:bodyPr>
-          <a:lstStyle/>
-          <a:p>
-            <a:pPr>
-              <a:defRPr b="1" sz="1500">
-                <a:solidFill>
-                  <a:srgbClr val="1E2761"/>
-                </a:solidFill>
-                <a:latin typeface="Aptos Display"/>
-              </a:defRPr>
-            </a:pPr>
-            <a:r>
-              <a:t>Lab connection</a:t>
-            </a:r>
-          </a:p>
-          <a:p>
-            <a:pPr>
-              <a:spcBef>
-                <a:spcPts val="400"/>
-              </a:spcBef>
-              <a:defRPr sz="1050">
-                <a:solidFill>
-                  <a:srgbClr val="242424"/>
-                </a:solidFill>
-                <a:latin typeface="Aptos"/>
-              </a:defRPr>
-            </a:pPr>
-            <a:r>
-              <a:t>Coverage: Covered. Use the lab README to demonstrate or discuss this topic. Review terms: evidence.</a:t>
+              <a:t>In the lab, you will apply this pattern, validate the expected behavior, and discuss where it fits in a real Power BI solution.</a:t>
             </a:r>
           </a:p>
         </p:txBody>
@@ -9452,42 +9132,6 @@
       </p:sp>
       <p:sp>
         <p:nvSpPr>
-          <p:cNvPr id="4" name="TextBox 3"/>
-          <p:cNvSpPr txBox="1"/>
-          <p:nvPr/>
-        </p:nvSpPr>
-        <p:spPr>
-          <a:xfrm>
-            <a:off x="530352" y="914400"/>
-            <a:ext cx="10515600" cy="320040"/>
-          </a:xfrm>
-          <a:prstGeom prst="rect">
-            <a:avLst/>
-          </a:prstGeom>
-          <a:noFill/>
-        </p:spPr>
-        <p:txBody>
-          <a:bodyPr wrap="none">
-            <a:spAutoFit/>
-          </a:bodyPr>
-          <a:lstStyle/>
-          <a:p>
-            <a:pPr>
-              <a:defRPr sz="1200">
-                <a:solidFill>
-                  <a:srgbClr val="5C5C5C"/>
-                </a:solidFill>
-                <a:latin typeface="Aptos"/>
-              </a:defRPr>
-            </a:pPr>
-            <a:r>
-              <a:t>Use this to introduce the section before hands-on labs.</a:t>
-            </a:r>
-          </a:p>
-        </p:txBody>
-      </p:sp>
-      <p:sp>
-        <p:nvSpPr>
           <p:cNvPr id="5" name="Rounded Rectangle 4"/>
           <p:cNvSpPr/>
           <p:nvPr/>
@@ -10740,42 +10384,6 @@
       </p:sp>
       <p:sp>
         <p:nvSpPr>
-          <p:cNvPr id="4" name="TextBox 3"/>
-          <p:cNvSpPr txBox="1"/>
-          <p:nvPr/>
-        </p:nvSpPr>
-        <p:spPr>
-          <a:xfrm>
-            <a:off x="530352" y="914400"/>
-            <a:ext cx="10515600" cy="320040"/>
-          </a:xfrm>
-          <a:prstGeom prst="rect">
-            <a:avLst/>
-          </a:prstGeom>
-          <a:noFill/>
-        </p:spPr>
-        <p:txBody>
-          <a:bodyPr wrap="none">
-            <a:spAutoFit/>
-          </a:bodyPr>
-          <a:lstStyle/>
-          <a:p>
-            <a:pPr>
-              <a:defRPr sz="1200">
-                <a:solidFill>
-                  <a:srgbClr val="5C5C5C"/>
-                </a:solidFill>
-                <a:latin typeface="Aptos"/>
-              </a:defRPr>
-            </a:pPr>
-            <a:r>
-              <a:t>Talking points, learner value, and lab connection</a:t>
-            </a:r>
-          </a:p>
-        </p:txBody>
-      </p:sp>
-      <p:sp>
-        <p:nvSpPr>
           <p:cNvPr id="5" name="Rounded Rectangle 4"/>
           <p:cNvSpPr/>
           <p:nvPr/>
@@ -10893,7 +10501,143 @@
               </a:defRPr>
             </a:pPr>
             <a:r>
-              <a:t>Talking points</a:t>
+              <a:t>Key ideas</a:t>
+            </a:r>
+            <a:br/>
+            <a:r>
+              <a:t>• Tenant settings</a:t>
+            </a:r>
+            <a:br/>
+            <a:r>
+              <a:t>• Workspace roles</a:t>
+            </a:r>
+            <a:br/>
+            <a:r>
+              <a:t>• App audiences</a:t>
+            </a:r>
+          </a:p>
+        </p:txBody>
+      </p:sp>
+      <p:sp>
+        <p:nvSpPr>
+          <p:cNvPr id="8" name="Rounded Rectangle 7"/>
+          <p:cNvSpPr/>
+          <p:nvPr/>
+        </p:nvSpPr>
+        <p:spPr>
+          <a:xfrm>
+            <a:off x="6263640" y="1234440"/>
+            <a:ext cx="5303520" cy="1828800"/>
+          </a:xfrm>
+          <a:prstGeom prst="roundRect">
+            <a:avLst/>
+          </a:prstGeom>
+          <a:solidFill>
+            <a:srgbClr val="FFFFFF"/>
+          </a:solidFill>
+          <a:ln>
+            <a:solidFill>
+              <a:srgbClr val="DCDCDC"/>
+            </a:solidFill>
+          </a:ln>
+        </p:spPr>
+        <p:style>
+          <a:lnRef idx="1">
+            <a:schemeClr val="accent1"/>
+          </a:lnRef>
+          <a:fillRef idx="3">
+            <a:schemeClr val="accent1"/>
+          </a:fillRef>
+          <a:effectRef idx="2">
+            <a:schemeClr val="accent1"/>
+          </a:effectRef>
+          <a:fontRef idx="minor">
+            <a:schemeClr val="lt1"/>
+          </a:fontRef>
+        </p:style>
+        <p:txBody>
+          <a:bodyPr rtlCol="0" anchor="ctr"/>
+          <a:lstStyle/>
+          <a:p>
+            <a:pPr algn="ctr"/>
+          </a:p>
+        </p:txBody>
+      </p:sp>
+      <p:sp>
+        <p:nvSpPr>
+          <p:cNvPr id="9" name="Rectangle 8"/>
+          <p:cNvSpPr/>
+          <p:nvPr/>
+        </p:nvSpPr>
+        <p:spPr>
+          <a:xfrm>
+            <a:off x="6263640" y="1234440"/>
+            <a:ext cx="91440" cy="1828800"/>
+          </a:xfrm>
+          <a:prstGeom prst="rect">
+            <a:avLst/>
+          </a:prstGeom>
+          <a:solidFill>
+            <a:srgbClr val="02C39A"/>
+          </a:solidFill>
+          <a:ln>
+            <a:noFill/>
+          </a:ln>
+        </p:spPr>
+        <p:style>
+          <a:lnRef idx="1">
+            <a:schemeClr val="accent1"/>
+          </a:lnRef>
+          <a:fillRef idx="3">
+            <a:schemeClr val="accent1"/>
+          </a:fillRef>
+          <a:effectRef idx="2">
+            <a:schemeClr val="accent1"/>
+          </a:effectRef>
+          <a:fontRef idx="minor">
+            <a:schemeClr val="lt1"/>
+          </a:fontRef>
+        </p:style>
+        <p:txBody>
+          <a:bodyPr rtlCol="0" anchor="ctr"/>
+          <a:lstStyle/>
+          <a:p>
+            <a:pPr algn="ctr"/>
+          </a:p>
+        </p:txBody>
+      </p:sp>
+      <p:sp>
+        <p:nvSpPr>
+          <p:cNvPr id="10" name="TextBox 9"/>
+          <p:cNvSpPr txBox="1"/>
+          <p:nvPr/>
+        </p:nvSpPr>
+        <p:spPr>
+          <a:xfrm>
+            <a:off x="6446520" y="1344168"/>
+            <a:ext cx="4983480" cy="1664208"/>
+          </a:xfrm>
+          <a:prstGeom prst="rect">
+            <a:avLst/>
+          </a:prstGeom>
+          <a:noFill/>
+        </p:spPr>
+        <p:txBody>
+          <a:bodyPr wrap="square" lIns="0" rIns="0">
+            <a:spAutoFit/>
+          </a:bodyPr>
+          <a:lstStyle/>
+          <a:p>
+            <a:pPr>
+              <a:defRPr b="1" sz="1500">
+                <a:solidFill>
+                  <a:srgbClr val="1E2761"/>
+                </a:solidFill>
+                <a:latin typeface="Aptos Display"/>
+              </a:defRPr>
+            </a:pPr>
+            <a:r>
+              <a:t>Why it helps</a:t>
             </a:r>
           </a:p>
           <a:p>
@@ -10909,29 +10653,25 @@
               </a:defRPr>
             </a:pPr>
             <a:r>
-              <a:t>• Tenant settings</a:t>
+              <a:t>• Sharing links</a:t>
             </a:r>
             <a:br/>
             <a:r>
-              <a:t>• Workspace roles</a:t>
-            </a:r>
-            <a:br/>
-            <a:r>
-              <a:t>• App audiences</a:t>
-            </a:r>
-          </a:p>
-        </p:txBody>
-      </p:sp>
-      <p:sp>
-        <p:nvSpPr>
-          <p:cNvPr id="8" name="Rounded Rectangle 7"/>
+              <a:t>• Build permission</a:t>
+            </a:r>
+          </a:p>
+        </p:txBody>
+      </p:sp>
+      <p:sp>
+        <p:nvSpPr>
+          <p:cNvPr id="11" name="Rounded Rectangle 10"/>
           <p:cNvSpPr/>
           <p:nvPr/>
         </p:nvSpPr>
         <p:spPr>
           <a:xfrm>
-            <a:off x="6263640" y="1234440"/>
-            <a:ext cx="5303520" cy="1828800"/>
+            <a:off x="822960" y="4160520"/>
+            <a:ext cx="10424160" cy="868680"/>
           </a:xfrm>
           <a:prstGeom prst="roundRect">
             <a:avLst/>
@@ -10969,20 +10709,20 @@
       </p:sp>
       <p:sp>
         <p:nvSpPr>
-          <p:cNvPr id="9" name="Rectangle 8"/>
+          <p:cNvPr id="12" name="Rectangle 11"/>
           <p:cNvSpPr/>
           <p:nvPr/>
         </p:nvSpPr>
         <p:spPr>
           <a:xfrm>
-            <a:off x="6263640" y="1234440"/>
-            <a:ext cx="91440" cy="1828800"/>
+            <a:off x="822960" y="4160520"/>
+            <a:ext cx="91440" cy="868680"/>
           </a:xfrm>
           <a:prstGeom prst="rect">
             <a:avLst/>
           </a:prstGeom>
           <a:solidFill>
-            <a:srgbClr val="02C39A"/>
+            <a:srgbClr val="F9B700"/>
           </a:solidFill>
           <a:ln>
             <a:noFill/>
@@ -11012,14 +10752,14 @@
       </p:sp>
       <p:sp>
         <p:nvSpPr>
-          <p:cNvPr id="10" name="TextBox 9"/>
+          <p:cNvPr id="13" name="TextBox 12"/>
           <p:cNvSpPr txBox="1"/>
           <p:nvPr/>
         </p:nvSpPr>
         <p:spPr>
           <a:xfrm>
-            <a:off x="6446520" y="1344168"/>
-            <a:ext cx="4983480" cy="1664208"/>
+            <a:off x="1005840" y="4270248"/>
+            <a:ext cx="10104120" cy="704088"/>
           </a:xfrm>
           <a:prstGeom prst="rect">
             <a:avLst/>
@@ -11041,167 +10781,7 @@
               </a:defRPr>
             </a:pPr>
             <a:r>
-              <a:t>Why it helps</a:t>
-            </a:r>
-          </a:p>
-          <a:p>
-            <a:pPr>
-              <a:spcBef>
-                <a:spcPts val="400"/>
-              </a:spcBef>
-              <a:defRPr sz="1050">
-                <a:solidFill>
-                  <a:srgbClr val="242424"/>
-                </a:solidFill>
-                <a:latin typeface="Aptos"/>
-              </a:defRPr>
-            </a:pPr>
-            <a:r>
-              <a:t>• Sharing links</a:t>
-            </a:r>
-            <a:br/>
-            <a:r>
-              <a:t>• Build permission</a:t>
-            </a:r>
-          </a:p>
-        </p:txBody>
-      </p:sp>
-      <p:sp>
-        <p:nvSpPr>
-          <p:cNvPr id="11" name="Rounded Rectangle 10"/>
-          <p:cNvSpPr/>
-          <p:nvPr/>
-        </p:nvSpPr>
-        <p:spPr>
-          <a:xfrm>
-            <a:off x="822960" y="4160520"/>
-            <a:ext cx="10424160" cy="868680"/>
-          </a:xfrm>
-          <a:prstGeom prst="roundRect">
-            <a:avLst/>
-          </a:prstGeom>
-          <a:solidFill>
-            <a:srgbClr val="FFFFFF"/>
-          </a:solidFill>
-          <a:ln>
-            <a:solidFill>
-              <a:srgbClr val="DCDCDC"/>
-            </a:solidFill>
-          </a:ln>
-        </p:spPr>
-        <p:style>
-          <a:lnRef idx="1">
-            <a:schemeClr val="accent1"/>
-          </a:lnRef>
-          <a:fillRef idx="3">
-            <a:schemeClr val="accent1"/>
-          </a:fillRef>
-          <a:effectRef idx="2">
-            <a:schemeClr val="accent1"/>
-          </a:effectRef>
-          <a:fontRef idx="minor">
-            <a:schemeClr val="lt1"/>
-          </a:fontRef>
-        </p:style>
-        <p:txBody>
-          <a:bodyPr rtlCol="0" anchor="ctr"/>
-          <a:lstStyle/>
-          <a:p>
-            <a:pPr algn="ctr"/>
-          </a:p>
-        </p:txBody>
-      </p:sp>
-      <p:sp>
-        <p:nvSpPr>
-          <p:cNvPr id="12" name="Rectangle 11"/>
-          <p:cNvSpPr/>
-          <p:nvPr/>
-        </p:nvSpPr>
-        <p:spPr>
-          <a:xfrm>
-            <a:off x="822960" y="4160520"/>
-            <a:ext cx="91440" cy="868680"/>
-          </a:xfrm>
-          <a:prstGeom prst="rect">
-            <a:avLst/>
-          </a:prstGeom>
-          <a:solidFill>
-            <a:srgbClr val="F9B700"/>
-          </a:solidFill>
-          <a:ln>
-            <a:noFill/>
-          </a:ln>
-        </p:spPr>
-        <p:style>
-          <a:lnRef idx="1">
-            <a:schemeClr val="accent1"/>
-          </a:lnRef>
-          <a:fillRef idx="3">
-            <a:schemeClr val="accent1"/>
-          </a:fillRef>
-          <a:effectRef idx="2">
-            <a:schemeClr val="accent1"/>
-          </a:effectRef>
-          <a:fontRef idx="minor">
-            <a:schemeClr val="lt1"/>
-          </a:fontRef>
-        </p:style>
-        <p:txBody>
-          <a:bodyPr rtlCol="0" anchor="ctr"/>
-          <a:lstStyle/>
-          <a:p>
-            <a:pPr algn="ctr"/>
-          </a:p>
-        </p:txBody>
-      </p:sp>
-      <p:sp>
-        <p:nvSpPr>
-          <p:cNvPr id="13" name="TextBox 12"/>
-          <p:cNvSpPr txBox="1"/>
-          <p:nvPr/>
-        </p:nvSpPr>
-        <p:spPr>
-          <a:xfrm>
-            <a:off x="1005840" y="4270248"/>
-            <a:ext cx="10104120" cy="704088"/>
-          </a:xfrm>
-          <a:prstGeom prst="rect">
-            <a:avLst/>
-          </a:prstGeom>
-          <a:noFill/>
-        </p:spPr>
-        <p:txBody>
-          <a:bodyPr wrap="square" lIns="0" rIns="0">
-            <a:spAutoFit/>
-          </a:bodyPr>
-          <a:lstStyle/>
-          <a:p>
-            <a:pPr>
-              <a:defRPr b="1" sz="1500">
-                <a:solidFill>
-                  <a:srgbClr val="1E2761"/>
-                </a:solidFill>
-                <a:latin typeface="Aptos Display"/>
-              </a:defRPr>
-            </a:pPr>
-            <a:r>
-              <a:t>Lab connection</a:t>
-            </a:r>
-          </a:p>
-          <a:p>
-            <a:pPr>
-              <a:spcBef>
-                <a:spcPts val="400"/>
-              </a:spcBef>
-              <a:defRPr sz="1050">
-                <a:solidFill>
-                  <a:srgbClr val="242424"/>
-                </a:solidFill>
-                <a:latin typeface="Aptos"/>
-              </a:defRPr>
-            </a:pPr>
-            <a:r>
-              <a:t>Coverage: Covered. Use the lab README to demonstrate or discuss this topic. Review terms: audiences, layers, links, workspace.</a:t>
+              <a:t>In the lab, you will apply this pattern, validate the expected behavior, and discuss where it fits in a real Power BI solution.</a:t>
             </a:r>
           </a:p>
         </p:txBody>
@@ -11340,42 +10920,6 @@
       </p:sp>
       <p:sp>
         <p:nvSpPr>
-          <p:cNvPr id="4" name="TextBox 3"/>
-          <p:cNvSpPr txBox="1"/>
-          <p:nvPr/>
-        </p:nvSpPr>
-        <p:spPr>
-          <a:xfrm>
-            <a:off x="530352" y="914400"/>
-            <a:ext cx="10515600" cy="320040"/>
-          </a:xfrm>
-          <a:prstGeom prst="rect">
-            <a:avLst/>
-          </a:prstGeom>
-          <a:noFill/>
-        </p:spPr>
-        <p:txBody>
-          <a:bodyPr wrap="none">
-            <a:spAutoFit/>
-          </a:bodyPr>
-          <a:lstStyle/>
-          <a:p>
-            <a:pPr>
-              <a:defRPr sz="1200">
-                <a:solidFill>
-                  <a:srgbClr val="5C5C5C"/>
-                </a:solidFill>
-                <a:latin typeface="Aptos"/>
-              </a:defRPr>
-            </a:pPr>
-            <a:r>
-              <a:t>Talking points, learner value, and lab connection</a:t>
-            </a:r>
-          </a:p>
-        </p:txBody>
-      </p:sp>
-      <p:sp>
-        <p:nvSpPr>
           <p:cNvPr id="5" name="Rounded Rectangle 4"/>
           <p:cNvSpPr/>
           <p:nvPr/>
@@ -11493,7 +11037,139 @@
               </a:defRPr>
             </a:pPr>
             <a:r>
-              <a:t>Talking points</a:t>
+              <a:t>Key ideas</a:t>
+            </a:r>
+            <a:br/>
+            <a:r>
+              <a:t>• Who can open the report?</a:t>
+            </a:r>
+            <a:br/>
+            <a:r>
+              <a:t>• Who can build from the semantic model?</a:t>
+            </a:r>
+          </a:p>
+        </p:txBody>
+      </p:sp>
+      <p:sp>
+        <p:nvSpPr>
+          <p:cNvPr id="8" name="Rounded Rectangle 7"/>
+          <p:cNvSpPr/>
+          <p:nvPr/>
+        </p:nvSpPr>
+        <p:spPr>
+          <a:xfrm>
+            <a:off x="6263640" y="1234440"/>
+            <a:ext cx="5303520" cy="1828800"/>
+          </a:xfrm>
+          <a:prstGeom prst="roundRect">
+            <a:avLst/>
+          </a:prstGeom>
+          <a:solidFill>
+            <a:srgbClr val="FFFFFF"/>
+          </a:solidFill>
+          <a:ln>
+            <a:solidFill>
+              <a:srgbClr val="DCDCDC"/>
+            </a:solidFill>
+          </a:ln>
+        </p:spPr>
+        <p:style>
+          <a:lnRef idx="1">
+            <a:schemeClr val="accent1"/>
+          </a:lnRef>
+          <a:fillRef idx="3">
+            <a:schemeClr val="accent1"/>
+          </a:fillRef>
+          <a:effectRef idx="2">
+            <a:schemeClr val="accent1"/>
+          </a:effectRef>
+          <a:fontRef idx="minor">
+            <a:schemeClr val="lt1"/>
+          </a:fontRef>
+        </p:style>
+        <p:txBody>
+          <a:bodyPr rtlCol="0" anchor="ctr"/>
+          <a:lstStyle/>
+          <a:p>
+            <a:pPr algn="ctr"/>
+          </a:p>
+        </p:txBody>
+      </p:sp>
+      <p:sp>
+        <p:nvSpPr>
+          <p:cNvPr id="9" name="Rectangle 8"/>
+          <p:cNvSpPr/>
+          <p:nvPr/>
+        </p:nvSpPr>
+        <p:spPr>
+          <a:xfrm>
+            <a:off x="6263640" y="1234440"/>
+            <a:ext cx="91440" cy="1828800"/>
+          </a:xfrm>
+          <a:prstGeom prst="rect">
+            <a:avLst/>
+          </a:prstGeom>
+          <a:solidFill>
+            <a:srgbClr val="02C39A"/>
+          </a:solidFill>
+          <a:ln>
+            <a:noFill/>
+          </a:ln>
+        </p:spPr>
+        <p:style>
+          <a:lnRef idx="1">
+            <a:schemeClr val="accent1"/>
+          </a:lnRef>
+          <a:fillRef idx="3">
+            <a:schemeClr val="accent1"/>
+          </a:fillRef>
+          <a:effectRef idx="2">
+            <a:schemeClr val="accent1"/>
+          </a:effectRef>
+          <a:fontRef idx="minor">
+            <a:schemeClr val="lt1"/>
+          </a:fontRef>
+        </p:style>
+        <p:txBody>
+          <a:bodyPr rtlCol="0" anchor="ctr"/>
+          <a:lstStyle/>
+          <a:p>
+            <a:pPr algn="ctr"/>
+          </a:p>
+        </p:txBody>
+      </p:sp>
+      <p:sp>
+        <p:nvSpPr>
+          <p:cNvPr id="10" name="TextBox 9"/>
+          <p:cNvSpPr txBox="1"/>
+          <p:nvPr/>
+        </p:nvSpPr>
+        <p:spPr>
+          <a:xfrm>
+            <a:off x="6446520" y="1344168"/>
+            <a:ext cx="4983480" cy="1664208"/>
+          </a:xfrm>
+          <a:prstGeom prst="rect">
+            <a:avLst/>
+          </a:prstGeom>
+          <a:noFill/>
+        </p:spPr>
+        <p:txBody>
+          <a:bodyPr wrap="square" lIns="0" rIns="0">
+            <a:spAutoFit/>
+          </a:bodyPr>
+          <a:lstStyle/>
+          <a:p>
+            <a:pPr>
+              <a:defRPr b="1" sz="1500">
+                <a:solidFill>
+                  <a:srgbClr val="1E2761"/>
+                </a:solidFill>
+                <a:latin typeface="Aptos Display"/>
+              </a:defRPr>
+            </a:pPr>
+            <a:r>
+              <a:t>Why it helps</a:t>
             </a:r>
           </a:p>
           <a:p>
@@ -11509,25 +11185,21 @@
               </a:defRPr>
             </a:pPr>
             <a:r>
-              <a:t>• Who can open the report?</a:t>
-            </a:r>
-            <a:br/>
-            <a:r>
-              <a:t>• Who can build from the semantic model?</a:t>
-            </a:r>
-          </a:p>
-        </p:txBody>
-      </p:sp>
-      <p:sp>
-        <p:nvSpPr>
-          <p:cNvPr id="8" name="Rounded Rectangle 7"/>
+              <a:t>• What data is visible after access is granted?</a:t>
+            </a:r>
+          </a:p>
+        </p:txBody>
+      </p:sp>
+      <p:sp>
+        <p:nvSpPr>
+          <p:cNvPr id="11" name="Rounded Rectangle 10"/>
           <p:cNvSpPr/>
           <p:nvPr/>
         </p:nvSpPr>
         <p:spPr>
           <a:xfrm>
-            <a:off x="6263640" y="1234440"/>
-            <a:ext cx="5303520" cy="1828800"/>
+            <a:off x="822960" y="4160520"/>
+            <a:ext cx="10424160" cy="868680"/>
           </a:xfrm>
           <a:prstGeom prst="roundRect">
             <a:avLst/>
@@ -11565,20 +11237,20 @@
       </p:sp>
       <p:sp>
         <p:nvSpPr>
-          <p:cNvPr id="9" name="Rectangle 8"/>
+          <p:cNvPr id="12" name="Rectangle 11"/>
           <p:cNvSpPr/>
           <p:nvPr/>
         </p:nvSpPr>
         <p:spPr>
           <a:xfrm>
-            <a:off x="6263640" y="1234440"/>
-            <a:ext cx="91440" cy="1828800"/>
+            <a:off x="822960" y="4160520"/>
+            <a:ext cx="91440" cy="868680"/>
           </a:xfrm>
           <a:prstGeom prst="rect">
             <a:avLst/>
           </a:prstGeom>
           <a:solidFill>
-            <a:srgbClr val="02C39A"/>
+            <a:srgbClr val="F9B700"/>
           </a:solidFill>
           <a:ln>
             <a:noFill/>
@@ -11608,14 +11280,14 @@
       </p:sp>
       <p:sp>
         <p:nvSpPr>
-          <p:cNvPr id="10" name="TextBox 9"/>
+          <p:cNvPr id="13" name="TextBox 12"/>
           <p:cNvSpPr txBox="1"/>
           <p:nvPr/>
         </p:nvSpPr>
         <p:spPr>
           <a:xfrm>
-            <a:off x="6446520" y="1344168"/>
-            <a:ext cx="4983480" cy="1664208"/>
+            <a:off x="1005840" y="4270248"/>
+            <a:ext cx="10104120" cy="704088"/>
           </a:xfrm>
           <a:prstGeom prst="rect">
             <a:avLst/>
@@ -11637,163 +11309,7 @@
               </a:defRPr>
             </a:pPr>
             <a:r>
-              <a:t>Why it helps</a:t>
-            </a:r>
-          </a:p>
-          <a:p>
-            <a:pPr>
-              <a:spcBef>
-                <a:spcPts val="400"/>
-              </a:spcBef>
-              <a:defRPr sz="1050">
-                <a:solidFill>
-                  <a:srgbClr val="242424"/>
-                </a:solidFill>
-                <a:latin typeface="Aptos"/>
-              </a:defRPr>
-            </a:pPr>
-            <a:r>
-              <a:t>• What data is visible after access is granted?</a:t>
-            </a:r>
-          </a:p>
-        </p:txBody>
-      </p:sp>
-      <p:sp>
-        <p:nvSpPr>
-          <p:cNvPr id="11" name="Rounded Rectangle 10"/>
-          <p:cNvSpPr/>
-          <p:nvPr/>
-        </p:nvSpPr>
-        <p:spPr>
-          <a:xfrm>
-            <a:off x="822960" y="4160520"/>
-            <a:ext cx="10424160" cy="868680"/>
-          </a:xfrm>
-          <a:prstGeom prst="roundRect">
-            <a:avLst/>
-          </a:prstGeom>
-          <a:solidFill>
-            <a:srgbClr val="FFFFFF"/>
-          </a:solidFill>
-          <a:ln>
-            <a:solidFill>
-              <a:srgbClr val="DCDCDC"/>
-            </a:solidFill>
-          </a:ln>
-        </p:spPr>
-        <p:style>
-          <a:lnRef idx="1">
-            <a:schemeClr val="accent1"/>
-          </a:lnRef>
-          <a:fillRef idx="3">
-            <a:schemeClr val="accent1"/>
-          </a:fillRef>
-          <a:effectRef idx="2">
-            <a:schemeClr val="accent1"/>
-          </a:effectRef>
-          <a:fontRef idx="minor">
-            <a:schemeClr val="lt1"/>
-          </a:fontRef>
-        </p:style>
-        <p:txBody>
-          <a:bodyPr rtlCol="0" anchor="ctr"/>
-          <a:lstStyle/>
-          <a:p>
-            <a:pPr algn="ctr"/>
-          </a:p>
-        </p:txBody>
-      </p:sp>
-      <p:sp>
-        <p:nvSpPr>
-          <p:cNvPr id="12" name="Rectangle 11"/>
-          <p:cNvSpPr/>
-          <p:nvPr/>
-        </p:nvSpPr>
-        <p:spPr>
-          <a:xfrm>
-            <a:off x="822960" y="4160520"/>
-            <a:ext cx="91440" cy="868680"/>
-          </a:xfrm>
-          <a:prstGeom prst="rect">
-            <a:avLst/>
-          </a:prstGeom>
-          <a:solidFill>
-            <a:srgbClr val="F9B700"/>
-          </a:solidFill>
-          <a:ln>
-            <a:noFill/>
-          </a:ln>
-        </p:spPr>
-        <p:style>
-          <a:lnRef idx="1">
-            <a:schemeClr val="accent1"/>
-          </a:lnRef>
-          <a:fillRef idx="3">
-            <a:schemeClr val="accent1"/>
-          </a:fillRef>
-          <a:effectRef idx="2">
-            <a:schemeClr val="accent1"/>
-          </a:effectRef>
-          <a:fontRef idx="minor">
-            <a:schemeClr val="lt1"/>
-          </a:fontRef>
-        </p:style>
-        <p:txBody>
-          <a:bodyPr rtlCol="0" anchor="ctr"/>
-          <a:lstStyle/>
-          <a:p>
-            <a:pPr algn="ctr"/>
-          </a:p>
-        </p:txBody>
-      </p:sp>
-      <p:sp>
-        <p:nvSpPr>
-          <p:cNvPr id="13" name="TextBox 12"/>
-          <p:cNvSpPr txBox="1"/>
-          <p:nvPr/>
-        </p:nvSpPr>
-        <p:spPr>
-          <a:xfrm>
-            <a:off x="1005840" y="4270248"/>
-            <a:ext cx="10104120" cy="704088"/>
-          </a:xfrm>
-          <a:prstGeom prst="rect">
-            <a:avLst/>
-          </a:prstGeom>
-          <a:noFill/>
-        </p:spPr>
-        <p:txBody>
-          <a:bodyPr wrap="square" lIns="0" rIns="0">
-            <a:spAutoFit/>
-          </a:bodyPr>
-          <a:lstStyle/>
-          <a:p>
-            <a:pPr>
-              <a:defRPr b="1" sz="1500">
-                <a:solidFill>
-                  <a:srgbClr val="1E2761"/>
-                </a:solidFill>
-                <a:latin typeface="Aptos Display"/>
-              </a:defRPr>
-            </a:pPr>
-            <a:r>
-              <a:t>Lab connection</a:t>
-            </a:r>
-          </a:p>
-          <a:p>
-            <a:pPr>
-              <a:spcBef>
-                <a:spcPts val="400"/>
-              </a:spcBef>
-              <a:defRPr sz="1050">
-                <a:solidFill>
-                  <a:srgbClr val="242424"/>
-                </a:solidFill>
-                <a:latin typeface="Aptos"/>
-              </a:defRPr>
-            </a:pPr>
-            <a:r>
-              <a:t>Coverage: Covered. Use the lab README to demonstrate or discuss this topic. Review terms: after, granted.</a:t>
+              <a:t>In the lab, you will apply this pattern, validate the expected behavior, and discuss where it fits in a real Power BI solution.</a:t>
             </a:r>
           </a:p>
         </p:txBody>
@@ -11932,42 +11448,6 @@
       </p:sp>
       <p:sp>
         <p:nvSpPr>
-          <p:cNvPr id="4" name="TextBox 3"/>
-          <p:cNvSpPr txBox="1"/>
-          <p:nvPr/>
-        </p:nvSpPr>
-        <p:spPr>
-          <a:xfrm>
-            <a:off x="530352" y="914400"/>
-            <a:ext cx="10515600" cy="320040"/>
-          </a:xfrm>
-          <a:prstGeom prst="rect">
-            <a:avLst/>
-          </a:prstGeom>
-          <a:noFill/>
-        </p:spPr>
-        <p:txBody>
-          <a:bodyPr wrap="none">
-            <a:spAutoFit/>
-          </a:bodyPr>
-          <a:lstStyle/>
-          <a:p>
-            <a:pPr>
-              <a:defRPr sz="1200">
-                <a:solidFill>
-                  <a:srgbClr val="5C5C5C"/>
-                </a:solidFill>
-                <a:latin typeface="Aptos"/>
-              </a:defRPr>
-            </a:pPr>
-            <a:r>
-              <a:t>Talking points, learner value, and lab connection</a:t>
-            </a:r>
-          </a:p>
-        </p:txBody>
-      </p:sp>
-      <p:sp>
-        <p:nvSpPr>
           <p:cNvPr id="5" name="Rounded Rectangle 4"/>
           <p:cNvSpPr/>
           <p:nvPr/>
@@ -12085,7 +11565,139 @@
               </a:defRPr>
             </a:pPr>
             <a:r>
-              <a:t>Talking points</a:t>
+              <a:t>Key ideas</a:t>
+            </a:r>
+            <a:br/>
+            <a:r>
+              <a:t>• Role filters</a:t>
+            </a:r>
+            <a:br/>
+            <a:r>
+              <a:t>• Territory examples</a:t>
+            </a:r>
+          </a:p>
+        </p:txBody>
+      </p:sp>
+      <p:sp>
+        <p:nvSpPr>
+          <p:cNvPr id="8" name="Rounded Rectangle 7"/>
+          <p:cNvSpPr/>
+          <p:nvPr/>
+        </p:nvSpPr>
+        <p:spPr>
+          <a:xfrm>
+            <a:off x="6263640" y="1234440"/>
+            <a:ext cx="5303520" cy="1828800"/>
+          </a:xfrm>
+          <a:prstGeom prst="roundRect">
+            <a:avLst/>
+          </a:prstGeom>
+          <a:solidFill>
+            <a:srgbClr val="FFFFFF"/>
+          </a:solidFill>
+          <a:ln>
+            <a:solidFill>
+              <a:srgbClr val="DCDCDC"/>
+            </a:solidFill>
+          </a:ln>
+        </p:spPr>
+        <p:style>
+          <a:lnRef idx="1">
+            <a:schemeClr val="accent1"/>
+          </a:lnRef>
+          <a:fillRef idx="3">
+            <a:schemeClr val="accent1"/>
+          </a:fillRef>
+          <a:effectRef idx="2">
+            <a:schemeClr val="accent1"/>
+          </a:effectRef>
+          <a:fontRef idx="minor">
+            <a:schemeClr val="lt1"/>
+          </a:fontRef>
+        </p:style>
+        <p:txBody>
+          <a:bodyPr rtlCol="0" anchor="ctr"/>
+          <a:lstStyle/>
+          <a:p>
+            <a:pPr algn="ctr"/>
+          </a:p>
+        </p:txBody>
+      </p:sp>
+      <p:sp>
+        <p:nvSpPr>
+          <p:cNvPr id="9" name="Rectangle 8"/>
+          <p:cNvSpPr/>
+          <p:nvPr/>
+        </p:nvSpPr>
+        <p:spPr>
+          <a:xfrm>
+            <a:off x="6263640" y="1234440"/>
+            <a:ext cx="91440" cy="1828800"/>
+          </a:xfrm>
+          <a:prstGeom prst="rect">
+            <a:avLst/>
+          </a:prstGeom>
+          <a:solidFill>
+            <a:srgbClr val="02C39A"/>
+          </a:solidFill>
+          <a:ln>
+            <a:noFill/>
+          </a:ln>
+        </p:spPr>
+        <p:style>
+          <a:lnRef idx="1">
+            <a:schemeClr val="accent1"/>
+          </a:lnRef>
+          <a:fillRef idx="3">
+            <a:schemeClr val="accent1"/>
+          </a:fillRef>
+          <a:effectRef idx="2">
+            <a:schemeClr val="accent1"/>
+          </a:effectRef>
+          <a:fontRef idx="minor">
+            <a:schemeClr val="lt1"/>
+          </a:fontRef>
+        </p:style>
+        <p:txBody>
+          <a:bodyPr rtlCol="0" anchor="ctr"/>
+          <a:lstStyle/>
+          <a:p>
+            <a:pPr algn="ctr"/>
+          </a:p>
+        </p:txBody>
+      </p:sp>
+      <p:sp>
+        <p:nvSpPr>
+          <p:cNvPr id="10" name="TextBox 9"/>
+          <p:cNvSpPr txBox="1"/>
+          <p:nvPr/>
+        </p:nvSpPr>
+        <p:spPr>
+          <a:xfrm>
+            <a:off x="6446520" y="1344168"/>
+            <a:ext cx="4983480" cy="1664208"/>
+          </a:xfrm>
+          <a:prstGeom prst="rect">
+            <a:avLst/>
+          </a:prstGeom>
+          <a:noFill/>
+        </p:spPr>
+        <p:txBody>
+          <a:bodyPr wrap="square" lIns="0" rIns="0">
+            <a:spAutoFit/>
+          </a:bodyPr>
+          <a:lstStyle/>
+          <a:p>
+            <a:pPr>
+              <a:defRPr b="1" sz="1500">
+                <a:solidFill>
+                  <a:srgbClr val="1E2761"/>
+                </a:solidFill>
+                <a:latin typeface="Aptos Display"/>
+              </a:defRPr>
+            </a:pPr>
+            <a:r>
+              <a:t>Why it helps</a:t>
             </a:r>
           </a:p>
           <a:p>
@@ -12101,25 +11713,25 @@
               </a:defRPr>
             </a:pPr>
             <a:r>
-              <a:t>• Role filters</a:t>
+              <a:t>• Testing roles</a:t>
             </a:r>
             <a:br/>
             <a:r>
-              <a:t>• Territory examples</a:t>
-            </a:r>
-          </a:p>
-        </p:txBody>
-      </p:sp>
-      <p:sp>
-        <p:nvSpPr>
-          <p:cNvPr id="8" name="Rounded Rectangle 7"/>
+              <a:t>• Maintenance tradeoffs</a:t>
+            </a:r>
+          </a:p>
+        </p:txBody>
+      </p:sp>
+      <p:sp>
+        <p:nvSpPr>
+          <p:cNvPr id="11" name="Rounded Rectangle 10"/>
           <p:cNvSpPr/>
           <p:nvPr/>
         </p:nvSpPr>
         <p:spPr>
           <a:xfrm>
-            <a:off x="6263640" y="1234440"/>
-            <a:ext cx="5303520" cy="1828800"/>
+            <a:off x="822960" y="4160520"/>
+            <a:ext cx="10424160" cy="868680"/>
           </a:xfrm>
           <a:prstGeom prst="roundRect">
             <a:avLst/>
@@ -12157,20 +11769,20 @@
       </p:sp>
       <p:sp>
         <p:nvSpPr>
-          <p:cNvPr id="9" name="Rectangle 8"/>
+          <p:cNvPr id="12" name="Rectangle 11"/>
           <p:cNvSpPr/>
           <p:nvPr/>
         </p:nvSpPr>
         <p:spPr>
           <a:xfrm>
-            <a:off x="6263640" y="1234440"/>
-            <a:ext cx="91440" cy="1828800"/>
+            <a:off x="822960" y="4160520"/>
+            <a:ext cx="91440" cy="868680"/>
           </a:xfrm>
           <a:prstGeom prst="rect">
             <a:avLst/>
           </a:prstGeom>
           <a:solidFill>
-            <a:srgbClr val="02C39A"/>
+            <a:srgbClr val="F9B700"/>
           </a:solidFill>
           <a:ln>
             <a:noFill/>
@@ -12200,14 +11812,14 @@
       </p:sp>
       <p:sp>
         <p:nvSpPr>
-          <p:cNvPr id="10" name="TextBox 9"/>
+          <p:cNvPr id="13" name="TextBox 12"/>
           <p:cNvSpPr txBox="1"/>
           <p:nvPr/>
         </p:nvSpPr>
         <p:spPr>
           <a:xfrm>
-            <a:off x="6446520" y="1344168"/>
-            <a:ext cx="4983480" cy="1664208"/>
+            <a:off x="1005840" y="4270248"/>
+            <a:ext cx="10104120" cy="704088"/>
           </a:xfrm>
           <a:prstGeom prst="rect">
             <a:avLst/>
@@ -12229,167 +11841,7 @@
               </a:defRPr>
             </a:pPr>
             <a:r>
-              <a:t>Why it helps</a:t>
-            </a:r>
-          </a:p>
-          <a:p>
-            <a:pPr>
-              <a:spcBef>
-                <a:spcPts val="400"/>
-              </a:spcBef>
-              <a:defRPr sz="1050">
-                <a:solidFill>
-                  <a:srgbClr val="242424"/>
-                </a:solidFill>
-                <a:latin typeface="Aptos"/>
-              </a:defRPr>
-            </a:pPr>
-            <a:r>
-              <a:t>• Testing roles</a:t>
-            </a:r>
-            <a:br/>
-            <a:r>
-              <a:t>• Maintenance tradeoffs</a:t>
-            </a:r>
-          </a:p>
-        </p:txBody>
-      </p:sp>
-      <p:sp>
-        <p:nvSpPr>
-          <p:cNvPr id="11" name="Rounded Rectangle 10"/>
-          <p:cNvSpPr/>
-          <p:nvPr/>
-        </p:nvSpPr>
-        <p:spPr>
-          <a:xfrm>
-            <a:off x="822960" y="4160520"/>
-            <a:ext cx="10424160" cy="868680"/>
-          </a:xfrm>
-          <a:prstGeom prst="roundRect">
-            <a:avLst/>
-          </a:prstGeom>
-          <a:solidFill>
-            <a:srgbClr val="FFFFFF"/>
-          </a:solidFill>
-          <a:ln>
-            <a:solidFill>
-              <a:srgbClr val="DCDCDC"/>
-            </a:solidFill>
-          </a:ln>
-        </p:spPr>
-        <p:style>
-          <a:lnRef idx="1">
-            <a:schemeClr val="accent1"/>
-          </a:lnRef>
-          <a:fillRef idx="3">
-            <a:schemeClr val="accent1"/>
-          </a:fillRef>
-          <a:effectRef idx="2">
-            <a:schemeClr val="accent1"/>
-          </a:effectRef>
-          <a:fontRef idx="minor">
-            <a:schemeClr val="lt1"/>
-          </a:fontRef>
-        </p:style>
-        <p:txBody>
-          <a:bodyPr rtlCol="0" anchor="ctr"/>
-          <a:lstStyle/>
-          <a:p>
-            <a:pPr algn="ctr"/>
-          </a:p>
-        </p:txBody>
-      </p:sp>
-      <p:sp>
-        <p:nvSpPr>
-          <p:cNvPr id="12" name="Rectangle 11"/>
-          <p:cNvSpPr/>
-          <p:nvPr/>
-        </p:nvSpPr>
-        <p:spPr>
-          <a:xfrm>
-            <a:off x="822960" y="4160520"/>
-            <a:ext cx="91440" cy="868680"/>
-          </a:xfrm>
-          <a:prstGeom prst="rect">
-            <a:avLst/>
-          </a:prstGeom>
-          <a:solidFill>
-            <a:srgbClr val="F9B700"/>
-          </a:solidFill>
-          <a:ln>
-            <a:noFill/>
-          </a:ln>
-        </p:spPr>
-        <p:style>
-          <a:lnRef idx="1">
-            <a:schemeClr val="accent1"/>
-          </a:lnRef>
-          <a:fillRef idx="3">
-            <a:schemeClr val="accent1"/>
-          </a:fillRef>
-          <a:effectRef idx="2">
-            <a:schemeClr val="accent1"/>
-          </a:effectRef>
-          <a:fontRef idx="minor">
-            <a:schemeClr val="lt1"/>
-          </a:fontRef>
-        </p:style>
-        <p:txBody>
-          <a:bodyPr rtlCol="0" anchor="ctr"/>
-          <a:lstStyle/>
-          <a:p>
-            <a:pPr algn="ctr"/>
-          </a:p>
-        </p:txBody>
-      </p:sp>
-      <p:sp>
-        <p:nvSpPr>
-          <p:cNvPr id="13" name="TextBox 12"/>
-          <p:cNvSpPr txBox="1"/>
-          <p:nvPr/>
-        </p:nvSpPr>
-        <p:spPr>
-          <a:xfrm>
-            <a:off x="1005840" y="4270248"/>
-            <a:ext cx="10104120" cy="704088"/>
-          </a:xfrm>
-          <a:prstGeom prst="rect">
-            <a:avLst/>
-          </a:prstGeom>
-          <a:noFill/>
-        </p:spPr>
-        <p:txBody>
-          <a:bodyPr wrap="square" lIns="0" rIns="0">
-            <a:spAutoFit/>
-          </a:bodyPr>
-          <a:lstStyle/>
-          <a:p>
-            <a:pPr>
-              <a:defRPr b="1" sz="1500">
-                <a:solidFill>
-                  <a:srgbClr val="1E2761"/>
-                </a:solidFill>
-                <a:latin typeface="Aptos Display"/>
-              </a:defRPr>
-            </a:pPr>
-            <a:r>
-              <a:t>Lab connection</a:t>
-            </a:r>
-          </a:p>
-          <a:p>
-            <a:pPr>
-              <a:spcBef>
-                <a:spcPts val="400"/>
-              </a:spcBef>
-              <a:defRPr sz="1050">
-                <a:solidFill>
-                  <a:srgbClr val="242424"/>
-                </a:solidFill>
-                <a:latin typeface="Aptos"/>
-              </a:defRPr>
-            </a:pPr>
-            <a:r>
-              <a:t>Coverage: Covered. Use the lab README to demonstrate or discuss this topic. Review terms: examples, maintenance, tradeoffs.</a:t>
+              <a:t>In the lab, you will apply this pattern, validate the expected behavior, and discuss where it fits in a real Power BI solution.</a:t>
             </a:r>
           </a:p>
         </p:txBody>
@@ -12528,42 +11980,6 @@
       </p:sp>
       <p:sp>
         <p:nvSpPr>
-          <p:cNvPr id="4" name="TextBox 3"/>
-          <p:cNvSpPr txBox="1"/>
-          <p:nvPr/>
-        </p:nvSpPr>
-        <p:spPr>
-          <a:xfrm>
-            <a:off x="530352" y="914400"/>
-            <a:ext cx="10515600" cy="320040"/>
-          </a:xfrm>
-          <a:prstGeom prst="rect">
-            <a:avLst/>
-          </a:prstGeom>
-          <a:noFill/>
-        </p:spPr>
-        <p:txBody>
-          <a:bodyPr wrap="none">
-            <a:spAutoFit/>
-          </a:bodyPr>
-          <a:lstStyle/>
-          <a:p>
-            <a:pPr>
-              <a:defRPr sz="1200">
-                <a:solidFill>
-                  <a:srgbClr val="5C5C5C"/>
-                </a:solidFill>
-                <a:latin typeface="Aptos"/>
-              </a:defRPr>
-            </a:pPr>
-            <a:r>
-              <a:t>Talking points, learner value, and lab connection</a:t>
-            </a:r>
-          </a:p>
-        </p:txBody>
-      </p:sp>
-      <p:sp>
-        <p:nvSpPr>
           <p:cNvPr id="5" name="Rounded Rectangle 4"/>
           <p:cNvSpPr/>
           <p:nvPr/>
@@ -12681,7 +12097,139 @@
               </a:defRPr>
             </a:pPr>
             <a:r>
-              <a:t>Talking points</a:t>
+              <a:t>Key ideas</a:t>
+            </a:r>
+            <a:br/>
+            <a:r>
+              <a:t>• Security mapping tables</a:t>
+            </a:r>
+            <a:br/>
+            <a:r>
+              <a:t>• `USERPRINCIPALNAME()`</a:t>
+            </a:r>
+          </a:p>
+        </p:txBody>
+      </p:sp>
+      <p:sp>
+        <p:nvSpPr>
+          <p:cNvPr id="8" name="Rounded Rectangle 7"/>
+          <p:cNvSpPr/>
+          <p:nvPr/>
+        </p:nvSpPr>
+        <p:spPr>
+          <a:xfrm>
+            <a:off x="6263640" y="1234440"/>
+            <a:ext cx="5303520" cy="1828800"/>
+          </a:xfrm>
+          <a:prstGeom prst="roundRect">
+            <a:avLst/>
+          </a:prstGeom>
+          <a:solidFill>
+            <a:srgbClr val="FFFFFF"/>
+          </a:solidFill>
+          <a:ln>
+            <a:solidFill>
+              <a:srgbClr val="DCDCDC"/>
+            </a:solidFill>
+          </a:ln>
+        </p:spPr>
+        <p:style>
+          <a:lnRef idx="1">
+            <a:schemeClr val="accent1"/>
+          </a:lnRef>
+          <a:fillRef idx="3">
+            <a:schemeClr val="accent1"/>
+          </a:fillRef>
+          <a:effectRef idx="2">
+            <a:schemeClr val="accent1"/>
+          </a:effectRef>
+          <a:fontRef idx="minor">
+            <a:schemeClr val="lt1"/>
+          </a:fontRef>
+        </p:style>
+        <p:txBody>
+          <a:bodyPr rtlCol="0" anchor="ctr"/>
+          <a:lstStyle/>
+          <a:p>
+            <a:pPr algn="ctr"/>
+          </a:p>
+        </p:txBody>
+      </p:sp>
+      <p:sp>
+        <p:nvSpPr>
+          <p:cNvPr id="9" name="Rectangle 8"/>
+          <p:cNvSpPr/>
+          <p:nvPr/>
+        </p:nvSpPr>
+        <p:spPr>
+          <a:xfrm>
+            <a:off x="6263640" y="1234440"/>
+            <a:ext cx="91440" cy="1828800"/>
+          </a:xfrm>
+          <a:prstGeom prst="rect">
+            <a:avLst/>
+          </a:prstGeom>
+          <a:solidFill>
+            <a:srgbClr val="02C39A"/>
+          </a:solidFill>
+          <a:ln>
+            <a:noFill/>
+          </a:ln>
+        </p:spPr>
+        <p:style>
+          <a:lnRef idx="1">
+            <a:schemeClr val="accent1"/>
+          </a:lnRef>
+          <a:fillRef idx="3">
+            <a:schemeClr val="accent1"/>
+          </a:fillRef>
+          <a:effectRef idx="2">
+            <a:schemeClr val="accent1"/>
+          </a:effectRef>
+          <a:fontRef idx="minor">
+            <a:schemeClr val="lt1"/>
+          </a:fontRef>
+        </p:style>
+        <p:txBody>
+          <a:bodyPr rtlCol="0" anchor="ctr"/>
+          <a:lstStyle/>
+          <a:p>
+            <a:pPr algn="ctr"/>
+          </a:p>
+        </p:txBody>
+      </p:sp>
+      <p:sp>
+        <p:nvSpPr>
+          <p:cNvPr id="10" name="TextBox 9"/>
+          <p:cNvSpPr txBox="1"/>
+          <p:nvPr/>
+        </p:nvSpPr>
+        <p:spPr>
+          <a:xfrm>
+            <a:off x="6446520" y="1344168"/>
+            <a:ext cx="4983480" cy="1664208"/>
+          </a:xfrm>
+          <a:prstGeom prst="rect">
+            <a:avLst/>
+          </a:prstGeom>
+          <a:noFill/>
+        </p:spPr>
+        <p:txBody>
+          <a:bodyPr wrap="square" lIns="0" rIns="0">
+            <a:spAutoFit/>
+          </a:bodyPr>
+          <a:lstStyle/>
+          <a:p>
+            <a:pPr>
+              <a:defRPr b="1" sz="1500">
+                <a:solidFill>
+                  <a:srgbClr val="1E2761"/>
+                </a:solidFill>
+                <a:latin typeface="Aptos Display"/>
+              </a:defRPr>
+            </a:pPr>
+            <a:r>
+              <a:t>Why it helps</a:t>
             </a:r>
           </a:p>
           <a:p>
@@ -12697,25 +12245,25 @@
               </a:defRPr>
             </a:pPr>
             <a:r>
-              <a:t>• Security mapping tables</a:t>
+              <a:t>• Many-to-many security mapping</a:t>
             </a:r>
             <a:br/>
             <a:r>
-              <a:t>• `USERPRINCIPALNAME()`</a:t>
-            </a:r>
-          </a:p>
-        </p:txBody>
-      </p:sp>
-      <p:sp>
-        <p:nvSpPr>
-          <p:cNvPr id="8" name="Rounded Rectangle 7"/>
+              <a:t>• Identity validation</a:t>
+            </a:r>
+          </a:p>
+        </p:txBody>
+      </p:sp>
+      <p:sp>
+        <p:nvSpPr>
+          <p:cNvPr id="11" name="Rounded Rectangle 10"/>
           <p:cNvSpPr/>
           <p:nvPr/>
         </p:nvSpPr>
         <p:spPr>
           <a:xfrm>
-            <a:off x="6263640" y="1234440"/>
-            <a:ext cx="5303520" cy="1828800"/>
+            <a:off x="822960" y="4160520"/>
+            <a:ext cx="10424160" cy="868680"/>
           </a:xfrm>
           <a:prstGeom prst="roundRect">
             <a:avLst/>
@@ -12753,20 +12301,20 @@
       </p:sp>
       <p:sp>
         <p:nvSpPr>
-          <p:cNvPr id="9" name="Rectangle 8"/>
+          <p:cNvPr id="12" name="Rectangle 11"/>
           <p:cNvSpPr/>
           <p:nvPr/>
         </p:nvSpPr>
         <p:spPr>
           <a:xfrm>
-            <a:off x="6263640" y="1234440"/>
-            <a:ext cx="91440" cy="1828800"/>
+            <a:off x="822960" y="4160520"/>
+            <a:ext cx="91440" cy="868680"/>
           </a:xfrm>
           <a:prstGeom prst="rect">
             <a:avLst/>
           </a:prstGeom>
           <a:solidFill>
-            <a:srgbClr val="02C39A"/>
+            <a:srgbClr val="F9B700"/>
           </a:solidFill>
           <a:ln>
             <a:noFill/>
@@ -12796,14 +12344,14 @@
       </p:sp>
       <p:sp>
         <p:nvSpPr>
-          <p:cNvPr id="10" name="TextBox 9"/>
+          <p:cNvPr id="13" name="TextBox 12"/>
           <p:cNvSpPr txBox="1"/>
           <p:nvPr/>
         </p:nvSpPr>
         <p:spPr>
           <a:xfrm>
-            <a:off x="6446520" y="1344168"/>
-            <a:ext cx="4983480" cy="1664208"/>
+            <a:off x="1005840" y="4270248"/>
+            <a:ext cx="10104120" cy="704088"/>
           </a:xfrm>
           <a:prstGeom prst="rect">
             <a:avLst/>
@@ -12825,167 +12373,7 @@
               </a:defRPr>
             </a:pPr>
             <a:r>
-              <a:t>Why it helps</a:t>
-            </a:r>
-          </a:p>
-          <a:p>
-            <a:pPr>
-              <a:spcBef>
-                <a:spcPts val="400"/>
-              </a:spcBef>
-              <a:defRPr sz="1050">
-                <a:solidFill>
-                  <a:srgbClr val="242424"/>
-                </a:solidFill>
-                <a:latin typeface="Aptos"/>
-              </a:defRPr>
-            </a:pPr>
-            <a:r>
-              <a:t>• Many-to-many security mapping</a:t>
-            </a:r>
-            <a:br/>
-            <a:r>
-              <a:t>• Identity validation</a:t>
-            </a:r>
-          </a:p>
-        </p:txBody>
-      </p:sp>
-      <p:sp>
-        <p:nvSpPr>
-          <p:cNvPr id="11" name="Rounded Rectangle 10"/>
-          <p:cNvSpPr/>
-          <p:nvPr/>
-        </p:nvSpPr>
-        <p:spPr>
-          <a:xfrm>
-            <a:off x="822960" y="4160520"/>
-            <a:ext cx="10424160" cy="868680"/>
-          </a:xfrm>
-          <a:prstGeom prst="roundRect">
-            <a:avLst/>
-          </a:prstGeom>
-          <a:solidFill>
-            <a:srgbClr val="FFFFFF"/>
-          </a:solidFill>
-          <a:ln>
-            <a:solidFill>
-              <a:srgbClr val="DCDCDC"/>
-            </a:solidFill>
-          </a:ln>
-        </p:spPr>
-        <p:style>
-          <a:lnRef idx="1">
-            <a:schemeClr val="accent1"/>
-          </a:lnRef>
-          <a:fillRef idx="3">
-            <a:schemeClr val="accent1"/>
-          </a:fillRef>
-          <a:effectRef idx="2">
-            <a:schemeClr val="accent1"/>
-          </a:effectRef>
-          <a:fontRef idx="minor">
-            <a:schemeClr val="lt1"/>
-          </a:fontRef>
-        </p:style>
-        <p:txBody>
-          <a:bodyPr rtlCol="0" anchor="ctr"/>
-          <a:lstStyle/>
-          <a:p>
-            <a:pPr algn="ctr"/>
-          </a:p>
-        </p:txBody>
-      </p:sp>
-      <p:sp>
-        <p:nvSpPr>
-          <p:cNvPr id="12" name="Rectangle 11"/>
-          <p:cNvSpPr/>
-          <p:nvPr/>
-        </p:nvSpPr>
-        <p:spPr>
-          <a:xfrm>
-            <a:off x="822960" y="4160520"/>
-            <a:ext cx="91440" cy="868680"/>
-          </a:xfrm>
-          <a:prstGeom prst="rect">
-            <a:avLst/>
-          </a:prstGeom>
-          <a:solidFill>
-            <a:srgbClr val="F9B700"/>
-          </a:solidFill>
-          <a:ln>
-            <a:noFill/>
-          </a:ln>
-        </p:spPr>
-        <p:style>
-          <a:lnRef idx="1">
-            <a:schemeClr val="accent1"/>
-          </a:lnRef>
-          <a:fillRef idx="3">
-            <a:schemeClr val="accent1"/>
-          </a:fillRef>
-          <a:effectRef idx="2">
-            <a:schemeClr val="accent1"/>
-          </a:effectRef>
-          <a:fontRef idx="minor">
-            <a:schemeClr val="lt1"/>
-          </a:fontRef>
-        </p:style>
-        <p:txBody>
-          <a:bodyPr rtlCol="0" anchor="ctr"/>
-          <a:lstStyle/>
-          <a:p>
-            <a:pPr algn="ctr"/>
-          </a:p>
-        </p:txBody>
-      </p:sp>
-      <p:sp>
-        <p:nvSpPr>
-          <p:cNvPr id="13" name="TextBox 12"/>
-          <p:cNvSpPr txBox="1"/>
-          <p:nvPr/>
-        </p:nvSpPr>
-        <p:spPr>
-          <a:xfrm>
-            <a:off x="1005840" y="4270248"/>
-            <a:ext cx="10104120" cy="704088"/>
-          </a:xfrm>
-          <a:prstGeom prst="rect">
-            <a:avLst/>
-          </a:prstGeom>
-          <a:noFill/>
-        </p:spPr>
-        <p:txBody>
-          <a:bodyPr wrap="square" lIns="0" rIns="0">
-            <a:spAutoFit/>
-          </a:bodyPr>
-          <a:lstStyle/>
-          <a:p>
-            <a:pPr>
-              <a:defRPr b="1" sz="1500">
-                <a:solidFill>
-                  <a:srgbClr val="1E2761"/>
-                </a:solidFill>
-                <a:latin typeface="Aptos Display"/>
-              </a:defRPr>
-            </a:pPr>
-            <a:r>
-              <a:t>Lab connection</a:t>
-            </a:r>
-          </a:p>
-          <a:p>
-            <a:pPr>
-              <a:spcBef>
-                <a:spcPts val="400"/>
-              </a:spcBef>
-              <a:defRPr sz="1050">
-                <a:solidFill>
-                  <a:srgbClr val="242424"/>
-                </a:solidFill>
-                <a:latin typeface="Aptos"/>
-              </a:defRPr>
-            </a:pPr>
-            <a:r>
-              <a:t>Coverage: Covered. Use the lab README to demonstrate or discuss this topic. Review terms: identity.</a:t>
+              <a:t>In the lab, you will apply this pattern, validate the expected behavior, and discuss where it fits in a real Power BI solution.</a:t>
             </a:r>
           </a:p>
         </p:txBody>
@@ -13124,42 +12512,6 @@
       </p:sp>
       <p:sp>
         <p:nvSpPr>
-          <p:cNvPr id="4" name="TextBox 3"/>
-          <p:cNvSpPr txBox="1"/>
-          <p:nvPr/>
-        </p:nvSpPr>
-        <p:spPr>
-          <a:xfrm>
-            <a:off x="530352" y="914400"/>
-            <a:ext cx="10515600" cy="320040"/>
-          </a:xfrm>
-          <a:prstGeom prst="rect">
-            <a:avLst/>
-          </a:prstGeom>
-          <a:noFill/>
-        </p:spPr>
-        <p:txBody>
-          <a:bodyPr wrap="none">
-            <a:spAutoFit/>
-          </a:bodyPr>
-          <a:lstStyle/>
-          <a:p>
-            <a:pPr>
-              <a:defRPr sz="1200">
-                <a:solidFill>
-                  <a:srgbClr val="5C5C5C"/>
-                </a:solidFill>
-                <a:latin typeface="Aptos"/>
-              </a:defRPr>
-            </a:pPr>
-            <a:r>
-              <a:t>Talking points, learner value, and lab connection</a:t>
-            </a:r>
-          </a:p>
-        </p:txBody>
-      </p:sp>
-      <p:sp>
-        <p:nvSpPr>
           <p:cNvPr id="5" name="Rounded Rectangle 4"/>
           <p:cNvSpPr/>
           <p:nvPr/>
@@ -13277,7 +12629,139 @@
               </a:defRPr>
             </a:pPr>
             <a:r>
-              <a:t>Talking points</a:t>
+              <a:t>Key ideas</a:t>
+            </a:r>
+            <a:br/>
+            <a:r>
+              <a:t>• Assigning users and groups</a:t>
+            </a:r>
+            <a:br/>
+            <a:r>
+              <a:t>• Testing as role</a:t>
+            </a:r>
+          </a:p>
+        </p:txBody>
+      </p:sp>
+      <p:sp>
+        <p:nvSpPr>
+          <p:cNvPr id="8" name="Rounded Rectangle 7"/>
+          <p:cNvSpPr/>
+          <p:nvPr/>
+        </p:nvSpPr>
+        <p:spPr>
+          <a:xfrm>
+            <a:off x="6263640" y="1234440"/>
+            <a:ext cx="5303520" cy="1828800"/>
+          </a:xfrm>
+          <a:prstGeom prst="roundRect">
+            <a:avLst/>
+          </a:prstGeom>
+          <a:solidFill>
+            <a:srgbClr val="FFFFFF"/>
+          </a:solidFill>
+          <a:ln>
+            <a:solidFill>
+              <a:srgbClr val="DCDCDC"/>
+            </a:solidFill>
+          </a:ln>
+        </p:spPr>
+        <p:style>
+          <a:lnRef idx="1">
+            <a:schemeClr val="accent1"/>
+          </a:lnRef>
+          <a:fillRef idx="3">
+            <a:schemeClr val="accent1"/>
+          </a:fillRef>
+          <a:effectRef idx="2">
+            <a:schemeClr val="accent1"/>
+          </a:effectRef>
+          <a:fontRef idx="minor">
+            <a:schemeClr val="lt1"/>
+          </a:fontRef>
+        </p:style>
+        <p:txBody>
+          <a:bodyPr rtlCol="0" anchor="ctr"/>
+          <a:lstStyle/>
+          <a:p>
+            <a:pPr algn="ctr"/>
+          </a:p>
+        </p:txBody>
+      </p:sp>
+      <p:sp>
+        <p:nvSpPr>
+          <p:cNvPr id="9" name="Rectangle 8"/>
+          <p:cNvSpPr/>
+          <p:nvPr/>
+        </p:nvSpPr>
+        <p:spPr>
+          <a:xfrm>
+            <a:off x="6263640" y="1234440"/>
+            <a:ext cx="91440" cy="1828800"/>
+          </a:xfrm>
+          <a:prstGeom prst="rect">
+            <a:avLst/>
+          </a:prstGeom>
+          <a:solidFill>
+            <a:srgbClr val="02C39A"/>
+          </a:solidFill>
+          <a:ln>
+            <a:noFill/>
+          </a:ln>
+        </p:spPr>
+        <p:style>
+          <a:lnRef idx="1">
+            <a:schemeClr val="accent1"/>
+          </a:lnRef>
+          <a:fillRef idx="3">
+            <a:schemeClr val="accent1"/>
+          </a:fillRef>
+          <a:effectRef idx="2">
+            <a:schemeClr val="accent1"/>
+          </a:effectRef>
+          <a:fontRef idx="minor">
+            <a:schemeClr val="lt1"/>
+          </a:fontRef>
+        </p:style>
+        <p:txBody>
+          <a:bodyPr rtlCol="0" anchor="ctr"/>
+          <a:lstStyle/>
+          <a:p>
+            <a:pPr algn="ctr"/>
+          </a:p>
+        </p:txBody>
+      </p:sp>
+      <p:sp>
+        <p:nvSpPr>
+          <p:cNvPr id="10" name="TextBox 9"/>
+          <p:cNvSpPr txBox="1"/>
+          <p:nvPr/>
+        </p:nvSpPr>
+        <p:spPr>
+          <a:xfrm>
+            <a:off x="6446520" y="1344168"/>
+            <a:ext cx="4983480" cy="1664208"/>
+          </a:xfrm>
+          <a:prstGeom prst="rect">
+            <a:avLst/>
+          </a:prstGeom>
+          <a:noFill/>
+        </p:spPr>
+        <p:txBody>
+          <a:bodyPr wrap="square" lIns="0" rIns="0">
+            <a:spAutoFit/>
+          </a:bodyPr>
+          <a:lstStyle/>
+          <a:p>
+            <a:pPr>
+              <a:defRPr b="1" sz="1500">
+                <a:solidFill>
+                  <a:srgbClr val="1E2761"/>
+                </a:solidFill>
+                <a:latin typeface="Aptos Display"/>
+              </a:defRPr>
+            </a:pPr>
+            <a:r>
+              <a:t>Why it helps</a:t>
             </a:r>
           </a:p>
           <a:p>
@@ -13293,25 +12777,25 @@
               </a:defRPr>
             </a:pPr>
             <a:r>
-              <a:t>• Assigning users and groups</a:t>
+              <a:t>• Workspace role implications</a:t>
             </a:r>
             <a:br/>
             <a:r>
-              <a:t>• Testing as role</a:t>
-            </a:r>
-          </a:p>
-        </p:txBody>
-      </p:sp>
-      <p:sp>
-        <p:nvSpPr>
-          <p:cNvPr id="8" name="Rounded Rectangle 7"/>
+              <a:t>• App distribution</a:t>
+            </a:r>
+          </a:p>
+        </p:txBody>
+      </p:sp>
+      <p:sp>
+        <p:nvSpPr>
+          <p:cNvPr id="11" name="Rounded Rectangle 10"/>
           <p:cNvSpPr/>
           <p:nvPr/>
         </p:nvSpPr>
         <p:spPr>
           <a:xfrm>
-            <a:off x="6263640" y="1234440"/>
-            <a:ext cx="5303520" cy="1828800"/>
+            <a:off x="822960" y="4160520"/>
+            <a:ext cx="10424160" cy="868680"/>
           </a:xfrm>
           <a:prstGeom prst="roundRect">
             <a:avLst/>
@@ -13349,20 +12833,20 @@
       </p:sp>
       <p:sp>
         <p:nvSpPr>
-          <p:cNvPr id="9" name="Rectangle 8"/>
+          <p:cNvPr id="12" name="Rectangle 11"/>
           <p:cNvSpPr/>
           <p:nvPr/>
         </p:nvSpPr>
         <p:spPr>
           <a:xfrm>
-            <a:off x="6263640" y="1234440"/>
-            <a:ext cx="91440" cy="1828800"/>
+            <a:off x="822960" y="4160520"/>
+            <a:ext cx="91440" cy="868680"/>
           </a:xfrm>
           <a:prstGeom prst="rect">
             <a:avLst/>
           </a:prstGeom>
           <a:solidFill>
-            <a:srgbClr val="02C39A"/>
+            <a:srgbClr val="F9B700"/>
           </a:solidFill>
           <a:ln>
             <a:noFill/>
@@ -13392,14 +12876,14 @@
       </p:sp>
       <p:sp>
         <p:nvSpPr>
-          <p:cNvPr id="10" name="TextBox 9"/>
+          <p:cNvPr id="13" name="TextBox 12"/>
           <p:cNvSpPr txBox="1"/>
           <p:nvPr/>
         </p:nvSpPr>
         <p:spPr>
           <a:xfrm>
-            <a:off x="6446520" y="1344168"/>
-            <a:ext cx="4983480" cy="1664208"/>
+            <a:off x="1005840" y="4270248"/>
+            <a:ext cx="10104120" cy="704088"/>
           </a:xfrm>
           <a:prstGeom prst="rect">
             <a:avLst/>
@@ -13421,167 +12905,7 @@
               </a:defRPr>
             </a:pPr>
             <a:r>
-              <a:t>Why it helps</a:t>
-            </a:r>
-          </a:p>
-          <a:p>
-            <a:pPr>
-              <a:spcBef>
-                <a:spcPts val="400"/>
-              </a:spcBef>
-              <a:defRPr sz="1050">
-                <a:solidFill>
-                  <a:srgbClr val="242424"/>
-                </a:solidFill>
-                <a:latin typeface="Aptos"/>
-              </a:defRPr>
-            </a:pPr>
-            <a:r>
-              <a:t>• Workspace role implications</a:t>
-            </a:r>
-            <a:br/>
-            <a:r>
-              <a:t>• App distribution</a:t>
-            </a:r>
-          </a:p>
-        </p:txBody>
-      </p:sp>
-      <p:sp>
-        <p:nvSpPr>
-          <p:cNvPr id="11" name="Rounded Rectangle 10"/>
-          <p:cNvSpPr/>
-          <p:nvPr/>
-        </p:nvSpPr>
-        <p:spPr>
-          <a:xfrm>
-            <a:off x="822960" y="4160520"/>
-            <a:ext cx="10424160" cy="868680"/>
-          </a:xfrm>
-          <a:prstGeom prst="roundRect">
-            <a:avLst/>
-          </a:prstGeom>
-          <a:solidFill>
-            <a:srgbClr val="FFFFFF"/>
-          </a:solidFill>
-          <a:ln>
-            <a:solidFill>
-              <a:srgbClr val="DCDCDC"/>
-            </a:solidFill>
-          </a:ln>
-        </p:spPr>
-        <p:style>
-          <a:lnRef idx="1">
-            <a:schemeClr val="accent1"/>
-          </a:lnRef>
-          <a:fillRef idx="3">
-            <a:schemeClr val="accent1"/>
-          </a:fillRef>
-          <a:effectRef idx="2">
-            <a:schemeClr val="accent1"/>
-          </a:effectRef>
-          <a:fontRef idx="minor">
-            <a:schemeClr val="lt1"/>
-          </a:fontRef>
-        </p:style>
-        <p:txBody>
-          <a:bodyPr rtlCol="0" anchor="ctr"/>
-          <a:lstStyle/>
-          <a:p>
-            <a:pPr algn="ctr"/>
-          </a:p>
-        </p:txBody>
-      </p:sp>
-      <p:sp>
-        <p:nvSpPr>
-          <p:cNvPr id="12" name="Rectangle 11"/>
-          <p:cNvSpPr/>
-          <p:nvPr/>
-        </p:nvSpPr>
-        <p:spPr>
-          <a:xfrm>
-            <a:off x="822960" y="4160520"/>
-            <a:ext cx="91440" cy="868680"/>
-          </a:xfrm>
-          <a:prstGeom prst="rect">
-            <a:avLst/>
-          </a:prstGeom>
-          <a:solidFill>
-            <a:srgbClr val="F9B700"/>
-          </a:solidFill>
-          <a:ln>
-            <a:noFill/>
-          </a:ln>
-        </p:spPr>
-        <p:style>
-          <a:lnRef idx="1">
-            <a:schemeClr val="accent1"/>
-          </a:lnRef>
-          <a:fillRef idx="3">
-            <a:schemeClr val="accent1"/>
-          </a:fillRef>
-          <a:effectRef idx="2">
-            <a:schemeClr val="accent1"/>
-          </a:effectRef>
-          <a:fontRef idx="minor">
-            <a:schemeClr val="lt1"/>
-          </a:fontRef>
-        </p:style>
-        <p:txBody>
-          <a:bodyPr rtlCol="0" anchor="ctr"/>
-          <a:lstStyle/>
-          <a:p>
-            <a:pPr algn="ctr"/>
-          </a:p>
-        </p:txBody>
-      </p:sp>
-      <p:sp>
-        <p:nvSpPr>
-          <p:cNvPr id="13" name="TextBox 12"/>
-          <p:cNvSpPr txBox="1"/>
-          <p:nvPr/>
-        </p:nvSpPr>
-        <p:spPr>
-          <a:xfrm>
-            <a:off x="1005840" y="4270248"/>
-            <a:ext cx="10104120" cy="704088"/>
-          </a:xfrm>
-          <a:prstGeom prst="rect">
-            <a:avLst/>
-          </a:prstGeom>
-          <a:noFill/>
-        </p:spPr>
-        <p:txBody>
-          <a:bodyPr wrap="square" lIns="0" rIns="0">
-            <a:spAutoFit/>
-          </a:bodyPr>
-          <a:lstStyle/>
-          <a:p>
-            <a:pPr>
-              <a:defRPr b="1" sz="1500">
-                <a:solidFill>
-                  <a:srgbClr val="1E2761"/>
-                </a:solidFill>
-                <a:latin typeface="Aptos Display"/>
-              </a:defRPr>
-            </a:pPr>
-            <a:r>
-              <a:t>Lab connection</a:t>
-            </a:r>
-          </a:p>
-          <a:p>
-            <a:pPr>
-              <a:spcBef>
-                <a:spcPts val="400"/>
-              </a:spcBef>
-              <a:defRPr sz="1050">
-                <a:solidFill>
-                  <a:srgbClr val="242424"/>
-                </a:solidFill>
-                <a:latin typeface="Aptos"/>
-              </a:defRPr>
-            </a:pPr>
-            <a:r>
-              <a:t>Coverage: Partial. Use the lab README to demonstrate or discuss this topic. Review terms: assigning, assignment, distribution, implications, workspace.</a:t>
+              <a:t>In the lab, you will apply this pattern, validate the expected behavior, and discuss where it fits in a real Power BI solution.</a:t>
             </a:r>
           </a:p>
         </p:txBody>
@@ -13720,42 +13044,6 @@
       </p:sp>
       <p:sp>
         <p:nvSpPr>
-          <p:cNvPr id="4" name="TextBox 3"/>
-          <p:cNvSpPr txBox="1"/>
-          <p:nvPr/>
-        </p:nvSpPr>
-        <p:spPr>
-          <a:xfrm>
-            <a:off x="530352" y="914400"/>
-            <a:ext cx="10515600" cy="320040"/>
-          </a:xfrm>
-          <a:prstGeom prst="rect">
-            <a:avLst/>
-          </a:prstGeom>
-          <a:noFill/>
-        </p:spPr>
-        <p:txBody>
-          <a:bodyPr wrap="none">
-            <a:spAutoFit/>
-          </a:bodyPr>
-          <a:lstStyle/>
-          <a:p>
-            <a:pPr>
-              <a:defRPr sz="1200">
-                <a:solidFill>
-                  <a:srgbClr val="5C5C5C"/>
-                </a:solidFill>
-                <a:latin typeface="Aptos"/>
-              </a:defRPr>
-            </a:pPr>
-            <a:r>
-              <a:t>Talking points, learner value, and lab connection</a:t>
-            </a:r>
-          </a:p>
-        </p:txBody>
-      </p:sp>
-      <p:sp>
-        <p:nvSpPr>
           <p:cNvPr id="5" name="Rounded Rectangle 4"/>
           <p:cNvSpPr/>
           <p:nvPr/>
@@ -13873,7 +13161,139 @@
               </a:defRPr>
             </a:pPr>
             <a:r>
-              <a:t>Talking points</a:t>
+              <a:t>Key ideas</a:t>
+            </a:r>
+            <a:br/>
+            <a:r>
+              <a:t>• Semantic model reuse</a:t>
+            </a:r>
+            <a:br/>
+            <a:r>
+              <a:t>• Thin reports</a:t>
+            </a:r>
+          </a:p>
+        </p:txBody>
+      </p:sp>
+      <p:sp>
+        <p:nvSpPr>
+          <p:cNvPr id="8" name="Rounded Rectangle 7"/>
+          <p:cNvSpPr/>
+          <p:nvPr/>
+        </p:nvSpPr>
+        <p:spPr>
+          <a:xfrm>
+            <a:off x="6263640" y="1234440"/>
+            <a:ext cx="5303520" cy="1828800"/>
+          </a:xfrm>
+          <a:prstGeom prst="roundRect">
+            <a:avLst/>
+          </a:prstGeom>
+          <a:solidFill>
+            <a:srgbClr val="FFFFFF"/>
+          </a:solidFill>
+          <a:ln>
+            <a:solidFill>
+              <a:srgbClr val="DCDCDC"/>
+            </a:solidFill>
+          </a:ln>
+        </p:spPr>
+        <p:style>
+          <a:lnRef idx="1">
+            <a:schemeClr val="accent1"/>
+          </a:lnRef>
+          <a:fillRef idx="3">
+            <a:schemeClr val="accent1"/>
+          </a:fillRef>
+          <a:effectRef idx="2">
+            <a:schemeClr val="accent1"/>
+          </a:effectRef>
+          <a:fontRef idx="minor">
+            <a:schemeClr val="lt1"/>
+          </a:fontRef>
+        </p:style>
+        <p:txBody>
+          <a:bodyPr rtlCol="0" anchor="ctr"/>
+          <a:lstStyle/>
+          <a:p>
+            <a:pPr algn="ctr"/>
+          </a:p>
+        </p:txBody>
+      </p:sp>
+      <p:sp>
+        <p:nvSpPr>
+          <p:cNvPr id="9" name="Rectangle 8"/>
+          <p:cNvSpPr/>
+          <p:nvPr/>
+        </p:nvSpPr>
+        <p:spPr>
+          <a:xfrm>
+            <a:off x="6263640" y="1234440"/>
+            <a:ext cx="91440" cy="1828800"/>
+          </a:xfrm>
+          <a:prstGeom prst="rect">
+            <a:avLst/>
+          </a:prstGeom>
+          <a:solidFill>
+            <a:srgbClr val="02C39A"/>
+          </a:solidFill>
+          <a:ln>
+            <a:noFill/>
+          </a:ln>
+        </p:spPr>
+        <p:style>
+          <a:lnRef idx="1">
+            <a:schemeClr val="accent1"/>
+          </a:lnRef>
+          <a:fillRef idx="3">
+            <a:schemeClr val="accent1"/>
+          </a:fillRef>
+          <a:effectRef idx="2">
+            <a:schemeClr val="accent1"/>
+          </a:effectRef>
+          <a:fontRef idx="minor">
+            <a:schemeClr val="lt1"/>
+          </a:fontRef>
+        </p:style>
+        <p:txBody>
+          <a:bodyPr rtlCol="0" anchor="ctr"/>
+          <a:lstStyle/>
+          <a:p>
+            <a:pPr algn="ctr"/>
+          </a:p>
+        </p:txBody>
+      </p:sp>
+      <p:sp>
+        <p:nvSpPr>
+          <p:cNvPr id="10" name="TextBox 9"/>
+          <p:cNvSpPr txBox="1"/>
+          <p:nvPr/>
+        </p:nvSpPr>
+        <p:spPr>
+          <a:xfrm>
+            <a:off x="6446520" y="1344168"/>
+            <a:ext cx="4983480" cy="1664208"/>
+          </a:xfrm>
+          <a:prstGeom prst="rect">
+            <a:avLst/>
+          </a:prstGeom>
+          <a:noFill/>
+        </p:spPr>
+        <p:txBody>
+          <a:bodyPr wrap="square" lIns="0" rIns="0">
+            <a:spAutoFit/>
+          </a:bodyPr>
+          <a:lstStyle/>
+          <a:p>
+            <a:pPr>
+              <a:defRPr b="1" sz="1500">
+                <a:solidFill>
+                  <a:srgbClr val="1E2761"/>
+                </a:solidFill>
+                <a:latin typeface="Aptos Display"/>
+              </a:defRPr>
+            </a:pPr>
+            <a:r>
+              <a:t>Why it helps</a:t>
             </a:r>
           </a:p>
           <a:p>
@@ -13889,25 +13309,25 @@
               </a:defRPr>
             </a:pPr>
             <a:r>
-              <a:t>• Semantic model reuse</a:t>
+              <a:t>• Analyze in Excel</a:t>
             </a:r>
             <a:br/>
             <a:r>
-              <a:t>• Thin reports</a:t>
-            </a:r>
-          </a:p>
-        </p:txBody>
-      </p:sp>
-      <p:sp>
-        <p:nvSpPr>
-          <p:cNvPr id="8" name="Rounded Rectangle 7"/>
+              <a:t>• Downstream data access risk</a:t>
+            </a:r>
+          </a:p>
+        </p:txBody>
+      </p:sp>
+      <p:sp>
+        <p:nvSpPr>
+          <p:cNvPr id="11" name="Rounded Rectangle 10"/>
           <p:cNvSpPr/>
           <p:nvPr/>
         </p:nvSpPr>
         <p:spPr>
           <a:xfrm>
-            <a:off x="6263640" y="1234440"/>
-            <a:ext cx="5303520" cy="1828800"/>
+            <a:off x="822960" y="4160520"/>
+            <a:ext cx="10424160" cy="868680"/>
           </a:xfrm>
           <a:prstGeom prst="roundRect">
             <a:avLst/>
@@ -13945,20 +13365,20 @@
       </p:sp>
       <p:sp>
         <p:nvSpPr>
-          <p:cNvPr id="9" name="Rectangle 8"/>
+          <p:cNvPr id="12" name="Rectangle 11"/>
           <p:cNvSpPr/>
           <p:nvPr/>
         </p:nvSpPr>
         <p:spPr>
           <a:xfrm>
-            <a:off x="6263640" y="1234440"/>
-            <a:ext cx="91440" cy="1828800"/>
+            <a:off x="822960" y="4160520"/>
+            <a:ext cx="91440" cy="868680"/>
           </a:xfrm>
           <a:prstGeom prst="rect">
             <a:avLst/>
           </a:prstGeom>
           <a:solidFill>
-            <a:srgbClr val="02C39A"/>
+            <a:srgbClr val="F9B700"/>
           </a:solidFill>
           <a:ln>
             <a:noFill/>
@@ -13988,14 +13408,14 @@
       </p:sp>
       <p:sp>
         <p:nvSpPr>
-          <p:cNvPr id="10" name="TextBox 9"/>
+          <p:cNvPr id="13" name="TextBox 12"/>
           <p:cNvSpPr txBox="1"/>
           <p:nvPr/>
         </p:nvSpPr>
         <p:spPr>
           <a:xfrm>
-            <a:off x="6446520" y="1344168"/>
-            <a:ext cx="4983480" cy="1664208"/>
+            <a:off x="1005840" y="4270248"/>
+            <a:ext cx="10104120" cy="704088"/>
           </a:xfrm>
           <a:prstGeom prst="rect">
             <a:avLst/>
@@ -14017,167 +13437,7 @@
               </a:defRPr>
             </a:pPr>
             <a:r>
-              <a:t>Why it helps</a:t>
-            </a:r>
-          </a:p>
-          <a:p>
-            <a:pPr>
-              <a:spcBef>
-                <a:spcPts val="400"/>
-              </a:spcBef>
-              <a:defRPr sz="1050">
-                <a:solidFill>
-                  <a:srgbClr val="242424"/>
-                </a:solidFill>
-                <a:latin typeface="Aptos"/>
-              </a:defRPr>
-            </a:pPr>
-            <a:r>
-              <a:t>• Analyze in Excel</a:t>
-            </a:r>
-            <a:br/>
-            <a:r>
-              <a:t>• Downstream data access risk</a:t>
-            </a:r>
-          </a:p>
-        </p:txBody>
-      </p:sp>
-      <p:sp>
-        <p:nvSpPr>
-          <p:cNvPr id="11" name="Rounded Rectangle 10"/>
-          <p:cNvSpPr/>
-          <p:nvPr/>
-        </p:nvSpPr>
-        <p:spPr>
-          <a:xfrm>
-            <a:off x="822960" y="4160520"/>
-            <a:ext cx="10424160" cy="868680"/>
-          </a:xfrm>
-          <a:prstGeom prst="roundRect">
-            <a:avLst/>
-          </a:prstGeom>
-          <a:solidFill>
-            <a:srgbClr val="FFFFFF"/>
-          </a:solidFill>
-          <a:ln>
-            <a:solidFill>
-              <a:srgbClr val="DCDCDC"/>
-            </a:solidFill>
-          </a:ln>
-        </p:spPr>
-        <p:style>
-          <a:lnRef idx="1">
-            <a:schemeClr val="accent1"/>
-          </a:lnRef>
-          <a:fillRef idx="3">
-            <a:schemeClr val="accent1"/>
-          </a:fillRef>
-          <a:effectRef idx="2">
-            <a:schemeClr val="accent1"/>
-          </a:effectRef>
-          <a:fontRef idx="minor">
-            <a:schemeClr val="lt1"/>
-          </a:fontRef>
-        </p:style>
-        <p:txBody>
-          <a:bodyPr rtlCol="0" anchor="ctr"/>
-          <a:lstStyle/>
-          <a:p>
-            <a:pPr algn="ctr"/>
-          </a:p>
-        </p:txBody>
-      </p:sp>
-      <p:sp>
-        <p:nvSpPr>
-          <p:cNvPr id="12" name="Rectangle 11"/>
-          <p:cNvSpPr/>
-          <p:nvPr/>
-        </p:nvSpPr>
-        <p:spPr>
-          <a:xfrm>
-            <a:off x="822960" y="4160520"/>
-            <a:ext cx="91440" cy="868680"/>
-          </a:xfrm>
-          <a:prstGeom prst="rect">
-            <a:avLst/>
-          </a:prstGeom>
-          <a:solidFill>
-            <a:srgbClr val="F9B700"/>
-          </a:solidFill>
-          <a:ln>
-            <a:noFill/>
-          </a:ln>
-        </p:spPr>
-        <p:style>
-          <a:lnRef idx="1">
-            <a:schemeClr val="accent1"/>
-          </a:lnRef>
-          <a:fillRef idx="3">
-            <a:schemeClr val="accent1"/>
-          </a:fillRef>
-          <a:effectRef idx="2">
-            <a:schemeClr val="accent1"/>
-          </a:effectRef>
-          <a:fontRef idx="minor">
-            <a:schemeClr val="lt1"/>
-          </a:fontRef>
-        </p:style>
-        <p:txBody>
-          <a:bodyPr rtlCol="0" anchor="ctr"/>
-          <a:lstStyle/>
-          <a:p>
-            <a:pPr algn="ctr"/>
-          </a:p>
-        </p:txBody>
-      </p:sp>
-      <p:sp>
-        <p:nvSpPr>
-          <p:cNvPr id="13" name="TextBox 12"/>
-          <p:cNvSpPr txBox="1"/>
-          <p:nvPr/>
-        </p:nvSpPr>
-        <p:spPr>
-          <a:xfrm>
-            <a:off x="1005840" y="4270248"/>
-            <a:ext cx="10104120" cy="704088"/>
-          </a:xfrm>
-          <a:prstGeom prst="rect">
-            <a:avLst/>
-          </a:prstGeom>
-          <a:noFill/>
-        </p:spPr>
-        <p:txBody>
-          <a:bodyPr wrap="square" lIns="0" rIns="0">
-            <a:spAutoFit/>
-          </a:bodyPr>
-          <a:lstStyle/>
-          <a:p>
-            <a:pPr>
-              <a:defRPr b="1" sz="1500">
-                <a:solidFill>
-                  <a:srgbClr val="1E2761"/>
-                </a:solidFill>
-                <a:latin typeface="Aptos Display"/>
-              </a:defRPr>
-            </a:pPr>
-            <a:r>
-              <a:t>Lab connection</a:t>
-            </a:r>
-          </a:p>
-          <a:p>
-            <a:pPr>
-              <a:spcBef>
-                <a:spcPts val="400"/>
-              </a:spcBef>
-              <a:defRPr sz="1050">
-                <a:solidFill>
-                  <a:srgbClr val="242424"/>
-                </a:solidFill>
-                <a:latin typeface="Aptos"/>
-              </a:defRPr>
-            </a:pPr>
-            <a:r>
-              <a:t>Coverage: Covered. Use the lab README to demonstrate or discuss this topic. Review terms: reports.</a:t>
+              <a:t>In the lab, you will apply this pattern, validate the expected behavior, and discuss where it fits in a real Power BI solution.</a:t>
             </a:r>
           </a:p>
         </p:txBody>
@@ -14316,42 +13576,6 @@
       </p:sp>
       <p:sp>
         <p:nvSpPr>
-          <p:cNvPr id="4" name="TextBox 3"/>
-          <p:cNvSpPr txBox="1"/>
-          <p:nvPr/>
-        </p:nvSpPr>
-        <p:spPr>
-          <a:xfrm>
-            <a:off x="530352" y="914400"/>
-            <a:ext cx="10515600" cy="320040"/>
-          </a:xfrm>
-          <a:prstGeom prst="rect">
-            <a:avLst/>
-          </a:prstGeom>
-          <a:noFill/>
-        </p:spPr>
-        <p:txBody>
-          <a:bodyPr wrap="none">
-            <a:spAutoFit/>
-          </a:bodyPr>
-          <a:lstStyle/>
-          <a:p>
-            <a:pPr>
-              <a:defRPr sz="1200">
-                <a:solidFill>
-                  <a:srgbClr val="5C5C5C"/>
-                </a:solidFill>
-                <a:latin typeface="Aptos"/>
-              </a:defRPr>
-            </a:pPr>
-            <a:r>
-              <a:t>Talking points, learner value, and lab connection</a:t>
-            </a:r>
-          </a:p>
-        </p:txBody>
-      </p:sp>
-      <p:sp>
-        <p:nvSpPr>
           <p:cNvPr id="5" name="Rounded Rectangle 4"/>
           <p:cNvSpPr/>
           <p:nvPr/>
@@ -14469,7 +13693,139 @@
               </a:defRPr>
             </a:pPr>
             <a:r>
-              <a:t>Talking points</a:t>
+              <a:t>Key ideas</a:t>
+            </a:r>
+            <a:br/>
+            <a:r>
+              <a:t>• Hiding tables or columns</a:t>
+            </a:r>
+            <a:br/>
+            <a:r>
+              <a:t>• Tooling and capacity considerations</a:t>
+            </a:r>
+          </a:p>
+        </p:txBody>
+      </p:sp>
+      <p:sp>
+        <p:nvSpPr>
+          <p:cNvPr id="8" name="Rounded Rectangle 7"/>
+          <p:cNvSpPr/>
+          <p:nvPr/>
+        </p:nvSpPr>
+        <p:spPr>
+          <a:xfrm>
+            <a:off x="6263640" y="1234440"/>
+            <a:ext cx="5303520" cy="1828800"/>
+          </a:xfrm>
+          <a:prstGeom prst="roundRect">
+            <a:avLst/>
+          </a:prstGeom>
+          <a:solidFill>
+            <a:srgbClr val="FFFFFF"/>
+          </a:solidFill>
+          <a:ln>
+            <a:solidFill>
+              <a:srgbClr val="DCDCDC"/>
+            </a:solidFill>
+          </a:ln>
+        </p:spPr>
+        <p:style>
+          <a:lnRef idx="1">
+            <a:schemeClr val="accent1"/>
+          </a:lnRef>
+          <a:fillRef idx="3">
+            <a:schemeClr val="accent1"/>
+          </a:fillRef>
+          <a:effectRef idx="2">
+            <a:schemeClr val="accent1"/>
+          </a:effectRef>
+          <a:fontRef idx="minor">
+            <a:schemeClr val="lt1"/>
+          </a:fontRef>
+        </p:style>
+        <p:txBody>
+          <a:bodyPr rtlCol="0" anchor="ctr"/>
+          <a:lstStyle/>
+          <a:p>
+            <a:pPr algn="ctr"/>
+          </a:p>
+        </p:txBody>
+      </p:sp>
+      <p:sp>
+        <p:nvSpPr>
+          <p:cNvPr id="9" name="Rectangle 8"/>
+          <p:cNvSpPr/>
+          <p:nvPr/>
+        </p:nvSpPr>
+        <p:spPr>
+          <a:xfrm>
+            <a:off x="6263640" y="1234440"/>
+            <a:ext cx="91440" cy="1828800"/>
+          </a:xfrm>
+          <a:prstGeom prst="rect">
+            <a:avLst/>
+          </a:prstGeom>
+          <a:solidFill>
+            <a:srgbClr val="02C39A"/>
+          </a:solidFill>
+          <a:ln>
+            <a:noFill/>
+          </a:ln>
+        </p:spPr>
+        <p:style>
+          <a:lnRef idx="1">
+            <a:schemeClr val="accent1"/>
+          </a:lnRef>
+          <a:fillRef idx="3">
+            <a:schemeClr val="accent1"/>
+          </a:fillRef>
+          <a:effectRef idx="2">
+            <a:schemeClr val="accent1"/>
+          </a:effectRef>
+          <a:fontRef idx="minor">
+            <a:schemeClr val="lt1"/>
+          </a:fontRef>
+        </p:style>
+        <p:txBody>
+          <a:bodyPr rtlCol="0" anchor="ctr"/>
+          <a:lstStyle/>
+          <a:p>
+            <a:pPr algn="ctr"/>
+          </a:p>
+        </p:txBody>
+      </p:sp>
+      <p:sp>
+        <p:nvSpPr>
+          <p:cNvPr id="10" name="TextBox 9"/>
+          <p:cNvSpPr txBox="1"/>
+          <p:nvPr/>
+        </p:nvSpPr>
+        <p:spPr>
+          <a:xfrm>
+            <a:off x="6446520" y="1344168"/>
+            <a:ext cx="4983480" cy="1664208"/>
+          </a:xfrm>
+          <a:prstGeom prst="rect">
+            <a:avLst/>
+          </a:prstGeom>
+          <a:noFill/>
+        </p:spPr>
+        <p:txBody>
+          <a:bodyPr wrap="square" lIns="0" rIns="0">
+            <a:spAutoFit/>
+          </a:bodyPr>
+          <a:lstStyle/>
+          <a:p>
+            <a:pPr>
+              <a:defRPr b="1" sz="1500">
+                <a:solidFill>
+                  <a:srgbClr val="1E2761"/>
+                </a:solidFill>
+                <a:latin typeface="Aptos Display"/>
+              </a:defRPr>
+            </a:pPr>
+            <a:r>
+              <a:t>Why it helps</a:t>
             </a:r>
           </a:p>
           <a:p>
@@ -14485,25 +13841,21 @@
               </a:defRPr>
             </a:pPr>
             <a:r>
-              <a:t>• Hiding tables or columns</a:t>
-            </a:r>
-            <a:br/>
-            <a:r>
-              <a:t>• Tooling and capacity considerations</a:t>
-            </a:r>
-          </a:p>
-        </p:txBody>
-      </p:sp>
-      <p:sp>
-        <p:nvSpPr>
-          <p:cNvPr id="8" name="Rounded Rectangle 7"/>
+              <a:t>• Validation requirements</a:t>
+            </a:r>
+          </a:p>
+        </p:txBody>
+      </p:sp>
+      <p:sp>
+        <p:nvSpPr>
+          <p:cNvPr id="11" name="Rounded Rectangle 10"/>
           <p:cNvSpPr/>
           <p:nvPr/>
         </p:nvSpPr>
         <p:spPr>
           <a:xfrm>
-            <a:off x="6263640" y="1234440"/>
-            <a:ext cx="5303520" cy="1828800"/>
+            <a:off x="822960" y="4160520"/>
+            <a:ext cx="10424160" cy="868680"/>
           </a:xfrm>
           <a:prstGeom prst="roundRect">
             <a:avLst/>
@@ -14541,20 +13893,20 @@
       </p:sp>
       <p:sp>
         <p:nvSpPr>
-          <p:cNvPr id="9" name="Rectangle 8"/>
+          <p:cNvPr id="12" name="Rectangle 11"/>
           <p:cNvSpPr/>
           <p:nvPr/>
         </p:nvSpPr>
         <p:spPr>
           <a:xfrm>
-            <a:off x="6263640" y="1234440"/>
-            <a:ext cx="91440" cy="1828800"/>
+            <a:off x="822960" y="4160520"/>
+            <a:ext cx="91440" cy="868680"/>
           </a:xfrm>
           <a:prstGeom prst="rect">
             <a:avLst/>
           </a:prstGeom>
           <a:solidFill>
-            <a:srgbClr val="02C39A"/>
+            <a:srgbClr val="F9B700"/>
           </a:solidFill>
           <a:ln>
             <a:noFill/>
@@ -14584,14 +13936,14 @@
       </p:sp>
       <p:sp>
         <p:nvSpPr>
-          <p:cNvPr id="10" name="TextBox 9"/>
+          <p:cNvPr id="13" name="TextBox 12"/>
           <p:cNvSpPr txBox="1"/>
           <p:nvPr/>
         </p:nvSpPr>
         <p:spPr>
           <a:xfrm>
-            <a:off x="6446520" y="1344168"/>
-            <a:ext cx="4983480" cy="1664208"/>
+            <a:off x="1005840" y="4270248"/>
+            <a:ext cx="10104120" cy="704088"/>
           </a:xfrm>
           <a:prstGeom prst="rect">
             <a:avLst/>
@@ -14613,163 +13965,7 @@
               </a:defRPr>
             </a:pPr>
             <a:r>
-              <a:t>Why it helps</a:t>
-            </a:r>
-          </a:p>
-          <a:p>
-            <a:pPr>
-              <a:spcBef>
-                <a:spcPts val="400"/>
-              </a:spcBef>
-              <a:defRPr sz="1050">
-                <a:solidFill>
-                  <a:srgbClr val="242424"/>
-                </a:solidFill>
-                <a:latin typeface="Aptos"/>
-              </a:defRPr>
-            </a:pPr>
-            <a:r>
-              <a:t>• Validation requirements</a:t>
-            </a:r>
-          </a:p>
-        </p:txBody>
-      </p:sp>
-      <p:sp>
-        <p:nvSpPr>
-          <p:cNvPr id="11" name="Rounded Rectangle 10"/>
-          <p:cNvSpPr/>
-          <p:nvPr/>
-        </p:nvSpPr>
-        <p:spPr>
-          <a:xfrm>
-            <a:off x="822960" y="4160520"/>
-            <a:ext cx="10424160" cy="868680"/>
-          </a:xfrm>
-          <a:prstGeom prst="roundRect">
-            <a:avLst/>
-          </a:prstGeom>
-          <a:solidFill>
-            <a:srgbClr val="FFFFFF"/>
-          </a:solidFill>
-          <a:ln>
-            <a:solidFill>
-              <a:srgbClr val="DCDCDC"/>
-            </a:solidFill>
-          </a:ln>
-        </p:spPr>
-        <p:style>
-          <a:lnRef idx="1">
-            <a:schemeClr val="accent1"/>
-          </a:lnRef>
-          <a:fillRef idx="3">
-            <a:schemeClr val="accent1"/>
-          </a:fillRef>
-          <a:effectRef idx="2">
-            <a:schemeClr val="accent1"/>
-          </a:effectRef>
-          <a:fontRef idx="minor">
-            <a:schemeClr val="lt1"/>
-          </a:fontRef>
-        </p:style>
-        <p:txBody>
-          <a:bodyPr rtlCol="0" anchor="ctr"/>
-          <a:lstStyle/>
-          <a:p>
-            <a:pPr algn="ctr"/>
-          </a:p>
-        </p:txBody>
-      </p:sp>
-      <p:sp>
-        <p:nvSpPr>
-          <p:cNvPr id="12" name="Rectangle 11"/>
-          <p:cNvSpPr/>
-          <p:nvPr/>
-        </p:nvSpPr>
-        <p:spPr>
-          <a:xfrm>
-            <a:off x="822960" y="4160520"/>
-            <a:ext cx="91440" cy="868680"/>
-          </a:xfrm>
-          <a:prstGeom prst="rect">
-            <a:avLst/>
-          </a:prstGeom>
-          <a:solidFill>
-            <a:srgbClr val="F9B700"/>
-          </a:solidFill>
-          <a:ln>
-            <a:noFill/>
-          </a:ln>
-        </p:spPr>
-        <p:style>
-          <a:lnRef idx="1">
-            <a:schemeClr val="accent1"/>
-          </a:lnRef>
-          <a:fillRef idx="3">
-            <a:schemeClr val="accent1"/>
-          </a:fillRef>
-          <a:effectRef idx="2">
-            <a:schemeClr val="accent1"/>
-          </a:effectRef>
-          <a:fontRef idx="minor">
-            <a:schemeClr val="lt1"/>
-          </a:fontRef>
-        </p:style>
-        <p:txBody>
-          <a:bodyPr rtlCol="0" anchor="ctr"/>
-          <a:lstStyle/>
-          <a:p>
-            <a:pPr algn="ctr"/>
-          </a:p>
-        </p:txBody>
-      </p:sp>
-      <p:sp>
-        <p:nvSpPr>
-          <p:cNvPr id="13" name="TextBox 12"/>
-          <p:cNvSpPr txBox="1"/>
-          <p:nvPr/>
-        </p:nvSpPr>
-        <p:spPr>
-          <a:xfrm>
-            <a:off x="1005840" y="4270248"/>
-            <a:ext cx="10104120" cy="704088"/>
-          </a:xfrm>
-          <a:prstGeom prst="rect">
-            <a:avLst/>
-          </a:prstGeom>
-          <a:noFill/>
-        </p:spPr>
-        <p:txBody>
-          <a:bodyPr wrap="square" lIns="0" rIns="0">
-            <a:spAutoFit/>
-          </a:bodyPr>
-          <a:lstStyle/>
-          <a:p>
-            <a:pPr>
-              <a:defRPr b="1" sz="1500">
-                <a:solidFill>
-                  <a:srgbClr val="1E2761"/>
-                </a:solidFill>
-                <a:latin typeface="Aptos Display"/>
-              </a:defRPr>
-            </a:pPr>
-            <a:r>
-              <a:t>Lab connection</a:t>
-            </a:r>
-          </a:p>
-          <a:p>
-            <a:pPr>
-              <a:spcBef>
-                <a:spcPts val="400"/>
-              </a:spcBef>
-              <a:defRPr sz="1050">
-                <a:solidFill>
-                  <a:srgbClr val="242424"/>
-                </a:solidFill>
-                <a:latin typeface="Aptos"/>
-              </a:defRPr>
-            </a:pPr>
-            <a:r>
-              <a:t>Coverage: Covered. Use the lab README to demonstrate or discuss this topic. Review terms: considerations, hiding.</a:t>
+              <a:t>In the lab, you will apply this pattern, validate the expected behavior, and discuss where it fits in a real Power BI solution.</a:t>
             </a:r>
           </a:p>
         </p:txBody>
